--- a/3.3 Hoofdstuk 3 - Overheid/3.3.2 Paragraaf 2 - Overheidsbeleid/2. Leren/3.3.2 Overheidsbeleid – presentatie.pptx
+++ b/3.3 Hoofdstuk 3 - Overheid/3.3.2 Paragraaf 2 - Overheidsbeleid/2. Leren/3.3.2 Overheidsbeleid – presentatie.pptx
@@ -2057,6 +2057,8 @@
               </a:rPr>
               <a:t>Minimumprijs boven P* → aanbodoverschot</a:t>
             </a:r>
+          </a:p>
+          <a:p>
             <a:pPr algn="l" marL="342900" indent="-342900">
               <a:lnSpc>
                 <a:spcPct val="160000"/>
@@ -2078,6 +2080,8 @@
               </a:rPr>
               <a:t>Maximumprijs onder P* → vraagoverschot</a:t>
             </a:r>
+          </a:p>
+          <a:p>
             <a:pPr algn="l" marL="342900" indent="-342900">
               <a:lnSpc>
                 <a:spcPct val="160000"/>
@@ -2099,6 +2103,8 @@
               </a:rPr>
               <a:t>Minimumloon = minimumprijs op de arbeidsmarkt</a:t>
             </a:r>
+          </a:p>
+          <a:p>
             <a:pPr algn="l" marL="342900" indent="-342900">
               <a:lnSpc>
                 <a:spcPct val="160000"/>
@@ -2120,6 +2126,8 @@
               </a:rPr>
               <a:t>Accijns → aanbod verschuift omhoog, prijs stijgt</a:t>
             </a:r>
+          </a:p>
+          <a:p>
             <a:pPr algn="l" marL="342900" indent="-342900">
               <a:lnSpc>
                 <a:spcPct val="160000"/>
@@ -2141,7 +2149,6 @@
               </a:rPr>
               <a:t>Subsidie → aanbod verschuift omlaag, prijs daalt</a:t>
             </a:r>
-            <a:endParaRPr lang="en-US" sz="1500" dirty="0"/>
           </a:p>
         </p:txBody>
       </p:sp>
@@ -2290,6 +2297,8 @@
               </a:rPr>
               <a:t>Begrijpen waarom de overheid ingrijpt in markten</a:t>
             </a:r>
+          </a:p>
+          <a:p>
             <a:pPr algn="l" marL="342900" indent="-342900">
               <a:lnSpc>
                 <a:spcPct val="150000"/>
@@ -2311,6 +2320,8 @@
               </a:rPr>
               <a:t>Minimumprijs en maximumprijs analyseren</a:t>
             </a:r>
+          </a:p>
+          <a:p>
             <a:pPr algn="l" marL="342900" indent="-342900">
               <a:lnSpc>
                 <a:spcPct val="150000"/>
@@ -2332,6 +2343,8 @@
               </a:rPr>
               <a:t>Minimumloon op de arbeidsmarkt toepassen</a:t>
             </a:r>
+          </a:p>
+          <a:p>
             <a:pPr algn="l" marL="342900" indent="-342900">
               <a:lnSpc>
                 <a:spcPct val="150000"/>
@@ -2353,6 +2366,8 @@
               </a:rPr>
               <a:t>Het effect van een accijns uitleggen</a:t>
             </a:r>
+          </a:p>
+          <a:p>
             <a:pPr algn="l" marL="342900" indent="-342900">
               <a:lnSpc>
                 <a:spcPct val="150000"/>
@@ -2374,7 +2389,6 @@
               </a:rPr>
               <a:t>Het effect van een subsidie op surplus analyseren</a:t>
             </a:r>
-            <a:endParaRPr lang="en-US" sz="1500" dirty="0"/>
           </a:p>
         </p:txBody>
       </p:sp>
@@ -2509,6 +2523,10 @@
             </a:outerShdw>
           </a:effectLst>
         </p:spPr>
+        <p:txBody>
+          <a:bodyPr/>
+          <a:p/>
+        </p:txBody>
       </p:sp>
       <p:sp>
         <p:nvSpPr>
@@ -2577,6 +2595,10 @@
             </a:outerShdw>
           </a:effectLst>
         </p:spPr>
+        <p:txBody>
+          <a:bodyPr/>
+          <a:p/>
+        </p:txBody>
       </p:sp>
       <p:sp>
         <p:nvSpPr>
@@ -2645,6 +2667,10 @@
             </a:outerShdw>
           </a:effectLst>
         </p:spPr>
+        <p:txBody>
+          <a:bodyPr/>
+          <a:p/>
+        </p:txBody>
       </p:sp>
       <p:sp>
         <p:nvSpPr>
@@ -2713,6 +2739,10 @@
             </a:outerShdw>
           </a:effectLst>
         </p:spPr>
+        <p:txBody>
+          <a:bodyPr/>
+          <a:p/>
+        </p:txBody>
       </p:sp>
       <p:sp>
         <p:nvSpPr>
@@ -2845,6 +2875,10 @@
             </a:outerShdw>
           </a:effectLst>
         </p:spPr>
+        <p:txBody>
+          <a:bodyPr/>
+          <a:p/>
+        </p:txBody>
       </p:sp>
       <p:sp>
         <p:nvSpPr>
@@ -2865,6 +2899,10 @@
           </a:solidFill>
           <a:ln/>
         </p:spPr>
+        <p:txBody>
+          <a:bodyPr/>
+          <a:p/>
+        </p:txBody>
       </p:sp>
       <p:sp>
         <p:nvSpPr>
@@ -3119,6 +3157,10 @@
             </a:outerShdw>
           </a:effectLst>
         </p:spPr>
+        <p:txBody>
+          <a:bodyPr/>
+          <a:p/>
+        </p:txBody>
       </p:sp>
       <p:sp>
         <p:nvSpPr>
@@ -3139,6 +3181,10 @@
           </a:solidFill>
           <a:ln/>
         </p:spPr>
+        <p:txBody>
+          <a:bodyPr/>
+          <a:p/>
+        </p:txBody>
       </p:sp>
       <p:sp>
         <p:nvSpPr>
@@ -3366,6 +3412,10 @@
             </a:outerShdw>
           </a:effectLst>
         </p:spPr>
+        <p:txBody>
+          <a:bodyPr/>
+          <a:p/>
+        </p:txBody>
       </p:sp>
       <p:sp>
         <p:nvSpPr>
@@ -3386,6 +3436,10 @@
           </a:solidFill>
           <a:ln/>
         </p:spPr>
+        <p:txBody>
+          <a:bodyPr/>
+          <a:p/>
+        </p:txBody>
       </p:sp>
       <p:sp>
         <p:nvSpPr>
@@ -3640,6 +3694,10 @@
             </a:outerShdw>
           </a:effectLst>
         </p:spPr>
+        <p:txBody>
+          <a:bodyPr/>
+          <a:p/>
+        </p:txBody>
       </p:sp>
       <p:sp>
         <p:nvSpPr>
@@ -3660,6 +3718,10 @@
           </a:solidFill>
           <a:ln/>
         </p:spPr>
+        <p:txBody>
+          <a:bodyPr/>
+          <a:p/>
+        </p:txBody>
       </p:sp>
       <p:sp>
         <p:nvSpPr>
@@ -3887,6 +3949,10 @@
             </a:outerShdw>
           </a:effectLst>
         </p:spPr>
+        <p:txBody>
+          <a:bodyPr/>
+          <a:p/>
+        </p:txBody>
       </p:sp>
       <p:sp>
         <p:nvSpPr>
@@ -3907,6 +3973,10 @@
           </a:solidFill>
           <a:ln/>
         </p:spPr>
+        <p:txBody>
+          <a:bodyPr/>
+          <a:p/>
+        </p:txBody>
       </p:sp>
       <p:sp>
         <p:nvSpPr>
@@ -4054,6 +4124,10 @@
             </a:outerShdw>
           </a:effectLst>
         </p:spPr>
+        <p:txBody>
+          <a:bodyPr/>
+          <a:p/>
+        </p:txBody>
       </p:sp>
       <p:sp>
         <p:nvSpPr>
@@ -4074,6 +4148,10 @@
           </a:solidFill>
           <a:ln/>
         </p:spPr>
+        <p:txBody>
+          <a:bodyPr/>
+          <a:p/>
+        </p:txBody>
       </p:sp>
       <p:sp>
         <p:nvSpPr>
@@ -4214,6 +4292,10 @@
           </a:solidFill>
           <a:ln/>
         </p:spPr>
+        <p:txBody>
+          <a:bodyPr/>
+          <a:p/>
+        </p:txBody>
       </p:sp>
       <p:sp>
         <p:nvSpPr>
@@ -4234,6 +4316,10 @@
           </a:solidFill>
           <a:ln/>
         </p:spPr>
+        <p:txBody>
+          <a:bodyPr/>
+          <a:p/>
+        </p:txBody>
       </p:sp>
       <p:sp>
         <p:nvSpPr>
@@ -4359,6 +4445,10 @@
           </a:solidFill>
           <a:ln/>
         </p:spPr>
+        <p:txBody>
+          <a:bodyPr/>
+          <a:p/>
+        </p:txBody>
       </p:sp>
       <p:sp>
         <p:nvSpPr>
@@ -4379,6 +4469,10 @@
           </a:solidFill>
           <a:ln/>
         </p:spPr>
+        <p:txBody>
+          <a:bodyPr/>
+          <a:p/>
+        </p:txBody>
       </p:sp>
       <p:sp>
         <p:nvSpPr>
@@ -4464,6 +4558,10 @@
             </a:outerShdw>
           </a:effectLst>
         </p:spPr>
+        <p:txBody>
+          <a:bodyPr/>
+          <a:p/>
+        </p:txBody>
       </p:sp>
       <p:sp>
         <p:nvSpPr>
@@ -4484,6 +4582,10 @@
           </a:solidFill>
           <a:ln/>
         </p:spPr>
+        <p:txBody>
+          <a:bodyPr/>
+          <a:p/>
+        </p:txBody>
       </p:sp>
       <p:sp>
         <p:nvSpPr>
@@ -4594,6 +4696,10 @@
             </a:outerShdw>
           </a:effectLst>
         </p:spPr>
+        <p:txBody>
+          <a:bodyPr/>
+          <a:p/>
+        </p:txBody>
       </p:sp>
       <p:sp>
         <p:nvSpPr>
@@ -4614,6 +4720,10 @@
           </a:solidFill>
           <a:ln/>
         </p:spPr>
+        <p:txBody>
+          <a:bodyPr/>
+          <a:p/>
+        </p:txBody>
       </p:sp>
       <p:sp>
         <p:nvSpPr>
@@ -4793,6 +4903,10 @@
             </a:outerShdw>
           </a:effectLst>
         </p:spPr>
+        <p:txBody>
+          <a:bodyPr/>
+          <a:p/>
+        </p:txBody>
       </p:sp>
       <p:sp>
         <p:nvSpPr>
@@ -4905,6 +5019,10 @@
             </a:outerShdw>
           </a:effectLst>
         </p:spPr>
+        <p:txBody>
+          <a:bodyPr/>
+          <a:p/>
+        </p:txBody>
       </p:sp>
       <p:sp>
         <p:nvSpPr>
@@ -5017,6 +5135,10 @@
             </a:outerShdw>
           </a:effectLst>
         </p:spPr>
+        <p:txBody>
+          <a:bodyPr/>
+          <a:p/>
+        </p:txBody>
       </p:sp>
       <p:sp>
         <p:nvSpPr>
@@ -5129,6 +5251,10 @@
             </a:outerShdw>
           </a:effectLst>
         </p:spPr>
+        <p:txBody>
+          <a:bodyPr/>
+          <a:p/>
+        </p:txBody>
       </p:sp>
       <p:sp>
         <p:nvSpPr>
@@ -5241,6 +5367,10 @@
             </a:outerShdw>
           </a:effectLst>
         </p:spPr>
+        <p:txBody>
+          <a:bodyPr/>
+          <a:p/>
+        </p:txBody>
       </p:sp>
       <p:sp>
         <p:nvSpPr>
@@ -5309,6 +5439,10 @@
             </a:outerShdw>
           </a:effectLst>
         </p:spPr>
+        <p:txBody>
+          <a:bodyPr/>
+          <a:p/>
+        </p:txBody>
       </p:sp>
       <p:sp>
         <p:nvSpPr>
@@ -5329,6 +5463,10 @@
           </a:solidFill>
           <a:ln/>
         </p:spPr>
+        <p:txBody>
+          <a:bodyPr/>
+          <a:p/>
+        </p:txBody>
       </p:sp>
       <p:sp>
         <p:nvSpPr>
@@ -5521,6 +5659,10 @@
             </a:outerShdw>
           </a:effectLst>
         </p:spPr>
+        <p:txBody>
+          <a:bodyPr/>
+          <a:p/>
+        </p:txBody>
       </p:sp>
       <p:sp>
         <p:nvSpPr>
@@ -5541,6 +5683,10 @@
           </a:solidFill>
           <a:ln/>
         </p:spPr>
+        <p:txBody>
+          <a:bodyPr/>
+          <a:p/>
+        </p:txBody>
       </p:sp>
       <p:sp>
         <p:nvSpPr>
@@ -5760,6 +5906,10 @@
             </a:outerShdw>
           </a:effectLst>
         </p:spPr>
+        <p:txBody>
+          <a:bodyPr/>
+          <a:p/>
+        </p:txBody>
       </p:sp>
       <p:sp>
         <p:nvSpPr>
@@ -5780,6 +5930,10 @@
           </a:solidFill>
           <a:ln/>
         </p:spPr>
+        <p:txBody>
+          <a:bodyPr/>
+          <a:p/>
+        </p:txBody>
       </p:sp>
       <p:sp>
         <p:nvSpPr>

--- a/3.3 Hoofdstuk 3 - Overheid/3.3.2 Paragraaf 2 - Overheidsbeleid/2. Leren/3.3.2 Overheidsbeleid – presentatie.pptx
+++ b/3.3 Hoofdstuk 3 - Overheid/3.3.2 Paragraaf 2 - Overheidsbeleid/2. Leren/3.3.2 Overheidsbeleid – presentatie.pptx
@@ -15,9 +15,16 @@
     <p:sldId id="263" r:id="rId9"/>
     <p:sldId id="264" r:id="rId10"/>
     <p:sldId id="265" r:id="rId11"/>
+    <p:sldId id="266" r:id="rId12"/>
+    <p:sldId id="267" r:id="rId13"/>
+    <p:sldId id="268" r:id="rId14"/>
+    <p:sldId id="269" r:id="rId15"/>
+    <p:sldId id="270" r:id="rId16"/>
+    <p:sldId id="271" r:id="rId17"/>
+    <p:sldId id="272" r:id="rId18"/>
   </p:sldIdLst>
   <p:notesMasterIdLst>
-    <p:notesMasterId r:id="rId12"/>
+    <p:notesMasterId r:id="rId19"/>
   </p:notesMasterIdLst>
   <p:sldSz cx="9144000" cy="5143500"/>
   <p:notesSz cx="5143500" cy="9144000"/>
@@ -511,7 +518,7 @@
           <a:p>
             <a:r>
               <a:rPr lang="en-US" dirty="0"/>
-              <a:t>Welkom bij paragraaf 3.3.2 over overheidsbeleid. Vandaag behandelen we de concrete instrumenten waarmee de overheid ingrijpt: minimumprijs, maximumprijs, accijns en subsidie.</a:t>
+              <a:t>In deze paragraaf gaan we kijken naar vier concrete prijsinstrumenten: minimumprijs, maximumprijs, accijns en subsidie. De rode draad: de overheid stuurt markten via de prijs.</a:t>
             </a:r>
             <a:endParaRPr lang="en-US" dirty="0"/>
           </a:p>
@@ -599,7 +606,7 @@
           <a:p>
             <a:r>
               <a:rPr lang="en-US" dirty="0"/>
-              <a:t>Samenvatting: minimumprijs (overschot), maximumprijs (tekort), accijns (prijs omhoog), subsidie (prijs omlaag).</a:t>
+              <a:t>Let op de as-labels op de arbeidsmarkt: W (loon) op verticaal, L (arbeid) op horizontaal. Dit is structureel hetzelfde als een minimumprijs op een goederenmarkt.</a:t>
             </a:r>
             <a:endParaRPr lang="en-US" dirty="0"/>
           </a:p>
@@ -623,6 +630,622 @@
             <a:fld id="{F7021451-1387-4CA6-816F-3879F97B5CBC}" type="slidenum">
               <a:rPr lang="en-US"/>
               <a:t>10</a:t>
+            </a:fld>
+            <a:endParaRPr lang="en-US"/>
+          </a:p>
+        </p:txBody>
+      </p:sp>
+    </p:spTree>
+    <p:extLst>
+      <p:ext uri="{BB962C8B-B14F-4D97-AF65-F5344CB8AC3E}">
+        <p14:creationId xmlns:p14="http://schemas.microsoft.com/office/powerpoint/2010/main" val="1024086991"/>
+      </p:ext>
+    </p:extLst>
+  </p:cSld>
+  <p:clrMapOvr>
+    <a:masterClrMapping/>
+  </p:clrMapOvr>
+</p:notes>
+</file>
+
+<file path=ppt/notesSlides/notesSlide11.xml><?xml version="1.0" encoding="utf-8"?>
+<p:notes xmlns:a="http://schemas.openxmlformats.org/drawingml/2006/main" xmlns:r="http://schemas.openxmlformats.org/officeDocument/2006/relationships" xmlns:p="http://schemas.openxmlformats.org/presentationml/2006/main">
+  <p:cSld>
+    <p:spTree>
+      <p:nvGrpSpPr>
+        <p:cNvPr id="1" name=""/>
+        <p:cNvGrpSpPr/>
+        <p:nvPr/>
+      </p:nvGrpSpPr>
+      <p:grpSpPr>
+        <a:xfrm>
+          <a:off x="0" y="0"/>
+          <a:ext cx="0" cy="0"/>
+          <a:chOff x="0" y="0"/>
+          <a:chExt cx="0" cy="0"/>
+        </a:xfrm>
+      </p:grpSpPr>
+      <p:sp>
+        <p:nvSpPr>
+          <p:cNvPr id="2" name="Slide Image Placeholder 1"/>
+          <p:cNvSpPr>
+            <a:spLocks noGrp="1" noRot="1" noChangeAspect="1"/>
+          </p:cNvSpPr>
+          <p:nvPr>
+            <p:ph type="sldImg"/>
+          </p:nvPr>
+        </p:nvSpPr>
+        <p:spPr/>
+      </p:sp>
+      <p:sp>
+        <p:nvSpPr>
+          <p:cNvPr id="3" name="Notes Placeholder 2"/>
+          <p:cNvSpPr>
+            <a:spLocks noGrp="1"/>
+          </p:cNvSpPr>
+          <p:nvPr>
+            <p:ph type="body" idx="1"/>
+          </p:nvPr>
+        </p:nvSpPr>
+        <p:spPr/>
+        <p:txBody>
+          <a:bodyPr/>
+          <a:lstStyle/>
+          <a:p>
+            <a:r>
+              <a:rPr lang="en-US" dirty="0"/>
+              <a:t>Bij Wmin=30 vragen bedrijven 20 arbeiders, maar 40 willen werken. Het rode blok (20) is de werkloosheid.</a:t>
+            </a:r>
+            <a:endParaRPr lang="en-US" dirty="0"/>
+          </a:p>
+        </p:txBody>
+      </p:sp>
+      <p:sp>
+        <p:nvSpPr>
+          <p:cNvPr id="4" name="Slide Number Placeholder 3"/>
+          <p:cNvSpPr>
+            <a:spLocks noGrp="1"/>
+          </p:cNvSpPr>
+          <p:nvPr>
+            <p:ph type="sldNum" sz="quarter" idx="10"/>
+          </p:nvPr>
+        </p:nvSpPr>
+        <p:spPr/>
+        <p:txBody>
+          <a:bodyPr/>
+          <a:lstStyle/>
+          <a:p>
+            <a:fld id="{F7021451-1387-4CA6-816F-3879F97B5CBC}" type="slidenum">
+              <a:rPr lang="en-US"/>
+              <a:t>11</a:t>
+            </a:fld>
+            <a:endParaRPr lang="en-US"/>
+          </a:p>
+        </p:txBody>
+      </p:sp>
+    </p:spTree>
+    <p:extLst>
+      <p:ext uri="{BB962C8B-B14F-4D97-AF65-F5344CB8AC3E}">
+        <p14:creationId xmlns:p14="http://schemas.microsoft.com/office/powerpoint/2010/main" val="1024086991"/>
+      </p:ext>
+    </p:extLst>
+  </p:cSld>
+  <p:clrMapOvr>
+    <a:masterClrMapping/>
+  </p:clrMapOvr>
+</p:notes>
+</file>
+
+<file path=ppt/notesSlides/notesSlide12.xml><?xml version="1.0" encoding="utf-8"?>
+<p:notes xmlns:a="http://schemas.openxmlformats.org/drawingml/2006/main" xmlns:r="http://schemas.openxmlformats.org/officeDocument/2006/relationships" xmlns:p="http://schemas.openxmlformats.org/presentationml/2006/main">
+  <p:cSld>
+    <p:spTree>
+      <p:nvGrpSpPr>
+        <p:cNvPr id="1" name=""/>
+        <p:cNvGrpSpPr/>
+        <p:nvPr/>
+      </p:nvGrpSpPr>
+      <p:grpSpPr>
+        <a:xfrm>
+          <a:off x="0" y="0"/>
+          <a:ext cx="0" cy="0"/>
+          <a:chOff x="0" y="0"/>
+          <a:chExt cx="0" cy="0"/>
+        </a:xfrm>
+      </p:grpSpPr>
+      <p:sp>
+        <p:nvSpPr>
+          <p:cNvPr id="2" name="Slide Image Placeholder 1"/>
+          <p:cNvSpPr>
+            <a:spLocks noGrp="1" noRot="1" noChangeAspect="1"/>
+          </p:cNvSpPr>
+          <p:nvPr>
+            <p:ph type="sldImg"/>
+          </p:nvPr>
+        </p:nvSpPr>
+        <p:spPr/>
+      </p:sp>
+      <p:sp>
+        <p:nvSpPr>
+          <p:cNvPr id="3" name="Notes Placeholder 2"/>
+          <p:cNvSpPr>
+            <a:spLocks noGrp="1"/>
+          </p:cNvSpPr>
+          <p:nvPr>
+            <p:ph type="body" idx="1"/>
+          </p:nvPr>
+        </p:nvSpPr>
+        <p:spPr/>
+        <p:txBody>
+          <a:bodyPr/>
+          <a:lstStyle/>
+          <a:p>
+            <a:r>
+              <a:rPr lang="en-US" dirty="0"/>
+              <a:t>Kernpunt: de prijsstijging is kleiner dan de accijns. Dat komt omdat consumenten minder gaan kopen als de prijs stijgt — dus de producent moet ook een deel van de accijns dragen.</a:t>
+            </a:r>
+            <a:endParaRPr lang="en-US" dirty="0"/>
+          </a:p>
+        </p:txBody>
+      </p:sp>
+      <p:sp>
+        <p:nvSpPr>
+          <p:cNvPr id="4" name="Slide Number Placeholder 3"/>
+          <p:cNvSpPr>
+            <a:spLocks noGrp="1"/>
+          </p:cNvSpPr>
+          <p:nvPr>
+            <p:ph type="sldNum" sz="quarter" idx="10"/>
+          </p:nvPr>
+        </p:nvSpPr>
+        <p:spPr/>
+        <p:txBody>
+          <a:bodyPr/>
+          <a:lstStyle/>
+          <a:p>
+            <a:fld id="{F7021451-1387-4CA6-816F-3879F97B5CBC}" type="slidenum">
+              <a:rPr lang="en-US"/>
+              <a:t>12</a:t>
+            </a:fld>
+            <a:endParaRPr lang="en-US"/>
+          </a:p>
+        </p:txBody>
+      </p:sp>
+    </p:spTree>
+    <p:extLst>
+      <p:ext uri="{BB962C8B-B14F-4D97-AF65-F5344CB8AC3E}">
+        <p14:creationId xmlns:p14="http://schemas.microsoft.com/office/powerpoint/2010/main" val="1024086991"/>
+      </p:ext>
+    </p:extLst>
+  </p:cSld>
+  <p:clrMapOvr>
+    <a:masterClrMapping/>
+  </p:clrMapOvr>
+</p:notes>
+</file>
+
+<file path=ppt/notesSlides/notesSlide13.xml><?xml version="1.0" encoding="utf-8"?>
+<p:notes xmlns:a="http://schemas.openxmlformats.org/drawingml/2006/main" xmlns:r="http://schemas.openxmlformats.org/officeDocument/2006/relationships" xmlns:p="http://schemas.openxmlformats.org/presentationml/2006/main">
+  <p:cSld>
+    <p:spTree>
+      <p:nvGrpSpPr>
+        <p:cNvPr id="1" name=""/>
+        <p:cNvGrpSpPr/>
+        <p:nvPr/>
+      </p:nvGrpSpPr>
+      <p:grpSpPr>
+        <a:xfrm>
+          <a:off x="0" y="0"/>
+          <a:ext cx="0" cy="0"/>
+          <a:chOff x="0" y="0"/>
+          <a:chExt cx="0" cy="0"/>
+        </a:xfrm>
+      </p:grpSpPr>
+      <p:sp>
+        <p:nvSpPr>
+          <p:cNvPr id="2" name="Slide Image Placeholder 1"/>
+          <p:cNvSpPr>
+            <a:spLocks noGrp="1" noRot="1" noChangeAspect="1"/>
+          </p:cNvSpPr>
+          <p:nvPr>
+            <p:ph type="sldImg"/>
+          </p:nvPr>
+        </p:nvSpPr>
+        <p:spPr/>
+      </p:sp>
+      <p:sp>
+        <p:nvSpPr>
+          <p:cNvPr id="3" name="Notes Placeholder 2"/>
+          <p:cNvSpPr>
+            <a:spLocks noGrp="1"/>
+          </p:cNvSpPr>
+          <p:nvPr>
+            <p:ph type="body" idx="1"/>
+          </p:nvPr>
+        </p:nvSpPr>
+        <p:spPr/>
+        <p:txBody>
+          <a:bodyPr/>
+          <a:lstStyle/>
+          <a:p>
+            <a:r>
+              <a:rPr lang="en-US" dirty="0"/>
+              <a:t>Accijns t=€6. Prijs stijgt van 10 naar 13 (consument +3). Producent ontvangt 7 (-3). De gele rechthoek is de belastingopbrengst (6 × 7 = €42).</a:t>
+            </a:r>
+            <a:endParaRPr lang="en-US" dirty="0"/>
+          </a:p>
+        </p:txBody>
+      </p:sp>
+      <p:sp>
+        <p:nvSpPr>
+          <p:cNvPr id="4" name="Slide Number Placeholder 3"/>
+          <p:cNvSpPr>
+            <a:spLocks noGrp="1"/>
+          </p:cNvSpPr>
+          <p:nvPr>
+            <p:ph type="sldNum" sz="quarter" idx="10"/>
+          </p:nvPr>
+        </p:nvSpPr>
+        <p:spPr/>
+        <p:txBody>
+          <a:bodyPr/>
+          <a:lstStyle/>
+          <a:p>
+            <a:fld id="{F7021451-1387-4CA6-816F-3879F97B5CBC}" type="slidenum">
+              <a:rPr lang="en-US"/>
+              <a:t>13</a:t>
+            </a:fld>
+            <a:endParaRPr lang="en-US"/>
+          </a:p>
+        </p:txBody>
+      </p:sp>
+    </p:spTree>
+    <p:extLst>
+      <p:ext uri="{BB962C8B-B14F-4D97-AF65-F5344CB8AC3E}">
+        <p14:creationId xmlns:p14="http://schemas.microsoft.com/office/powerpoint/2010/main" val="1024086991"/>
+      </p:ext>
+    </p:extLst>
+  </p:cSld>
+  <p:clrMapOvr>
+    <a:masterClrMapping/>
+  </p:clrMapOvr>
+</p:notes>
+</file>
+
+<file path=ppt/notesSlides/notesSlide14.xml><?xml version="1.0" encoding="utf-8"?>
+<p:notes xmlns:a="http://schemas.openxmlformats.org/drawingml/2006/main" xmlns:r="http://schemas.openxmlformats.org/officeDocument/2006/relationships" xmlns:p="http://schemas.openxmlformats.org/presentationml/2006/main">
+  <p:cSld>
+    <p:spTree>
+      <p:nvGrpSpPr>
+        <p:cNvPr id="1" name=""/>
+        <p:cNvGrpSpPr/>
+        <p:nvPr/>
+      </p:nvGrpSpPr>
+      <p:grpSpPr>
+        <a:xfrm>
+          <a:off x="0" y="0"/>
+          <a:ext cx="0" cy="0"/>
+          <a:chOff x="0" y="0"/>
+          <a:chExt cx="0" cy="0"/>
+        </a:xfrm>
+      </p:grpSpPr>
+      <p:sp>
+        <p:nvSpPr>
+          <p:cNvPr id="2" name="Slide Image Placeholder 1"/>
+          <p:cNvSpPr>
+            <a:spLocks noGrp="1" noRot="1" noChangeAspect="1"/>
+          </p:cNvSpPr>
+          <p:nvPr>
+            <p:ph type="sldImg"/>
+          </p:nvPr>
+        </p:nvSpPr>
+        <p:spPr/>
+      </p:sp>
+      <p:sp>
+        <p:nvSpPr>
+          <p:cNvPr id="3" name="Notes Placeholder 2"/>
+          <p:cNvSpPr>
+            <a:spLocks noGrp="1"/>
+          </p:cNvSpPr>
+          <p:nvPr>
+            <p:ph type="body" idx="1"/>
+          </p:nvPr>
+        </p:nvSpPr>
+        <p:spPr/>
+        <p:txBody>
+          <a:bodyPr/>
+          <a:lstStyle/>
+          <a:p>
+            <a:r>
+              <a:rPr lang="en-US" dirty="0"/>
+              <a:t>Een subsidie heeft omgekeerde effecten: prijs omlaag, hoeveelheid omhoog, beide partijen winnen. De kosten komen uit de schatkist.</a:t>
+            </a:r>
+            <a:endParaRPr lang="en-US" dirty="0"/>
+          </a:p>
+        </p:txBody>
+      </p:sp>
+      <p:sp>
+        <p:nvSpPr>
+          <p:cNvPr id="4" name="Slide Number Placeholder 3"/>
+          <p:cNvSpPr>
+            <a:spLocks noGrp="1"/>
+          </p:cNvSpPr>
+          <p:nvPr>
+            <p:ph type="sldNum" sz="quarter" idx="10"/>
+          </p:nvPr>
+        </p:nvSpPr>
+        <p:spPr/>
+        <p:txBody>
+          <a:bodyPr/>
+          <a:lstStyle/>
+          <a:p>
+            <a:fld id="{F7021451-1387-4CA6-816F-3879F97B5CBC}" type="slidenum">
+              <a:rPr lang="en-US"/>
+              <a:t>14</a:t>
+            </a:fld>
+            <a:endParaRPr lang="en-US"/>
+          </a:p>
+        </p:txBody>
+      </p:sp>
+    </p:spTree>
+    <p:extLst>
+      <p:ext uri="{BB962C8B-B14F-4D97-AF65-F5344CB8AC3E}">
+        <p14:creationId xmlns:p14="http://schemas.microsoft.com/office/powerpoint/2010/main" val="1024086991"/>
+      </p:ext>
+    </p:extLst>
+  </p:cSld>
+  <p:clrMapOvr>
+    <a:masterClrMapping/>
+  </p:clrMapOvr>
+</p:notes>
+</file>
+
+<file path=ppt/notesSlides/notesSlide15.xml><?xml version="1.0" encoding="utf-8"?>
+<p:notes xmlns:a="http://schemas.openxmlformats.org/drawingml/2006/main" xmlns:r="http://schemas.openxmlformats.org/officeDocument/2006/relationships" xmlns:p="http://schemas.openxmlformats.org/presentationml/2006/main">
+  <p:cSld>
+    <p:spTree>
+      <p:nvGrpSpPr>
+        <p:cNvPr id="1" name=""/>
+        <p:cNvGrpSpPr/>
+        <p:nvPr/>
+      </p:nvGrpSpPr>
+      <p:grpSpPr>
+        <a:xfrm>
+          <a:off x="0" y="0"/>
+          <a:ext cx="0" cy="0"/>
+          <a:chOff x="0" y="0"/>
+          <a:chExt cx="0" cy="0"/>
+        </a:xfrm>
+      </p:grpSpPr>
+      <p:sp>
+        <p:nvSpPr>
+          <p:cNvPr id="2" name="Slide Image Placeholder 1"/>
+          <p:cNvSpPr>
+            <a:spLocks noGrp="1" noRot="1" noChangeAspect="1"/>
+          </p:cNvSpPr>
+          <p:nvPr>
+            <p:ph type="sldImg"/>
+          </p:nvPr>
+        </p:nvSpPr>
+        <p:spPr/>
+      </p:sp>
+      <p:sp>
+        <p:nvSpPr>
+          <p:cNvPr id="3" name="Notes Placeholder 2"/>
+          <p:cNvSpPr>
+            <a:spLocks noGrp="1"/>
+          </p:cNvSpPr>
+          <p:nvPr>
+            <p:ph type="body" idx="1"/>
+          </p:nvPr>
+        </p:nvSpPr>
+        <p:spPr/>
+        <p:txBody>
+          <a:bodyPr/>
+          <a:lstStyle/>
+          <a:p>
+            <a:r>
+              <a:rPr lang="en-US" dirty="0"/>
+              <a:t>Subsidie s=€4. Consument betaalt €8 (was €10), producent ontvangt €12 (was €10). De gele rechthoek = overheidskosten (4 × 12 = €48).</a:t>
+            </a:r>
+            <a:endParaRPr lang="en-US" dirty="0"/>
+          </a:p>
+        </p:txBody>
+      </p:sp>
+      <p:sp>
+        <p:nvSpPr>
+          <p:cNvPr id="4" name="Slide Number Placeholder 3"/>
+          <p:cNvSpPr>
+            <a:spLocks noGrp="1"/>
+          </p:cNvSpPr>
+          <p:nvPr>
+            <p:ph type="sldNum" sz="quarter" idx="10"/>
+          </p:nvPr>
+        </p:nvSpPr>
+        <p:spPr/>
+        <p:txBody>
+          <a:bodyPr/>
+          <a:lstStyle/>
+          <a:p>
+            <a:fld id="{F7021451-1387-4CA6-816F-3879F97B5CBC}" type="slidenum">
+              <a:rPr lang="en-US"/>
+              <a:t>15</a:t>
+            </a:fld>
+            <a:endParaRPr lang="en-US"/>
+          </a:p>
+        </p:txBody>
+      </p:sp>
+    </p:spTree>
+    <p:extLst>
+      <p:ext uri="{BB962C8B-B14F-4D97-AF65-F5344CB8AC3E}">
+        <p14:creationId xmlns:p14="http://schemas.microsoft.com/office/powerpoint/2010/main" val="1024086991"/>
+      </p:ext>
+    </p:extLst>
+  </p:cSld>
+  <p:clrMapOvr>
+    <a:masterClrMapping/>
+  </p:clrMapOvr>
+</p:notes>
+</file>
+
+<file path=ppt/notesSlides/notesSlide16.xml><?xml version="1.0" encoding="utf-8"?>
+<p:notes xmlns:a="http://schemas.openxmlformats.org/drawingml/2006/main" xmlns:r="http://schemas.openxmlformats.org/officeDocument/2006/relationships" xmlns:p="http://schemas.openxmlformats.org/presentationml/2006/main">
+  <p:cSld>
+    <p:spTree>
+      <p:nvGrpSpPr>
+        <p:cNvPr id="1" name=""/>
+        <p:cNvGrpSpPr/>
+        <p:nvPr/>
+      </p:nvGrpSpPr>
+      <p:grpSpPr>
+        <a:xfrm>
+          <a:off x="0" y="0"/>
+          <a:ext cx="0" cy="0"/>
+          <a:chOff x="0" y="0"/>
+          <a:chExt cx="0" cy="0"/>
+        </a:xfrm>
+      </p:grpSpPr>
+      <p:sp>
+        <p:nvSpPr>
+          <p:cNvPr id="2" name="Slide Image Placeholder 1"/>
+          <p:cNvSpPr>
+            <a:spLocks noGrp="1" noRot="1" noChangeAspect="1"/>
+          </p:cNvSpPr>
+          <p:nvPr>
+            <p:ph type="sldImg"/>
+          </p:nvPr>
+        </p:nvSpPr>
+        <p:spPr/>
+      </p:sp>
+      <p:sp>
+        <p:nvSpPr>
+          <p:cNvPr id="3" name="Notes Placeholder 2"/>
+          <p:cNvSpPr>
+            <a:spLocks noGrp="1"/>
+          </p:cNvSpPr>
+          <p:nvPr>
+            <p:ph type="body" idx="1"/>
+          </p:nvPr>
+        </p:nvSpPr>
+        <p:spPr/>
+        <p:txBody>
+          <a:bodyPr/>
+          <a:lstStyle/>
+          <a:p>
+            <a:r>
+              <a:rPr lang="en-US" dirty="0"/>
+              <a:t>Benadruk valkuil 2: dit is een klassieke toetsvraag. De hele truc van de burden split hangt hiervan af.</a:t>
+            </a:r>
+            <a:endParaRPr lang="en-US" dirty="0"/>
+          </a:p>
+        </p:txBody>
+      </p:sp>
+      <p:sp>
+        <p:nvSpPr>
+          <p:cNvPr id="4" name="Slide Number Placeholder 3"/>
+          <p:cNvSpPr>
+            <a:spLocks noGrp="1"/>
+          </p:cNvSpPr>
+          <p:nvPr>
+            <p:ph type="sldNum" sz="quarter" idx="10"/>
+          </p:nvPr>
+        </p:nvSpPr>
+        <p:spPr/>
+        <p:txBody>
+          <a:bodyPr/>
+          <a:lstStyle/>
+          <a:p>
+            <a:fld id="{F7021451-1387-4CA6-816F-3879F97B5CBC}" type="slidenum">
+              <a:rPr lang="en-US"/>
+              <a:t>16</a:t>
+            </a:fld>
+            <a:endParaRPr lang="en-US"/>
+          </a:p>
+        </p:txBody>
+      </p:sp>
+    </p:spTree>
+    <p:extLst>
+      <p:ext uri="{BB962C8B-B14F-4D97-AF65-F5344CB8AC3E}">
+        <p14:creationId xmlns:p14="http://schemas.microsoft.com/office/powerpoint/2010/main" val="1024086991"/>
+      </p:ext>
+    </p:extLst>
+  </p:cSld>
+  <p:clrMapOvr>
+    <a:masterClrMapping/>
+  </p:clrMapOvr>
+</p:notes>
+</file>
+
+<file path=ppt/notesSlides/notesSlide17.xml><?xml version="1.0" encoding="utf-8"?>
+<p:notes xmlns:a="http://schemas.openxmlformats.org/drawingml/2006/main" xmlns:r="http://schemas.openxmlformats.org/officeDocument/2006/relationships" xmlns:p="http://schemas.openxmlformats.org/presentationml/2006/main">
+  <p:cSld>
+    <p:spTree>
+      <p:nvGrpSpPr>
+        <p:cNvPr id="1" name=""/>
+        <p:cNvGrpSpPr/>
+        <p:nvPr/>
+      </p:nvGrpSpPr>
+      <p:grpSpPr>
+        <a:xfrm>
+          <a:off x="0" y="0"/>
+          <a:ext cx="0" cy="0"/>
+          <a:chOff x="0" y="0"/>
+          <a:chExt cx="0" cy="0"/>
+        </a:xfrm>
+      </p:grpSpPr>
+      <p:sp>
+        <p:nvSpPr>
+          <p:cNvPr id="2" name="Slide Image Placeholder 1"/>
+          <p:cNvSpPr>
+            <a:spLocks noGrp="1" noRot="1" noChangeAspect="1"/>
+          </p:cNvSpPr>
+          <p:nvPr>
+            <p:ph type="sldImg"/>
+          </p:nvPr>
+        </p:nvSpPr>
+        <p:spPr/>
+      </p:sp>
+      <p:sp>
+        <p:nvSpPr>
+          <p:cNvPr id="3" name="Notes Placeholder 2"/>
+          <p:cNvSpPr>
+            <a:spLocks noGrp="1"/>
+          </p:cNvSpPr>
+          <p:nvPr>
+            <p:ph type="body" idx="1"/>
+          </p:nvPr>
+        </p:nvSpPr>
+        <p:spPr/>
+        <p:txBody>
+          <a:bodyPr/>
+          <a:lstStyle/>
+          <a:p>
+            <a:r>
+              <a:rPr lang="en-US" dirty="0"/>
+              <a:t>Sluit af met een retrieval-opdracht: laat leerlingen voor elk van de 4 instrumenten tekenen wat er gebeurt met P, Q, CS en PS.</a:t>
+            </a:r>
+            <a:endParaRPr lang="en-US" dirty="0"/>
+          </a:p>
+        </p:txBody>
+      </p:sp>
+      <p:sp>
+        <p:nvSpPr>
+          <p:cNvPr id="4" name="Slide Number Placeholder 3"/>
+          <p:cNvSpPr>
+            <a:spLocks noGrp="1"/>
+          </p:cNvSpPr>
+          <p:nvPr>
+            <p:ph type="sldNum" sz="quarter" idx="10"/>
+          </p:nvPr>
+        </p:nvSpPr>
+        <p:spPr/>
+        <p:txBody>
+          <a:bodyPr/>
+          <a:lstStyle/>
+          <a:p>
+            <a:fld id="{F7021451-1387-4CA6-816F-3879F97B5CBC}" type="slidenum">
+              <a:rPr lang="en-US"/>
+              <a:t>17</a:t>
             </a:fld>
             <a:endParaRPr lang="en-US"/>
           </a:p>
@@ -687,7 +1310,7 @@
           <a:p>
             <a:r>
               <a:rPr lang="en-US" dirty="0"/>
-              <a:t>Vijf leerdoelen voor deze les. We behandelen vier instrumenten: minimumprijs, maximumprijs, accijns en subsidie.</a:t>
+              <a:t>Kondig de vijf leerdoelen aan. Benadruk dat accijns en subsidie spiegelbeeld zijn.</a:t>
             </a:r>
             <a:endParaRPr lang="en-US" dirty="0"/>
           </a:p>
@@ -775,7 +1398,7 @@
           <a:p>
             <a:r>
               <a:rPr lang="en-US" dirty="0"/>
-              <a:t>De overheid grijpt in om marktfalen te corrigeren, consumenten te beschermen, of specifieke doelen te bereiken.</a:t>
+              <a:t>De kapstok. Links: overheid verlaagt de prijs (maximumprijs, subsidie). Rechts: overheid verhoogt de prijs (accijns, minimumprijs). Elk vakje komt in een eigen dia terug.</a:t>
             </a:r>
             <a:endParaRPr lang="en-US" dirty="0"/>
           </a:p>
@@ -863,7 +1486,7 @@
           <a:p>
             <a:r>
               <a:rPr lang="en-US" dirty="0"/>
-              <a:t>Bindende minimumprijs: de overheid stelt een prijs BOVEN de evenwichtsprijs. Gevolg: aanbodoverschot.</a:t>
+              <a:t>Link terug naar §3.3.1: marktfalen is de reden om in te grijpen. Dit hoofdstuk behandelt de concrete prijsinstrumenten.</a:t>
             </a:r>
             <a:endParaRPr lang="en-US" dirty="0"/>
           </a:p>
@@ -951,7 +1574,7 @@
           <a:p>
             <a:r>
               <a:rPr lang="en-US" dirty="0"/>
-              <a:t>Bindende maximumprijs: de overheid stelt een prijs ONDER de evenwichtsprijs. Gevolg: vraagoverschot.</a:t>
+              <a:t>Pmin is alleen bindend als hij BOVEN het marktevenwicht ligt. Vraag de klas: wat gebeurt er als Pmin onder P* ligt? (niets — markt mag boven Pmin uitkomen).</a:t>
             </a:r>
             <a:endParaRPr lang="en-US" dirty="0"/>
           </a:p>
@@ -1039,7 +1662,7 @@
           <a:p>
             <a:r>
               <a:rPr lang="en-US" dirty="0"/>
-              <a:t>Een prijsmaatregel werkt alleen als hij BINDEND is.</a:t>
+              <a:t>Lees samen: bij Pmin=40 vragen consumenten Q_V=10, aanbieders leveren Q_A=30. Het rode blok (20 eenheden) is het aanbodoverschot.</a:t>
             </a:r>
             <a:endParaRPr lang="en-US" dirty="0"/>
           </a:p>
@@ -1127,7 +1750,7 @@
           <a:p>
             <a:r>
               <a:rPr lang="en-US" dirty="0"/>
-              <a:t>Minimumloon: een minimumprijs voor arbeid. Boven evenwichtsloon ontstaat werkloosheid.</a:t>
+              <a:t>Pmax is alleen bindend als hij ONDER P* ligt. Benadruk de ongewenste neveneffecten: wachtlijsten, zwarte markt, kwaliteitsverlies.</a:t>
             </a:r>
             <a:endParaRPr lang="en-US" dirty="0"/>
           </a:p>
@@ -1215,7 +1838,7 @@
           <a:p>
             <a:r>
               <a:rPr lang="en-US" dirty="0"/>
-              <a:t>Accijns: een belasting per eenheid product. De aanbodlijn verschuift omhoog. De last wordt gedeeld tussen koper en verkoper.</a:t>
+              <a:t>Bij Pmax=20 willen consumenten Q_V=30, aanbieders leveren slechts Q_A=10. Het rode blok is het tekort (20 eenheden).</a:t>
             </a:r>
             <a:endParaRPr lang="en-US" dirty="0"/>
           </a:p>
@@ -1303,7 +1926,7 @@
           <a:p>
             <a:r>
               <a:rPr lang="en-US" dirty="0"/>
-              <a:t>Subsidie: het tegenovergestelde van accijns. CS en PS stijgen beide. Maar de overheid betaalt: subsidie maal hoeveelheid.</a:t>
+              <a:t>Ezelsbrug: 'Minimum BOVEN, Maximum ONDER' — alleen dan bijt de maatregel.</a:t>
             </a:r>
             <a:endParaRPr lang="en-US" dirty="0"/>
           </a:p>
@@ -1945,8 +2568,8 @@
         </p:nvSpPr>
         <p:spPr>
           <a:xfrm>
-            <a:off x="640080" y="457200"/>
-            <a:ext cx="7863840" cy="640080"/>
+            <a:off x="457200" y="0"/>
+            <a:ext cx="8229600" cy="685800"/>
           </a:xfrm>
           <a:prstGeom prst="rect">
             <a:avLst/>
@@ -1962,7 +2585,7 @@
               <a:buNone/>
             </a:pPr>
             <a:r>
-              <a:rPr lang="en-US" sz="2800" b="1" dirty="0">
+              <a:rPr lang="en-US" sz="2400" b="1" dirty="0">
                 <a:solidFill>
                   <a:srgbClr val="FFFFFF"/>
                 </a:solidFill>
@@ -1970,22 +2593,71 @@
                 <a:ea typeface="Arial" pitchFamily="34" charset="-122"/>
                 <a:cs typeface="Arial" pitchFamily="34" charset="-120"/>
               </a:rPr>
-              <a:t>Samenvatting</a:t>
-            </a:r>
-            <a:endParaRPr lang="en-US" sz="2800" dirty="0"/>
-          </a:p>
-        </p:txBody>
-      </p:sp>
-      <p:sp>
-        <p:nvSpPr>
-          <p:cNvPr id="3" name="Text 1"/>
-          <p:cNvSpPr/>
-          <p:nvPr/>
-        </p:nvSpPr>
-        <p:spPr>
-          <a:xfrm>
-            <a:off x="640080" y="1051560"/>
-            <a:ext cx="7863840" cy="365760"/>
+              <a:t>Minimumloon op de arbeidsmarkt</a:t>
+            </a:r>
+            <a:endParaRPr lang="en-US" sz="2400" dirty="0"/>
+          </a:p>
+        </p:txBody>
+      </p:sp>
+      <p:sp>
+        <p:nvSpPr>
+          <p:cNvPr id="3" name="Shape 1"/>
+          <p:cNvSpPr/>
+          <p:nvPr/>
+        </p:nvSpPr>
+        <p:spPr>
+          <a:xfrm>
+            <a:off x="457200" y="960120"/>
+            <a:ext cx="3931920" cy="3566160"/>
+          </a:xfrm>
+          <a:prstGeom prst="rect">
+            <a:avLst>
+              <a:gd name="adj" fmla="val 1282"/>
+            </a:avLst>
+          </a:prstGeom>
+          <a:solidFill>
+            <a:srgbClr val="E8F8F0"/>
+          </a:solidFill>
+          <a:ln/>
+          <a:effectLst>
+            <a:outerShdw sx="100000" sy="100000" kx="0" ky="0" algn="bl" rotWithShape="0" blurRad="76200" dist="25400" dir="8100000">
+              <a:srgbClr val="000000">
+                <a:alpha val="10000"/>
+              </a:srgbClr>
+            </a:outerShdw>
+          </a:effectLst>
+        </p:spPr>
+      </p:sp>
+      <p:sp>
+        <p:nvSpPr>
+          <p:cNvPr id="4" name="Shape 2"/>
+          <p:cNvSpPr/>
+          <p:nvPr/>
+        </p:nvSpPr>
+        <p:spPr>
+          <a:xfrm>
+            <a:off x="457200" y="960120"/>
+            <a:ext cx="54864" cy="3566160"/>
+          </a:xfrm>
+          <a:prstGeom prst="rect">
+            <a:avLst/>
+          </a:prstGeom>
+          <a:solidFill>
+            <a:srgbClr val="186A3B"/>
+          </a:solidFill>
+          <a:ln/>
+        </p:spPr>
+      </p:sp>
+      <p:sp>
+        <p:nvSpPr>
+          <p:cNvPr id="5" name="Text 3"/>
+          <p:cNvSpPr/>
+          <p:nvPr/>
+        </p:nvSpPr>
+        <p:spPr>
+          <a:xfrm>
+            <a:off x="640080" y="1069848"/>
+            <a:ext cx="3611880" cy="365760"/>
           </a:xfrm>
           <a:prstGeom prst="rect">
             <a:avLst/>
@@ -1994,37 +2666,37 @@
           <a:ln/>
         </p:spPr>
         <p:txBody>
-          <a:bodyPr wrap="square" rtlCol="0" anchor="ctr"/>
+          <a:bodyPr wrap="square" lIns="0" tIns="0" rIns="0" bIns="0" rtlCol="0" anchor="t"/>
           <a:lstStyle/>
           <a:p>
             <a:pPr indent="0" marL="0">
               <a:buNone/>
             </a:pPr>
             <a:r>
-              <a:rPr lang="en-US" sz="1400" i="1" dirty="0">
-                <a:solidFill>
-                  <a:srgbClr val="718096"/>
-                </a:solidFill>
-                <a:latin typeface="Arial" pitchFamily="34" charset="0"/>
-                <a:ea typeface="Arial" pitchFamily="34" charset="-122"/>
-                <a:cs typeface="Arial" pitchFamily="34" charset="-120"/>
-              </a:rPr>
-              <a:t>Beheers je dit voordat je gaat oefenen?</a:t>
-            </a:r>
-            <a:endParaRPr lang="en-US" sz="1400" dirty="0"/>
-          </a:p>
-        </p:txBody>
-      </p:sp>
-      <p:sp>
-        <p:nvSpPr>
-          <p:cNvPr id="4" name="Text 2"/>
-          <p:cNvSpPr/>
-          <p:nvPr/>
-        </p:nvSpPr>
-        <p:spPr>
-          <a:xfrm>
-            <a:off x="640080" y="1554480"/>
-            <a:ext cx="7863840" cy="2926080"/>
+              <a:rPr lang="en-US" sz="1800" b="1" dirty="0">
+                <a:solidFill>
+                  <a:srgbClr val="186A3B"/>
+                </a:solidFill>
+                <a:latin typeface="Arial" pitchFamily="34" charset="0"/>
+                <a:ea typeface="Arial" pitchFamily="34" charset="-122"/>
+                <a:cs typeface="Arial" pitchFamily="34" charset="-120"/>
+              </a:rPr>
+              <a:t>Wat is het?</a:t>
+            </a:r>
+            <a:endParaRPr lang="en-US" sz="1800" dirty="0"/>
+          </a:p>
+        </p:txBody>
+      </p:sp>
+      <p:sp>
+        <p:nvSpPr>
+          <p:cNvPr id="6" name="Text 4"/>
+          <p:cNvSpPr/>
+          <p:nvPr/>
+        </p:nvSpPr>
+        <p:spPr>
+          <a:xfrm>
+            <a:off x="640080" y="1463040"/>
+            <a:ext cx="3611880" cy="2926080"/>
           </a:xfrm>
           <a:prstGeom prst="rect">
             <a:avLst/>
@@ -2033,18 +2705,2902 @@
           <a:ln/>
         </p:spPr>
         <p:txBody>
-          <a:bodyPr wrap="square" rtlCol="0" anchor="t"/>
+          <a:bodyPr wrap="square" lIns="0" tIns="0" rIns="0" bIns="0" rtlCol="0" anchor="t"/>
           <a:lstStyle/>
           <a:p>
             <a:pPr algn="l" marL="342900" indent="-342900">
               <a:lnSpc>
-                <a:spcPct val="160000"/>
+                <a:spcPct val="120000"/>
+              </a:lnSpc>
+              <a:buSzPct val="100000"/>
+              <a:buChar char="■"/>
+            </a:pPr>
+            <a:r>
+              <a:rPr lang="en-US" sz="1300" b="1" dirty="0">
+                <a:solidFill>
+                  <a:srgbClr val="2D3748"/>
+                </a:solidFill>
+                <a:latin typeface="Arial" pitchFamily="34" charset="0"/>
+                <a:ea typeface="Arial" pitchFamily="34" charset="-122"/>
+                <a:cs typeface="Arial" pitchFamily="34" charset="-120"/>
+              </a:rPr>
+              <a:t>Minimumloon = minimumprijs op de arbeidsmarkt</a:t>
+            </a:r>
+            <a:endParaRPr lang="en-US" sz="1300" dirty="0"/>
+          </a:p>
+          <a:p>
+            <a:pPr algn="l" marL="342900" indent="-342900">
+              <a:lnSpc>
+                <a:spcPct val="120000"/>
+              </a:lnSpc>
+              <a:buSzPct val="100000"/>
+              <a:buChar char="■"/>
+            </a:pPr>
+            <a:r>
+              <a:rPr lang="en-US" sz="1300" dirty="0">
+                <a:solidFill>
+                  <a:srgbClr val="2D3748"/>
+                </a:solidFill>
+                <a:latin typeface="Arial" pitchFamily="34" charset="0"/>
+                <a:ea typeface="Arial" pitchFamily="34" charset="-122"/>
+                <a:cs typeface="Arial" pitchFamily="34" charset="-120"/>
+              </a:rPr>
+              <a:t>Ligt boven het evenwichtsloon</a:t>
+            </a:r>
+            <a:endParaRPr lang="en-US" sz="1300" dirty="0"/>
+          </a:p>
+          <a:p>
+            <a:pPr algn="l" marL="342900" indent="-342900">
+              <a:lnSpc>
+                <a:spcPct val="120000"/>
+              </a:lnSpc>
+              <a:buSzPct val="100000"/>
+              <a:buChar char="■"/>
+            </a:pPr>
+            <a:r>
+              <a:rPr lang="en-US" sz="1300" dirty="0">
+                <a:solidFill>
+                  <a:srgbClr val="2D3748"/>
+                </a:solidFill>
+                <a:latin typeface="Arial" pitchFamily="34" charset="0"/>
+                <a:ea typeface="Arial" pitchFamily="34" charset="-122"/>
+                <a:cs typeface="Arial" pitchFamily="34" charset="-120"/>
+              </a:rPr>
+              <a:t>Bedrijven = vraag naar arbeid (V_a)</a:t>
+            </a:r>
+            <a:endParaRPr lang="en-US" sz="1300" dirty="0"/>
+          </a:p>
+          <a:p>
+            <a:pPr algn="l" marL="342900" indent="-342900">
+              <a:lnSpc>
+                <a:spcPct val="120000"/>
+              </a:lnSpc>
+              <a:buSzPct val="100000"/>
+              <a:buChar char="■"/>
+            </a:pPr>
+            <a:r>
+              <a:rPr lang="en-US" sz="1300" dirty="0">
+                <a:solidFill>
+                  <a:srgbClr val="2D3748"/>
+                </a:solidFill>
+                <a:latin typeface="Arial" pitchFamily="34" charset="0"/>
+                <a:ea typeface="Arial" pitchFamily="34" charset="-122"/>
+                <a:cs typeface="Arial" pitchFamily="34" charset="-120"/>
+              </a:rPr>
+              <a:t>Werknemers = aanbod arbeid (A_a)</a:t>
+            </a:r>
+            <a:endParaRPr lang="en-US" sz="1300" dirty="0"/>
+          </a:p>
+          <a:p>
+            <a:pPr algn="l" indent="0" marL="0">
+              <a:lnSpc>
+                <a:spcPct val="120000"/>
+              </a:lnSpc>
+              <a:buNone/>
+            </a:pPr>
+            <a:r>
+              <a:rPr lang="en-US" sz="1300" b="1" dirty="0">
+                <a:solidFill>
+                  <a:srgbClr val="922B21"/>
+                </a:solidFill>
+                <a:latin typeface="Arial" pitchFamily="34" charset="0"/>
+                <a:ea typeface="Arial" pitchFamily="34" charset="-122"/>
+                <a:cs typeface="Arial" pitchFamily="34" charset="-120"/>
+              </a:rPr>
+              <a:t>→ aanbod &gt; vraag → werkloosheid</a:t>
+            </a:r>
+            <a:endParaRPr lang="en-US" sz="1300" dirty="0"/>
+          </a:p>
+        </p:txBody>
+      </p:sp>
+      <p:sp>
+        <p:nvSpPr>
+          <p:cNvPr id="7" name="Shape 5"/>
+          <p:cNvSpPr/>
+          <p:nvPr/>
+        </p:nvSpPr>
+        <p:spPr>
+          <a:xfrm>
+            <a:off x="4754880" y="960120"/>
+            <a:ext cx="3931920" cy="3566160"/>
+          </a:xfrm>
+          <a:prstGeom prst="rect">
+            <a:avLst>
+              <a:gd name="adj" fmla="val 1282"/>
+            </a:avLst>
+          </a:prstGeom>
+          <a:solidFill>
+            <a:srgbClr val="F9F6F1"/>
+          </a:solidFill>
+          <a:ln/>
+          <a:effectLst>
+            <a:outerShdw sx="100000" sy="100000" kx="0" ky="0" algn="bl" rotWithShape="0" blurRad="76200" dist="25400" dir="8100000">
+              <a:srgbClr val="000000">
+                <a:alpha val="10000"/>
+              </a:srgbClr>
+            </a:outerShdw>
+          </a:effectLst>
+        </p:spPr>
+      </p:sp>
+      <p:sp>
+        <p:nvSpPr>
+          <p:cNvPr id="8" name="Shape 6"/>
+          <p:cNvSpPr/>
+          <p:nvPr/>
+        </p:nvSpPr>
+        <p:spPr>
+          <a:xfrm>
+            <a:off x="4754880" y="960120"/>
+            <a:ext cx="54864" cy="3566160"/>
+          </a:xfrm>
+          <a:prstGeom prst="rect">
+            <a:avLst/>
+          </a:prstGeom>
+          <a:solidFill>
+            <a:srgbClr val="1A5276"/>
+          </a:solidFill>
+          <a:ln/>
+        </p:spPr>
+      </p:sp>
+      <p:sp>
+        <p:nvSpPr>
+          <p:cNvPr id="9" name="Text 7"/>
+          <p:cNvSpPr/>
+          <p:nvPr/>
+        </p:nvSpPr>
+        <p:spPr>
+          <a:xfrm>
+            <a:off x="4937760" y="1069848"/>
+            <a:ext cx="3611880" cy="365760"/>
+          </a:xfrm>
+          <a:prstGeom prst="rect">
+            <a:avLst/>
+          </a:prstGeom>
+          <a:noFill/>
+          <a:ln/>
+        </p:spPr>
+        <p:txBody>
+          <a:bodyPr wrap="square" lIns="0" tIns="0" rIns="0" bIns="0" rtlCol="0" anchor="t"/>
+          <a:lstStyle/>
+          <a:p>
+            <a:pPr indent="0" marL="0">
+              <a:buNone/>
+            </a:pPr>
+            <a:r>
+              <a:rPr lang="en-US" sz="1800" b="1" dirty="0">
+                <a:solidFill>
+                  <a:srgbClr val="154360"/>
+                </a:solidFill>
+                <a:latin typeface="Arial" pitchFamily="34" charset="0"/>
+                <a:ea typeface="Arial" pitchFamily="34" charset="-122"/>
+                <a:cs typeface="Arial" pitchFamily="34" charset="-120"/>
+              </a:rPr>
+              <a:t>Voordeel  ↔  nadeel</a:t>
+            </a:r>
+            <a:endParaRPr lang="en-US" sz="1800" dirty="0"/>
+          </a:p>
+        </p:txBody>
+      </p:sp>
+      <p:sp>
+        <p:nvSpPr>
+          <p:cNvPr id="10" name="Text 8"/>
+          <p:cNvSpPr/>
+          <p:nvPr/>
+        </p:nvSpPr>
+        <p:spPr>
+          <a:xfrm>
+            <a:off x="4937760" y="1463040"/>
+            <a:ext cx="3611880" cy="2926080"/>
+          </a:xfrm>
+          <a:prstGeom prst="rect">
+            <a:avLst/>
+          </a:prstGeom>
+          <a:noFill/>
+          <a:ln/>
+        </p:spPr>
+        <p:txBody>
+          <a:bodyPr wrap="square" lIns="0" tIns="0" rIns="0" bIns="0" rtlCol="0" anchor="t"/>
+          <a:lstStyle/>
+          <a:p>
+            <a:pPr algn="l" indent="0" marL="0">
+              <a:lnSpc>
+                <a:spcPct val="120000"/>
+              </a:lnSpc>
+              <a:buNone/>
+            </a:pPr>
+            <a:r>
+              <a:rPr lang="en-US" sz="1400" b="1" dirty="0">
+                <a:solidFill>
+                  <a:srgbClr val="186A3B"/>
+                </a:solidFill>
+                <a:latin typeface="Arial" pitchFamily="34" charset="0"/>
+                <a:ea typeface="Arial" pitchFamily="34" charset="-122"/>
+                <a:cs typeface="Arial" pitchFamily="34" charset="-120"/>
+              </a:rPr>
+              <a:t>✓  Wie werk heeft verdient meer</a:t>
+            </a:r>
+            <a:endParaRPr lang="en-US" sz="1300" dirty="0"/>
+          </a:p>
+          <a:p>
+            <a:pPr algn="l" indent="0" marL="0">
+              <a:lnSpc>
+                <a:spcPct val="120000"/>
+              </a:lnSpc>
+              <a:buNone/>
+            </a:pPr>
+            <a:r>
+              <a:rPr lang="en-US" sz="1200" i="1" dirty="0">
+                <a:solidFill>
+                  <a:srgbClr val="718096"/>
+                </a:solidFill>
+                <a:latin typeface="Arial" pitchFamily="34" charset="0"/>
+                <a:ea typeface="Arial" pitchFamily="34" charset="-122"/>
+                <a:cs typeface="Arial" pitchFamily="34" charset="-120"/>
+              </a:rPr>
+              <a:t>→ bescherming van de onderkant</a:t>
+            </a:r>
+            <a:endParaRPr lang="en-US" sz="1300" dirty="0"/>
+          </a:p>
+          <a:p>
+            <a:pPr algn="l" indent="0" marL="0">
+              <a:lnSpc>
+                <a:spcPct val="120000"/>
+              </a:lnSpc>
+              <a:buNone/>
+            </a:pPr>
+            <a:endParaRPr lang="en-US" sz="1300" dirty="0"/>
+          </a:p>
+          <a:p>
+            <a:pPr algn="l" indent="0" marL="0">
+              <a:lnSpc>
+                <a:spcPct val="120000"/>
+              </a:lnSpc>
+              <a:buNone/>
+            </a:pPr>
+            <a:r>
+              <a:rPr lang="en-US" sz="1400" b="1" dirty="0">
+                <a:solidFill>
+                  <a:srgbClr val="922B21"/>
+                </a:solidFill>
+                <a:latin typeface="Arial" pitchFamily="34" charset="0"/>
+                <a:ea typeface="Arial" pitchFamily="34" charset="-122"/>
+                <a:cs typeface="Arial" pitchFamily="34" charset="-120"/>
+              </a:rPr>
+              <a:t>✗  Meer werkloosheid</a:t>
+            </a:r>
+            <a:endParaRPr lang="en-US" sz="1300" dirty="0"/>
+          </a:p>
+          <a:p>
+            <a:pPr algn="l" indent="0" marL="0">
+              <a:lnSpc>
+                <a:spcPct val="120000"/>
+              </a:lnSpc>
+              <a:buNone/>
+            </a:pPr>
+            <a:r>
+              <a:rPr lang="en-US" sz="1200" i="1" dirty="0">
+                <a:solidFill>
+                  <a:srgbClr val="718096"/>
+                </a:solidFill>
+                <a:latin typeface="Arial" pitchFamily="34" charset="0"/>
+                <a:ea typeface="Arial" pitchFamily="34" charset="-122"/>
+                <a:cs typeface="Arial" pitchFamily="34" charset="-120"/>
+              </a:rPr>
+              <a:t>→ vooral jongeren en laagopgeleiden</a:t>
+            </a:r>
+            <a:endParaRPr lang="en-US" sz="1300" dirty="0"/>
+          </a:p>
+        </p:txBody>
+      </p:sp>
+    </p:spTree>
+  </p:cSld>
+  <p:clrMapOvr>
+    <a:masterClrMapping/>
+  </p:clrMapOvr>
+</p:sld>
+</file>
+
+<file path=ppt/slides/slide11.xml><?xml version="1.0" encoding="utf-8"?>
+<p:sld xmlns:a="http://schemas.openxmlformats.org/drawingml/2006/main" xmlns:r="http://schemas.openxmlformats.org/officeDocument/2006/relationships" xmlns:p="http://schemas.openxmlformats.org/presentationml/2006/main">
+  <p:cSld name="Slide 11">
+    <p:spTree>
+      <p:nvGrpSpPr>
+        <p:cNvPr id="1" name=""/>
+        <p:cNvGrpSpPr/>
+        <p:nvPr/>
+      </p:nvGrpSpPr>
+      <p:grpSpPr>
+        <a:xfrm>
+          <a:off x="0" y="0"/>
+          <a:ext cx="0" cy="0"/>
+          <a:chOff x="0" y="0"/>
+          <a:chExt cx="0" cy="0"/>
+        </a:xfrm>
+      </p:grpSpPr>
+      <p:sp>
+        <p:nvSpPr>
+          <p:cNvPr id="2" name="Text 0"/>
+          <p:cNvSpPr/>
+          <p:nvPr/>
+        </p:nvSpPr>
+        <p:spPr>
+          <a:xfrm>
+            <a:off x="457200" y="0"/>
+            <a:ext cx="8229600" cy="685800"/>
+          </a:xfrm>
+          <a:prstGeom prst="rect">
+            <a:avLst/>
+          </a:prstGeom>
+          <a:noFill/>
+          <a:ln/>
+        </p:spPr>
+        <p:txBody>
+          <a:bodyPr wrap="square" rtlCol="0" anchor="ctr"/>
+          <a:lstStyle/>
+          <a:p>
+            <a:pPr indent="0" marL="0">
+              <a:buNone/>
+            </a:pPr>
+            <a:r>
+              <a:rPr lang="en-US" sz="2400" b="1" dirty="0">
+                <a:solidFill>
+                  <a:srgbClr val="FFFFFF"/>
+                </a:solidFill>
+                <a:latin typeface="Arial" pitchFamily="34" charset="0"/>
+                <a:ea typeface="Arial" pitchFamily="34" charset="-122"/>
+                <a:cs typeface="Arial" pitchFamily="34" charset="-120"/>
+              </a:rPr>
+              <a:t>Minimumloon in de grafiek</a:t>
+            </a:r>
+            <a:endParaRPr lang="en-US" sz="2400" dirty="0"/>
+          </a:p>
+        </p:txBody>
+      </p:sp>
+      <p:pic>
+        <p:nvPicPr>
+          <p:cNvPr id="3" name="Image 0" descr="preencoded.png">    </p:cNvPr>
+          <p:cNvPicPr>
+            <a:picLocks noChangeAspect="1"/>
+          </p:cNvPicPr>
+          <p:nvPr/>
+        </p:nvPicPr>
+        <p:blipFill>
+          <a:blip r:embed="rId1"/>
+          <a:stretch>
+            <a:fillRect/>
+          </a:stretch>
+        </p:blipFill>
+        <p:spPr>
+          <a:xfrm>
+            <a:off x="914400" y="749808"/>
+            <a:ext cx="7315200" cy="3657600"/>
+          </a:xfrm>
+          <a:prstGeom prst="rect">
+            <a:avLst/>
+          </a:prstGeom>
+        </p:spPr>
+      </p:pic>
+      <p:sp>
+        <p:nvSpPr>
+          <p:cNvPr id="4" name="Shape 1"/>
+          <p:cNvSpPr/>
+          <p:nvPr/>
+        </p:nvSpPr>
+        <p:spPr>
+          <a:xfrm>
+            <a:off x="457200" y="4480560"/>
+            <a:ext cx="8229600" cy="566928"/>
+          </a:xfrm>
+          <a:prstGeom prst="rect">
+            <a:avLst/>
+          </a:prstGeom>
+          <a:solidFill>
+            <a:srgbClr val="F7F8FA"/>
+          </a:solidFill>
+          <a:ln w="6350">
+            <a:solidFill>
+              <a:srgbClr val="CBD5E0"/>
+            </a:solidFill>
+            <a:prstDash val="solid"/>
+          </a:ln>
+        </p:spPr>
+      </p:sp>
+      <p:sp>
+        <p:nvSpPr>
+          <p:cNvPr id="5" name="Shape 2"/>
+          <p:cNvSpPr/>
+          <p:nvPr/>
+        </p:nvSpPr>
+        <p:spPr>
+          <a:xfrm>
+            <a:off x="566928" y="4636008"/>
+            <a:ext cx="201168" cy="201168"/>
+          </a:xfrm>
+          <a:prstGeom prst="rect">
+            <a:avLst/>
+          </a:prstGeom>
+          <a:solidFill>
+            <a:srgbClr val="1A5276"/>
+          </a:solidFill>
+          <a:ln/>
+        </p:spPr>
+      </p:sp>
+      <p:sp>
+        <p:nvSpPr>
+          <p:cNvPr id="6" name="Text 3"/>
+          <p:cNvSpPr/>
+          <p:nvPr/>
+        </p:nvSpPr>
+        <p:spPr>
+          <a:xfrm>
+            <a:off x="841248" y="4553712"/>
+            <a:ext cx="1600200" cy="420624"/>
+          </a:xfrm>
+          <a:prstGeom prst="rect">
+            <a:avLst/>
+          </a:prstGeom>
+          <a:noFill/>
+          <a:ln/>
+        </p:spPr>
+        <p:txBody>
+          <a:bodyPr wrap="square" lIns="0" tIns="0" rIns="0" bIns="0" rtlCol="0" anchor="ctr"/>
+          <a:lstStyle/>
+          <a:p>
+            <a:pPr indent="0" marL="0">
+              <a:buNone/>
+            </a:pPr>
+            <a:r>
+              <a:rPr lang="en-US" sz="1100" b="1" dirty="0">
+                <a:solidFill>
+                  <a:srgbClr val="1A5276"/>
+                </a:solidFill>
+                <a:latin typeface="Arial" pitchFamily="34" charset="0"/>
+                <a:ea typeface="Arial" pitchFamily="34" charset="-122"/>
+                <a:cs typeface="Arial" pitchFamily="34" charset="-120"/>
+              </a:rPr>
+              <a:t>V_a</a:t>
+            </a:r>
+            <a:pPr indent="0" marL="0">
+              <a:buNone/>
+            </a:pPr>
+            <a:r>
+              <a:rPr lang="en-US" sz="1100" dirty="0">
+                <a:solidFill>
+                  <a:srgbClr val="2D3748"/>
+                </a:solidFill>
+                <a:latin typeface="Arial" pitchFamily="34" charset="0"/>
+                <a:ea typeface="Arial" pitchFamily="34" charset="-122"/>
+                <a:cs typeface="Arial" pitchFamily="34" charset="-120"/>
+              </a:rPr>
+              <a:t>  vraag naar arbeid (bedrijven)</a:t>
+            </a:r>
+            <a:endParaRPr lang="en-US" sz="1100" dirty="0"/>
+          </a:p>
+        </p:txBody>
+      </p:sp>
+      <p:sp>
+        <p:nvSpPr>
+          <p:cNvPr id="7" name="Shape 4"/>
+          <p:cNvSpPr/>
+          <p:nvPr/>
+        </p:nvSpPr>
+        <p:spPr>
+          <a:xfrm>
+            <a:off x="2624328" y="4636008"/>
+            <a:ext cx="201168" cy="201168"/>
+          </a:xfrm>
+          <a:prstGeom prst="rect">
+            <a:avLst/>
+          </a:prstGeom>
+          <a:solidFill>
+            <a:srgbClr val="1E8449"/>
+          </a:solidFill>
+          <a:ln/>
+        </p:spPr>
+      </p:sp>
+      <p:sp>
+        <p:nvSpPr>
+          <p:cNvPr id="8" name="Text 5"/>
+          <p:cNvSpPr/>
+          <p:nvPr/>
+        </p:nvSpPr>
+        <p:spPr>
+          <a:xfrm>
+            <a:off x="2898648" y="4553712"/>
+            <a:ext cx="1600200" cy="420624"/>
+          </a:xfrm>
+          <a:prstGeom prst="rect">
+            <a:avLst/>
+          </a:prstGeom>
+          <a:noFill/>
+          <a:ln/>
+        </p:spPr>
+        <p:txBody>
+          <a:bodyPr wrap="square" lIns="0" tIns="0" rIns="0" bIns="0" rtlCol="0" anchor="ctr"/>
+          <a:lstStyle/>
+          <a:p>
+            <a:pPr indent="0" marL="0">
+              <a:buNone/>
+            </a:pPr>
+            <a:r>
+              <a:rPr lang="en-US" sz="1100" b="1" dirty="0">
+                <a:solidFill>
+                  <a:srgbClr val="1E8449"/>
+                </a:solidFill>
+                <a:latin typeface="Arial" pitchFamily="34" charset="0"/>
+                <a:ea typeface="Arial" pitchFamily="34" charset="-122"/>
+                <a:cs typeface="Arial" pitchFamily="34" charset="-120"/>
+              </a:rPr>
+              <a:t>A_a</a:t>
+            </a:r>
+            <a:pPr indent="0" marL="0">
+              <a:buNone/>
+            </a:pPr>
+            <a:r>
+              <a:rPr lang="en-US" sz="1100" dirty="0">
+                <a:solidFill>
+                  <a:srgbClr val="2D3748"/>
+                </a:solidFill>
+                <a:latin typeface="Arial" pitchFamily="34" charset="0"/>
+                <a:ea typeface="Arial" pitchFamily="34" charset="-122"/>
+                <a:cs typeface="Arial" pitchFamily="34" charset="-120"/>
+              </a:rPr>
+              <a:t>  aanbod arbeid (werknemers)</a:t>
+            </a:r>
+            <a:endParaRPr lang="en-US" sz="1100" dirty="0"/>
+          </a:p>
+        </p:txBody>
+      </p:sp>
+      <p:sp>
+        <p:nvSpPr>
+          <p:cNvPr id="9" name="Shape 6"/>
+          <p:cNvSpPr/>
+          <p:nvPr/>
+        </p:nvSpPr>
+        <p:spPr>
+          <a:xfrm>
+            <a:off x="4681728" y="4636008"/>
+            <a:ext cx="201168" cy="201168"/>
+          </a:xfrm>
+          <a:prstGeom prst="rect">
+            <a:avLst/>
+          </a:prstGeom>
+          <a:solidFill>
+            <a:srgbClr val="186A3B"/>
+          </a:solidFill>
+          <a:ln/>
+        </p:spPr>
+      </p:sp>
+      <p:sp>
+        <p:nvSpPr>
+          <p:cNvPr id="10" name="Text 7"/>
+          <p:cNvSpPr/>
+          <p:nvPr/>
+        </p:nvSpPr>
+        <p:spPr>
+          <a:xfrm>
+            <a:off x="4956048" y="4553712"/>
+            <a:ext cx="1600200" cy="420624"/>
+          </a:xfrm>
+          <a:prstGeom prst="rect">
+            <a:avLst/>
+          </a:prstGeom>
+          <a:noFill/>
+          <a:ln/>
+        </p:spPr>
+        <p:txBody>
+          <a:bodyPr wrap="square" lIns="0" tIns="0" rIns="0" bIns="0" rtlCol="0" anchor="ctr"/>
+          <a:lstStyle/>
+          <a:p>
+            <a:pPr indent="0" marL="0">
+              <a:buNone/>
+            </a:pPr>
+            <a:r>
+              <a:rPr lang="en-US" sz="1100" b="1" dirty="0">
+                <a:solidFill>
+                  <a:srgbClr val="186A3B"/>
+                </a:solidFill>
+                <a:latin typeface="Arial" pitchFamily="34" charset="0"/>
+                <a:ea typeface="Arial" pitchFamily="34" charset="-122"/>
+                <a:cs typeface="Arial" pitchFamily="34" charset="-120"/>
+              </a:rPr>
+              <a:t>Wmin</a:t>
+            </a:r>
+            <a:pPr indent="0" marL="0">
+              <a:buNone/>
+            </a:pPr>
+            <a:r>
+              <a:rPr lang="en-US" sz="1100" dirty="0">
+                <a:solidFill>
+                  <a:srgbClr val="2D3748"/>
+                </a:solidFill>
+                <a:latin typeface="Arial" pitchFamily="34" charset="0"/>
+                <a:ea typeface="Arial" pitchFamily="34" charset="-122"/>
+                <a:cs typeface="Arial" pitchFamily="34" charset="-120"/>
+              </a:rPr>
+              <a:t>  wettelijk minimumloon</a:t>
+            </a:r>
+            <a:endParaRPr lang="en-US" sz="1100" dirty="0"/>
+          </a:p>
+        </p:txBody>
+      </p:sp>
+      <p:sp>
+        <p:nvSpPr>
+          <p:cNvPr id="11" name="Shape 8"/>
+          <p:cNvSpPr/>
+          <p:nvPr/>
+        </p:nvSpPr>
+        <p:spPr>
+          <a:xfrm>
+            <a:off x="6739128" y="4636008"/>
+            <a:ext cx="201168" cy="201168"/>
+          </a:xfrm>
+          <a:prstGeom prst="rect">
+            <a:avLst/>
+          </a:prstGeom>
+          <a:solidFill>
+            <a:srgbClr val="D9534F"/>
+          </a:solidFill>
+          <a:ln/>
+        </p:spPr>
+      </p:sp>
+      <p:sp>
+        <p:nvSpPr>
+          <p:cNvPr id="12" name="Text 9"/>
+          <p:cNvSpPr/>
+          <p:nvPr/>
+        </p:nvSpPr>
+        <p:spPr>
+          <a:xfrm>
+            <a:off x="7013448" y="4553712"/>
+            <a:ext cx="1600200" cy="420624"/>
+          </a:xfrm>
+          <a:prstGeom prst="rect">
+            <a:avLst/>
+          </a:prstGeom>
+          <a:noFill/>
+          <a:ln/>
+        </p:spPr>
+        <p:txBody>
+          <a:bodyPr wrap="square" lIns="0" tIns="0" rIns="0" bIns="0" rtlCol="0" anchor="ctr"/>
+          <a:lstStyle/>
+          <a:p>
+            <a:pPr indent="0" marL="0">
+              <a:buNone/>
+            </a:pPr>
+            <a:r>
+              <a:rPr lang="en-US" sz="1100" b="1" dirty="0">
+                <a:solidFill>
+                  <a:srgbClr val="D9534F"/>
+                </a:solidFill>
+                <a:latin typeface="Arial" pitchFamily="34" charset="0"/>
+                <a:ea typeface="Arial" pitchFamily="34" charset="-122"/>
+                <a:cs typeface="Arial" pitchFamily="34" charset="-120"/>
+              </a:rPr>
+              <a:t>■</a:t>
+            </a:r>
+            <a:pPr indent="0" marL="0">
+              <a:buNone/>
+            </a:pPr>
+            <a:r>
+              <a:rPr lang="en-US" sz="1100" dirty="0">
+                <a:solidFill>
+                  <a:srgbClr val="2D3748"/>
+                </a:solidFill>
+                <a:latin typeface="Arial" pitchFamily="34" charset="0"/>
+                <a:ea typeface="Arial" pitchFamily="34" charset="-122"/>
+                <a:cs typeface="Arial" pitchFamily="34" charset="-120"/>
+              </a:rPr>
+              <a:t>  werkloosheid</a:t>
+            </a:r>
+            <a:endParaRPr lang="en-US" sz="1100" dirty="0"/>
+          </a:p>
+        </p:txBody>
+      </p:sp>
+    </p:spTree>
+  </p:cSld>
+  <p:clrMapOvr>
+    <a:masterClrMapping/>
+  </p:clrMapOvr>
+</p:sld>
+</file>
+
+<file path=ppt/slides/slide12.xml><?xml version="1.0" encoding="utf-8"?>
+<p:sld xmlns:a="http://schemas.openxmlformats.org/drawingml/2006/main" xmlns:r="http://schemas.openxmlformats.org/officeDocument/2006/relationships" xmlns:p="http://schemas.openxmlformats.org/presentationml/2006/main">
+  <p:cSld name="Slide 12">
+    <p:spTree>
+      <p:nvGrpSpPr>
+        <p:cNvPr id="1" name=""/>
+        <p:cNvGrpSpPr/>
+        <p:nvPr/>
+      </p:nvGrpSpPr>
+      <p:grpSpPr>
+        <a:xfrm>
+          <a:off x="0" y="0"/>
+          <a:ext cx="0" cy="0"/>
+          <a:chOff x="0" y="0"/>
+          <a:chExt cx="0" cy="0"/>
+        </a:xfrm>
+      </p:grpSpPr>
+      <p:sp>
+        <p:nvSpPr>
+          <p:cNvPr id="2" name="Text 0"/>
+          <p:cNvSpPr/>
+          <p:nvPr/>
+        </p:nvSpPr>
+        <p:spPr>
+          <a:xfrm>
+            <a:off x="457200" y="0"/>
+            <a:ext cx="8229600" cy="685800"/>
+          </a:xfrm>
+          <a:prstGeom prst="rect">
+            <a:avLst/>
+          </a:prstGeom>
+          <a:noFill/>
+          <a:ln/>
+        </p:spPr>
+        <p:txBody>
+          <a:bodyPr wrap="square" rtlCol="0" anchor="ctr"/>
+          <a:lstStyle/>
+          <a:p>
+            <a:pPr indent="0" marL="0">
+              <a:buNone/>
+            </a:pPr>
+            <a:r>
+              <a:rPr lang="en-US" sz="2400" b="1" dirty="0">
+                <a:solidFill>
+                  <a:srgbClr val="FFFFFF"/>
+                </a:solidFill>
+                <a:latin typeface="Arial" pitchFamily="34" charset="0"/>
+                <a:ea typeface="Arial" pitchFamily="34" charset="-122"/>
+                <a:cs typeface="Arial" pitchFamily="34" charset="-120"/>
+              </a:rPr>
+              <a:t>Accijns — theorie</a:t>
+            </a:r>
+            <a:endParaRPr lang="en-US" sz="2400" dirty="0"/>
+          </a:p>
+        </p:txBody>
+      </p:sp>
+      <p:sp>
+        <p:nvSpPr>
+          <p:cNvPr id="3" name="Shape 1"/>
+          <p:cNvSpPr/>
+          <p:nvPr/>
+        </p:nvSpPr>
+        <p:spPr>
+          <a:xfrm>
+            <a:off x="1188720" y="1005840"/>
+            <a:ext cx="6766560" cy="548640"/>
+          </a:xfrm>
+          <a:prstGeom prst="rect">
+            <a:avLst>
+              <a:gd name="adj" fmla="val 6667"/>
+            </a:avLst>
+          </a:prstGeom>
+          <a:solidFill>
+            <a:srgbClr val="F9F6F1"/>
+          </a:solidFill>
+          <a:ln/>
+          <a:effectLst>
+            <a:outerShdw sx="100000" sy="100000" kx="0" ky="0" algn="bl" rotWithShape="0" blurRad="76200" dist="25400" dir="8100000">
+              <a:srgbClr val="000000">
+                <a:alpha val="10000"/>
+              </a:srgbClr>
+            </a:outerShdw>
+          </a:effectLst>
+        </p:spPr>
+      </p:sp>
+      <p:sp>
+        <p:nvSpPr>
+          <p:cNvPr id="4" name="Text 2"/>
+          <p:cNvSpPr/>
+          <p:nvPr/>
+        </p:nvSpPr>
+        <p:spPr>
+          <a:xfrm>
+            <a:off x="1371600" y="1005840"/>
+            <a:ext cx="6492240" cy="548640"/>
+          </a:xfrm>
+          <a:prstGeom prst="rect">
+            <a:avLst/>
+          </a:prstGeom>
+          <a:noFill/>
+          <a:ln/>
+        </p:spPr>
+        <p:txBody>
+          <a:bodyPr wrap="square" lIns="0" tIns="0" rIns="0" bIns="0" rtlCol="0" anchor="ctr"/>
+          <a:lstStyle/>
+          <a:p>
+            <a:pPr indent="0" marL="0">
+              <a:buNone/>
+            </a:pPr>
+            <a:r>
+              <a:rPr lang="en-US" sz="1400" dirty="0">
+                <a:solidFill>
+                  <a:srgbClr val="2D3748"/>
+                </a:solidFill>
+                <a:latin typeface="Arial" pitchFamily="34" charset="0"/>
+                <a:ea typeface="Arial" pitchFamily="34" charset="-122"/>
+                <a:cs typeface="Arial" pitchFamily="34" charset="-120"/>
+              </a:rPr>
+              <a:t>Overheid heft accijns per eenheid</a:t>
+            </a:r>
+            <a:endParaRPr lang="en-US" sz="1400" dirty="0"/>
+          </a:p>
+        </p:txBody>
+      </p:sp>
+      <p:sp>
+        <p:nvSpPr>
+          <p:cNvPr id="5" name="Shape 3"/>
+          <p:cNvSpPr/>
+          <p:nvPr/>
+        </p:nvSpPr>
+        <p:spPr>
+          <a:xfrm>
+            <a:off x="1188720" y="1664208"/>
+            <a:ext cx="6766560" cy="548640"/>
+          </a:xfrm>
+          <a:prstGeom prst="rect">
+            <a:avLst>
+              <a:gd name="adj" fmla="val 6667"/>
+            </a:avLst>
+          </a:prstGeom>
+          <a:solidFill>
+            <a:srgbClr val="F9F6F1"/>
+          </a:solidFill>
+          <a:ln/>
+          <a:effectLst>
+            <a:outerShdw sx="100000" sy="100000" kx="0" ky="0" algn="bl" rotWithShape="0" blurRad="76200" dist="25400" dir="8100000">
+              <a:srgbClr val="000000">
+                <a:alpha val="10000"/>
+              </a:srgbClr>
+            </a:outerShdw>
+          </a:effectLst>
+        </p:spPr>
+      </p:sp>
+      <p:sp>
+        <p:nvSpPr>
+          <p:cNvPr id="6" name="Text 4"/>
+          <p:cNvSpPr/>
+          <p:nvPr/>
+        </p:nvSpPr>
+        <p:spPr>
+          <a:xfrm>
+            <a:off x="1371600" y="1664208"/>
+            <a:ext cx="6492240" cy="548640"/>
+          </a:xfrm>
+          <a:prstGeom prst="rect">
+            <a:avLst/>
+          </a:prstGeom>
+          <a:noFill/>
+          <a:ln/>
+        </p:spPr>
+        <p:txBody>
+          <a:bodyPr wrap="square" lIns="0" tIns="0" rIns="0" bIns="0" rtlCol="0" anchor="ctr"/>
+          <a:lstStyle/>
+          <a:p>
+            <a:pPr indent="0" marL="0">
+              <a:buNone/>
+            </a:pPr>
+            <a:r>
+              <a:rPr lang="en-US" sz="1400" dirty="0">
+                <a:solidFill>
+                  <a:srgbClr val="2D3748"/>
+                </a:solidFill>
+                <a:latin typeface="Arial" pitchFamily="34" charset="0"/>
+                <a:ea typeface="Arial" pitchFamily="34" charset="-122"/>
+                <a:cs typeface="Arial" pitchFamily="34" charset="-120"/>
+              </a:rPr>
+              <a:t>↓  Aanbodlijn verschuift parallel omhoog (met de accijns)</a:t>
+            </a:r>
+            <a:endParaRPr lang="en-US" sz="1400" dirty="0"/>
+          </a:p>
+        </p:txBody>
+      </p:sp>
+      <p:sp>
+        <p:nvSpPr>
+          <p:cNvPr id="7" name="Shape 5"/>
+          <p:cNvSpPr/>
+          <p:nvPr/>
+        </p:nvSpPr>
+        <p:spPr>
+          <a:xfrm>
+            <a:off x="1188720" y="2322576"/>
+            <a:ext cx="6766560" cy="548640"/>
+          </a:xfrm>
+          <a:prstGeom prst="rect">
+            <a:avLst>
+              <a:gd name="adj" fmla="val 6667"/>
+            </a:avLst>
+          </a:prstGeom>
+          <a:solidFill>
+            <a:srgbClr val="7B2D8E"/>
+          </a:solidFill>
+          <a:ln/>
+          <a:effectLst>
+            <a:outerShdw sx="100000" sy="100000" kx="0" ky="0" algn="bl" rotWithShape="0" blurRad="76200" dist="25400" dir="8100000">
+              <a:srgbClr val="000000">
+                <a:alpha val="10000"/>
+              </a:srgbClr>
+            </a:outerShdw>
+          </a:effectLst>
+        </p:spPr>
+      </p:sp>
+      <p:sp>
+        <p:nvSpPr>
+          <p:cNvPr id="8" name="Text 6"/>
+          <p:cNvSpPr/>
+          <p:nvPr/>
+        </p:nvSpPr>
+        <p:spPr>
+          <a:xfrm>
+            <a:off x="1371600" y="2322576"/>
+            <a:ext cx="6492240" cy="548640"/>
+          </a:xfrm>
+          <a:prstGeom prst="rect">
+            <a:avLst/>
+          </a:prstGeom>
+          <a:noFill/>
+          <a:ln/>
+        </p:spPr>
+        <p:txBody>
+          <a:bodyPr wrap="square" lIns="0" tIns="0" rIns="0" bIns="0" rtlCol="0" anchor="ctr"/>
+          <a:lstStyle/>
+          <a:p>
+            <a:pPr indent="0" marL="0">
+              <a:buNone/>
+            </a:pPr>
+            <a:r>
+              <a:rPr lang="en-US" sz="1400" b="1" dirty="0">
+                <a:solidFill>
+                  <a:srgbClr val="FFFFFF"/>
+                </a:solidFill>
+                <a:latin typeface="Arial" pitchFamily="34" charset="0"/>
+                <a:ea typeface="Arial" pitchFamily="34" charset="-122"/>
+                <a:cs typeface="Arial" pitchFamily="34" charset="-120"/>
+              </a:rPr>
+              <a:t>↓  De evenwichtsprijs stijgt  —  maar MINDER dan de accijns</a:t>
+            </a:r>
+            <a:endParaRPr lang="en-US" sz="1400" dirty="0"/>
+          </a:p>
+        </p:txBody>
+      </p:sp>
+      <p:sp>
+        <p:nvSpPr>
+          <p:cNvPr id="9" name="Shape 7"/>
+          <p:cNvSpPr/>
+          <p:nvPr/>
+        </p:nvSpPr>
+        <p:spPr>
+          <a:xfrm>
+            <a:off x="1188720" y="2980944"/>
+            <a:ext cx="6766560" cy="548640"/>
+          </a:xfrm>
+          <a:prstGeom prst="rect">
+            <a:avLst>
+              <a:gd name="adj" fmla="val 6667"/>
+            </a:avLst>
+          </a:prstGeom>
+          <a:solidFill>
+            <a:srgbClr val="F9F6F1"/>
+          </a:solidFill>
+          <a:ln/>
+          <a:effectLst>
+            <a:outerShdw sx="100000" sy="100000" kx="0" ky="0" algn="bl" rotWithShape="0" blurRad="76200" dist="25400" dir="8100000">
+              <a:srgbClr val="000000">
+                <a:alpha val="10000"/>
+              </a:srgbClr>
+            </a:outerShdw>
+          </a:effectLst>
+        </p:spPr>
+      </p:sp>
+      <p:sp>
+        <p:nvSpPr>
+          <p:cNvPr id="10" name="Text 8"/>
+          <p:cNvSpPr/>
+          <p:nvPr/>
+        </p:nvSpPr>
+        <p:spPr>
+          <a:xfrm>
+            <a:off x="1371600" y="2980944"/>
+            <a:ext cx="6492240" cy="548640"/>
+          </a:xfrm>
+          <a:prstGeom prst="rect">
+            <a:avLst/>
+          </a:prstGeom>
+          <a:noFill/>
+          <a:ln/>
+        </p:spPr>
+        <p:txBody>
+          <a:bodyPr wrap="square" lIns="0" tIns="0" rIns="0" bIns="0" rtlCol="0" anchor="ctr"/>
+          <a:lstStyle/>
+          <a:p>
+            <a:pPr indent="0" marL="0">
+              <a:buNone/>
+            </a:pPr>
+            <a:r>
+              <a:rPr lang="en-US" sz="1400" dirty="0">
+                <a:solidFill>
+                  <a:srgbClr val="2D3748"/>
+                </a:solidFill>
+                <a:latin typeface="Arial" pitchFamily="34" charset="0"/>
+                <a:ea typeface="Arial" pitchFamily="34" charset="-122"/>
+                <a:cs typeface="Arial" pitchFamily="34" charset="-120"/>
+              </a:rPr>
+              <a:t>↓  Consumenten kopen minder, hoeveelheid daalt</a:t>
+            </a:r>
+            <a:endParaRPr lang="en-US" sz="1400" dirty="0"/>
+          </a:p>
+        </p:txBody>
+      </p:sp>
+      <p:sp>
+        <p:nvSpPr>
+          <p:cNvPr id="11" name="Shape 9"/>
+          <p:cNvSpPr/>
+          <p:nvPr/>
+        </p:nvSpPr>
+        <p:spPr>
+          <a:xfrm>
+            <a:off x="1188720" y="3639312"/>
+            <a:ext cx="6766560" cy="548640"/>
+          </a:xfrm>
+          <a:prstGeom prst="rect">
+            <a:avLst>
+              <a:gd name="adj" fmla="val 6667"/>
+            </a:avLst>
+          </a:prstGeom>
+          <a:solidFill>
+            <a:srgbClr val="7B2D8E"/>
+          </a:solidFill>
+          <a:ln/>
+          <a:effectLst>
+            <a:outerShdw sx="100000" sy="100000" kx="0" ky="0" algn="bl" rotWithShape="0" blurRad="76200" dist="25400" dir="8100000">
+              <a:srgbClr val="000000">
+                <a:alpha val="10000"/>
+              </a:srgbClr>
+            </a:outerShdw>
+          </a:effectLst>
+        </p:spPr>
+      </p:sp>
+      <p:sp>
+        <p:nvSpPr>
+          <p:cNvPr id="12" name="Text 10"/>
+          <p:cNvSpPr/>
+          <p:nvPr/>
+        </p:nvSpPr>
+        <p:spPr>
+          <a:xfrm>
+            <a:off x="1371600" y="3639312"/>
+            <a:ext cx="6492240" cy="548640"/>
+          </a:xfrm>
+          <a:prstGeom prst="rect">
+            <a:avLst/>
+          </a:prstGeom>
+          <a:noFill/>
+          <a:ln/>
+        </p:spPr>
+        <p:txBody>
+          <a:bodyPr wrap="square" lIns="0" tIns="0" rIns="0" bIns="0" rtlCol="0" anchor="ctr"/>
+          <a:lstStyle/>
+          <a:p>
+            <a:pPr indent="0" marL="0">
+              <a:buNone/>
+            </a:pPr>
+            <a:r>
+              <a:rPr lang="en-US" sz="1400" b="1" dirty="0">
+                <a:solidFill>
+                  <a:srgbClr val="FFFFFF"/>
+                </a:solidFill>
+                <a:latin typeface="Arial" pitchFamily="34" charset="0"/>
+                <a:ea typeface="Arial" pitchFamily="34" charset="-122"/>
+                <a:cs typeface="Arial" pitchFamily="34" charset="-120"/>
+              </a:rPr>
+              <a:t>↓  De last wordt gedeeld tussen koper én verkoper</a:t>
+            </a:r>
+            <a:endParaRPr lang="en-US" sz="1400" dirty="0"/>
+          </a:p>
+        </p:txBody>
+      </p:sp>
+    </p:spTree>
+  </p:cSld>
+  <p:clrMapOvr>
+    <a:masterClrMapping/>
+  </p:clrMapOvr>
+</p:sld>
+</file>
+
+<file path=ppt/slides/slide13.xml><?xml version="1.0" encoding="utf-8"?>
+<p:sld xmlns:a="http://schemas.openxmlformats.org/drawingml/2006/main" xmlns:r="http://schemas.openxmlformats.org/officeDocument/2006/relationships" xmlns:p="http://schemas.openxmlformats.org/presentationml/2006/main">
+  <p:cSld name="Slide 13">
+    <p:spTree>
+      <p:nvGrpSpPr>
+        <p:cNvPr id="1" name=""/>
+        <p:cNvGrpSpPr/>
+        <p:nvPr/>
+      </p:nvGrpSpPr>
+      <p:grpSpPr>
+        <a:xfrm>
+          <a:off x="0" y="0"/>
+          <a:ext cx="0" cy="0"/>
+          <a:chOff x="0" y="0"/>
+          <a:chExt cx="0" cy="0"/>
+        </a:xfrm>
+      </p:grpSpPr>
+      <p:sp>
+        <p:nvSpPr>
+          <p:cNvPr id="2" name="Text 0"/>
+          <p:cNvSpPr/>
+          <p:nvPr/>
+        </p:nvSpPr>
+        <p:spPr>
+          <a:xfrm>
+            <a:off x="457200" y="0"/>
+            <a:ext cx="8229600" cy="685800"/>
+          </a:xfrm>
+          <a:prstGeom prst="rect">
+            <a:avLst/>
+          </a:prstGeom>
+          <a:noFill/>
+          <a:ln/>
+        </p:spPr>
+        <p:txBody>
+          <a:bodyPr wrap="square" rtlCol="0" anchor="ctr"/>
+          <a:lstStyle/>
+          <a:p>
+            <a:pPr indent="0" marL="0">
+              <a:buNone/>
+            </a:pPr>
+            <a:r>
+              <a:rPr lang="en-US" sz="2400" b="1" dirty="0">
+                <a:solidFill>
+                  <a:srgbClr val="FFFFFF"/>
+                </a:solidFill>
+                <a:latin typeface="Arial" pitchFamily="34" charset="0"/>
+                <a:ea typeface="Arial" pitchFamily="34" charset="-122"/>
+                <a:cs typeface="Arial" pitchFamily="34" charset="-120"/>
+              </a:rPr>
+              <a:t>Accijns in de grafiek</a:t>
+            </a:r>
+            <a:endParaRPr lang="en-US" sz="2400" dirty="0"/>
+          </a:p>
+        </p:txBody>
+      </p:sp>
+      <p:pic>
+        <p:nvPicPr>
+          <p:cNvPr id="3" name="Image 0" descr="preencoded.png">    </p:cNvPr>
+          <p:cNvPicPr>
+            <a:picLocks noChangeAspect="1"/>
+          </p:cNvPicPr>
+          <p:nvPr/>
+        </p:nvPicPr>
+        <p:blipFill>
+          <a:blip r:embed="rId1"/>
+          <a:stretch>
+            <a:fillRect/>
+          </a:stretch>
+        </p:blipFill>
+        <p:spPr>
+          <a:xfrm>
+            <a:off x="914400" y="749808"/>
+            <a:ext cx="7315200" cy="3657600"/>
+          </a:xfrm>
+          <a:prstGeom prst="rect">
+            <a:avLst/>
+          </a:prstGeom>
+        </p:spPr>
+      </p:pic>
+      <p:sp>
+        <p:nvSpPr>
+          <p:cNvPr id="4" name="Shape 1"/>
+          <p:cNvSpPr/>
+          <p:nvPr/>
+        </p:nvSpPr>
+        <p:spPr>
+          <a:xfrm>
+            <a:off x="457200" y="4480560"/>
+            <a:ext cx="8229600" cy="566928"/>
+          </a:xfrm>
+          <a:prstGeom prst="rect">
+            <a:avLst/>
+          </a:prstGeom>
+          <a:solidFill>
+            <a:srgbClr val="F7F8FA"/>
+          </a:solidFill>
+          <a:ln w="6350">
+            <a:solidFill>
+              <a:srgbClr val="CBD5E0"/>
+            </a:solidFill>
+            <a:prstDash val="solid"/>
+          </a:ln>
+        </p:spPr>
+      </p:sp>
+      <p:sp>
+        <p:nvSpPr>
+          <p:cNvPr id="5" name="Shape 2"/>
+          <p:cNvSpPr/>
+          <p:nvPr/>
+        </p:nvSpPr>
+        <p:spPr>
+          <a:xfrm>
+            <a:off x="566928" y="4636008"/>
+            <a:ext cx="201168" cy="201168"/>
+          </a:xfrm>
+          <a:prstGeom prst="rect">
+            <a:avLst/>
+          </a:prstGeom>
+          <a:solidFill>
+            <a:srgbClr val="1A5276"/>
+          </a:solidFill>
+          <a:ln/>
+        </p:spPr>
+      </p:sp>
+      <p:sp>
+        <p:nvSpPr>
+          <p:cNvPr id="6" name="Text 3"/>
+          <p:cNvSpPr/>
+          <p:nvPr/>
+        </p:nvSpPr>
+        <p:spPr>
+          <a:xfrm>
+            <a:off x="841248" y="4553712"/>
+            <a:ext cx="1600200" cy="420624"/>
+          </a:xfrm>
+          <a:prstGeom prst="rect">
+            <a:avLst/>
+          </a:prstGeom>
+          <a:noFill/>
+          <a:ln/>
+        </p:spPr>
+        <p:txBody>
+          <a:bodyPr wrap="square" lIns="0" tIns="0" rIns="0" bIns="0" rtlCol="0" anchor="ctr"/>
+          <a:lstStyle/>
+          <a:p>
+            <a:pPr indent="0" marL="0">
+              <a:buNone/>
+            </a:pPr>
+            <a:r>
+              <a:rPr lang="en-US" sz="1100" b="1" dirty="0">
+                <a:solidFill>
+                  <a:srgbClr val="1A5276"/>
+                </a:solidFill>
+                <a:latin typeface="Arial" pitchFamily="34" charset="0"/>
+                <a:ea typeface="Arial" pitchFamily="34" charset="-122"/>
+                <a:cs typeface="Arial" pitchFamily="34" charset="-120"/>
+              </a:rPr>
+              <a:t>V</a:t>
+            </a:r>
+            <a:pPr indent="0" marL="0">
+              <a:buNone/>
+            </a:pPr>
+            <a:r>
+              <a:rPr lang="en-US" sz="1100" dirty="0">
+                <a:solidFill>
+                  <a:srgbClr val="2D3748"/>
+                </a:solidFill>
+                <a:latin typeface="Arial" pitchFamily="34" charset="0"/>
+                <a:ea typeface="Arial" pitchFamily="34" charset="-122"/>
+                <a:cs typeface="Arial" pitchFamily="34" charset="-120"/>
+              </a:rPr>
+              <a:t>  vraag</a:t>
+            </a:r>
+            <a:endParaRPr lang="en-US" sz="1100" dirty="0"/>
+          </a:p>
+        </p:txBody>
+      </p:sp>
+      <p:sp>
+        <p:nvSpPr>
+          <p:cNvPr id="7" name="Shape 4"/>
+          <p:cNvSpPr/>
+          <p:nvPr/>
+        </p:nvSpPr>
+        <p:spPr>
+          <a:xfrm>
+            <a:off x="2624328" y="4636008"/>
+            <a:ext cx="201168" cy="201168"/>
+          </a:xfrm>
+          <a:prstGeom prst="rect">
+            <a:avLst/>
+          </a:prstGeom>
+          <a:solidFill>
+            <a:srgbClr val="E67E22"/>
+          </a:solidFill>
+          <a:ln/>
+        </p:spPr>
+      </p:sp>
+      <p:sp>
+        <p:nvSpPr>
+          <p:cNvPr id="8" name="Text 5"/>
+          <p:cNvSpPr/>
+          <p:nvPr/>
+        </p:nvSpPr>
+        <p:spPr>
+          <a:xfrm>
+            <a:off x="2898648" y="4553712"/>
+            <a:ext cx="1600200" cy="420624"/>
+          </a:xfrm>
+          <a:prstGeom prst="rect">
+            <a:avLst/>
+          </a:prstGeom>
+          <a:noFill/>
+          <a:ln/>
+        </p:spPr>
+        <p:txBody>
+          <a:bodyPr wrap="square" lIns="0" tIns="0" rIns="0" bIns="0" rtlCol="0" anchor="ctr"/>
+          <a:lstStyle/>
+          <a:p>
+            <a:pPr indent="0" marL="0">
+              <a:buNone/>
+            </a:pPr>
+            <a:r>
+              <a:rPr lang="en-US" sz="1100" b="1" dirty="0">
+                <a:solidFill>
+                  <a:srgbClr val="E67E22"/>
+                </a:solidFill>
+                <a:latin typeface="Arial" pitchFamily="34" charset="0"/>
+                <a:ea typeface="Arial" pitchFamily="34" charset="-122"/>
+                <a:cs typeface="Arial" pitchFamily="34" charset="-120"/>
+              </a:rPr>
+              <a:t>A+acc.</a:t>
+            </a:r>
+            <a:pPr indent="0" marL="0">
+              <a:buNone/>
+            </a:pPr>
+            <a:r>
+              <a:rPr lang="en-US" sz="1100" dirty="0">
+                <a:solidFill>
+                  <a:srgbClr val="2D3748"/>
+                </a:solidFill>
+                <a:latin typeface="Arial" pitchFamily="34" charset="0"/>
+                <a:ea typeface="Arial" pitchFamily="34" charset="-122"/>
+                <a:cs typeface="Arial" pitchFamily="34" charset="-120"/>
+              </a:rPr>
+              <a:t>  aanbod na accijns</a:t>
+            </a:r>
+            <a:endParaRPr lang="en-US" sz="1100" dirty="0"/>
+          </a:p>
+        </p:txBody>
+      </p:sp>
+      <p:sp>
+        <p:nvSpPr>
+          <p:cNvPr id="9" name="Shape 6"/>
+          <p:cNvSpPr/>
+          <p:nvPr/>
+        </p:nvSpPr>
+        <p:spPr>
+          <a:xfrm>
+            <a:off x="4681728" y="4636008"/>
+            <a:ext cx="201168" cy="201168"/>
+          </a:xfrm>
+          <a:prstGeom prst="rect">
+            <a:avLst/>
+          </a:prstGeom>
+          <a:solidFill>
+            <a:srgbClr val="F8C471"/>
+          </a:solidFill>
+          <a:ln/>
+        </p:spPr>
+      </p:sp>
+      <p:sp>
+        <p:nvSpPr>
+          <p:cNvPr id="10" name="Text 7"/>
+          <p:cNvSpPr/>
+          <p:nvPr/>
+        </p:nvSpPr>
+        <p:spPr>
+          <a:xfrm>
+            <a:off x="4956048" y="4553712"/>
+            <a:ext cx="1600200" cy="420624"/>
+          </a:xfrm>
+          <a:prstGeom prst="rect">
+            <a:avLst/>
+          </a:prstGeom>
+          <a:noFill/>
+          <a:ln/>
+        </p:spPr>
+        <p:txBody>
+          <a:bodyPr wrap="square" lIns="0" tIns="0" rIns="0" bIns="0" rtlCol="0" anchor="ctr"/>
+          <a:lstStyle/>
+          <a:p>
+            <a:pPr indent="0" marL="0">
+              <a:buNone/>
+            </a:pPr>
+            <a:r>
+              <a:rPr lang="en-US" sz="1100" b="1" dirty="0">
+                <a:solidFill>
+                  <a:srgbClr val="F8C471"/>
+                </a:solidFill>
+                <a:latin typeface="Arial" pitchFamily="34" charset="0"/>
+                <a:ea typeface="Arial" pitchFamily="34" charset="-122"/>
+                <a:cs typeface="Arial" pitchFamily="34" charset="-120"/>
+              </a:rPr>
+              <a:t>■</a:t>
+            </a:r>
+            <a:pPr indent="0" marL="0">
+              <a:buNone/>
+            </a:pPr>
+            <a:r>
+              <a:rPr lang="en-US" sz="1100" dirty="0">
+                <a:solidFill>
+                  <a:srgbClr val="2D3748"/>
+                </a:solidFill>
+                <a:latin typeface="Arial" pitchFamily="34" charset="0"/>
+                <a:ea typeface="Arial" pitchFamily="34" charset="-122"/>
+                <a:cs typeface="Arial" pitchFamily="34" charset="-120"/>
+              </a:rPr>
+              <a:t>  belastingopbrengst</a:t>
+            </a:r>
+            <a:endParaRPr lang="en-US" sz="1100" dirty="0"/>
+          </a:p>
+        </p:txBody>
+      </p:sp>
+      <p:sp>
+        <p:nvSpPr>
+          <p:cNvPr id="11" name="Shape 8"/>
+          <p:cNvSpPr/>
+          <p:nvPr/>
+        </p:nvSpPr>
+        <p:spPr>
+          <a:xfrm>
+            <a:off x="6739128" y="4636008"/>
+            <a:ext cx="201168" cy="201168"/>
+          </a:xfrm>
+          <a:prstGeom prst="rect">
+            <a:avLst/>
+          </a:prstGeom>
+          <a:solidFill>
+            <a:srgbClr val="D9534F"/>
+          </a:solidFill>
+          <a:ln/>
+        </p:spPr>
+      </p:sp>
+      <p:sp>
+        <p:nvSpPr>
+          <p:cNvPr id="12" name="Text 9"/>
+          <p:cNvSpPr/>
+          <p:nvPr/>
+        </p:nvSpPr>
+        <p:spPr>
+          <a:xfrm>
+            <a:off x="7013448" y="4553712"/>
+            <a:ext cx="1600200" cy="420624"/>
+          </a:xfrm>
+          <a:prstGeom prst="rect">
+            <a:avLst/>
+          </a:prstGeom>
+          <a:noFill/>
+          <a:ln/>
+        </p:spPr>
+        <p:txBody>
+          <a:bodyPr wrap="square" lIns="0" tIns="0" rIns="0" bIns="0" rtlCol="0" anchor="ctr"/>
+          <a:lstStyle/>
+          <a:p>
+            <a:pPr indent="0" marL="0">
+              <a:buNone/>
+            </a:pPr>
+            <a:r>
+              <a:rPr lang="en-US" sz="1100" b="1" dirty="0">
+                <a:solidFill>
+                  <a:srgbClr val="D9534F"/>
+                </a:solidFill>
+                <a:latin typeface="Arial" pitchFamily="34" charset="0"/>
+                <a:ea typeface="Arial" pitchFamily="34" charset="-122"/>
+                <a:cs typeface="Arial" pitchFamily="34" charset="-120"/>
+              </a:rPr>
+              <a:t>■</a:t>
+            </a:r>
+            <a:pPr indent="0" marL="0">
+              <a:buNone/>
+            </a:pPr>
+            <a:r>
+              <a:rPr lang="en-US" sz="1100" dirty="0">
+                <a:solidFill>
+                  <a:srgbClr val="2D3748"/>
+                </a:solidFill>
+                <a:latin typeface="Arial" pitchFamily="34" charset="0"/>
+                <a:ea typeface="Arial" pitchFamily="34" charset="-122"/>
+                <a:cs typeface="Arial" pitchFamily="34" charset="-120"/>
+              </a:rPr>
+              <a:t>  consumentenlast (+3)</a:t>
+            </a:r>
+            <a:endParaRPr lang="en-US" sz="1100" dirty="0"/>
+          </a:p>
+        </p:txBody>
+      </p:sp>
+    </p:spTree>
+  </p:cSld>
+  <p:clrMapOvr>
+    <a:masterClrMapping/>
+  </p:clrMapOvr>
+</p:sld>
+</file>
+
+<file path=ppt/slides/slide14.xml><?xml version="1.0" encoding="utf-8"?>
+<p:sld xmlns:a="http://schemas.openxmlformats.org/drawingml/2006/main" xmlns:r="http://schemas.openxmlformats.org/officeDocument/2006/relationships" xmlns:p="http://schemas.openxmlformats.org/presentationml/2006/main">
+  <p:cSld name="Slide 14">
+    <p:spTree>
+      <p:nvGrpSpPr>
+        <p:cNvPr id="1" name=""/>
+        <p:cNvGrpSpPr/>
+        <p:nvPr/>
+      </p:nvGrpSpPr>
+      <p:grpSpPr>
+        <a:xfrm>
+          <a:off x="0" y="0"/>
+          <a:ext cx="0" cy="0"/>
+          <a:chOff x="0" y="0"/>
+          <a:chExt cx="0" cy="0"/>
+        </a:xfrm>
+      </p:grpSpPr>
+      <p:sp>
+        <p:nvSpPr>
+          <p:cNvPr id="2" name="Text 0"/>
+          <p:cNvSpPr/>
+          <p:nvPr/>
+        </p:nvSpPr>
+        <p:spPr>
+          <a:xfrm>
+            <a:off x="457200" y="0"/>
+            <a:ext cx="8229600" cy="685800"/>
+          </a:xfrm>
+          <a:prstGeom prst="rect">
+            <a:avLst/>
+          </a:prstGeom>
+          <a:noFill/>
+          <a:ln/>
+        </p:spPr>
+        <p:txBody>
+          <a:bodyPr wrap="square" rtlCol="0" anchor="ctr"/>
+          <a:lstStyle/>
+          <a:p>
+            <a:pPr indent="0" marL="0">
+              <a:buNone/>
+            </a:pPr>
+            <a:r>
+              <a:rPr lang="en-US" sz="2400" b="1" dirty="0">
+                <a:solidFill>
+                  <a:srgbClr val="FFFFFF"/>
+                </a:solidFill>
+                <a:latin typeface="Arial" pitchFamily="34" charset="0"/>
+                <a:ea typeface="Arial" pitchFamily="34" charset="-122"/>
+                <a:cs typeface="Arial" pitchFamily="34" charset="-120"/>
+              </a:rPr>
+              <a:t>Subsidie — theorie</a:t>
+            </a:r>
+            <a:endParaRPr lang="en-US" sz="2400" dirty="0"/>
+          </a:p>
+        </p:txBody>
+      </p:sp>
+      <p:sp>
+        <p:nvSpPr>
+          <p:cNvPr id="3" name="Shape 1"/>
+          <p:cNvSpPr/>
+          <p:nvPr/>
+        </p:nvSpPr>
+        <p:spPr>
+          <a:xfrm>
+            <a:off x="1188720" y="1005840"/>
+            <a:ext cx="6766560" cy="548640"/>
+          </a:xfrm>
+          <a:prstGeom prst="rect">
+            <a:avLst>
+              <a:gd name="adj" fmla="val 6667"/>
+            </a:avLst>
+          </a:prstGeom>
+          <a:solidFill>
+            <a:srgbClr val="F9F6F1"/>
+          </a:solidFill>
+          <a:ln/>
+          <a:effectLst>
+            <a:outerShdw sx="100000" sy="100000" kx="0" ky="0" algn="bl" rotWithShape="0" blurRad="76200" dist="25400" dir="8100000">
+              <a:srgbClr val="000000">
+                <a:alpha val="10000"/>
+              </a:srgbClr>
+            </a:outerShdw>
+          </a:effectLst>
+        </p:spPr>
+      </p:sp>
+      <p:sp>
+        <p:nvSpPr>
+          <p:cNvPr id="4" name="Text 2"/>
+          <p:cNvSpPr/>
+          <p:nvPr/>
+        </p:nvSpPr>
+        <p:spPr>
+          <a:xfrm>
+            <a:off x="1371600" y="1005840"/>
+            <a:ext cx="6492240" cy="548640"/>
+          </a:xfrm>
+          <a:prstGeom prst="rect">
+            <a:avLst/>
+          </a:prstGeom>
+          <a:noFill/>
+          <a:ln/>
+        </p:spPr>
+        <p:txBody>
+          <a:bodyPr wrap="square" lIns="0" tIns="0" rIns="0" bIns="0" rtlCol="0" anchor="ctr"/>
+          <a:lstStyle/>
+          <a:p>
+            <a:pPr indent="0" marL="0">
+              <a:buNone/>
+            </a:pPr>
+            <a:r>
+              <a:rPr lang="en-US" sz="1400" dirty="0">
+                <a:solidFill>
+                  <a:srgbClr val="2D3748"/>
+                </a:solidFill>
+                <a:latin typeface="Arial" pitchFamily="34" charset="0"/>
+                <a:ea typeface="Arial" pitchFamily="34" charset="-122"/>
+                <a:cs typeface="Arial" pitchFamily="34" charset="-120"/>
+              </a:rPr>
+              <a:t>Subsidie = het spiegelbeeld van een accijns</a:t>
+            </a:r>
+            <a:endParaRPr lang="en-US" sz="1400" dirty="0"/>
+          </a:p>
+        </p:txBody>
+      </p:sp>
+      <p:sp>
+        <p:nvSpPr>
+          <p:cNvPr id="5" name="Shape 3"/>
+          <p:cNvSpPr/>
+          <p:nvPr/>
+        </p:nvSpPr>
+        <p:spPr>
+          <a:xfrm>
+            <a:off x="1188720" y="1664208"/>
+            <a:ext cx="6766560" cy="548640"/>
+          </a:xfrm>
+          <a:prstGeom prst="rect">
+            <a:avLst>
+              <a:gd name="adj" fmla="val 6667"/>
+            </a:avLst>
+          </a:prstGeom>
+          <a:solidFill>
+            <a:srgbClr val="F9F6F1"/>
+          </a:solidFill>
+          <a:ln/>
+          <a:effectLst>
+            <a:outerShdw sx="100000" sy="100000" kx="0" ky="0" algn="bl" rotWithShape="0" blurRad="76200" dist="25400" dir="8100000">
+              <a:srgbClr val="000000">
+                <a:alpha val="10000"/>
+              </a:srgbClr>
+            </a:outerShdw>
+          </a:effectLst>
+        </p:spPr>
+      </p:sp>
+      <p:sp>
+        <p:nvSpPr>
+          <p:cNvPr id="6" name="Text 4"/>
+          <p:cNvSpPr/>
+          <p:nvPr/>
+        </p:nvSpPr>
+        <p:spPr>
+          <a:xfrm>
+            <a:off x="1371600" y="1664208"/>
+            <a:ext cx="6492240" cy="548640"/>
+          </a:xfrm>
+          <a:prstGeom prst="rect">
+            <a:avLst/>
+          </a:prstGeom>
+          <a:noFill/>
+          <a:ln/>
+        </p:spPr>
+        <p:txBody>
+          <a:bodyPr wrap="square" lIns="0" tIns="0" rIns="0" bIns="0" rtlCol="0" anchor="ctr"/>
+          <a:lstStyle/>
+          <a:p>
+            <a:pPr indent="0" marL="0">
+              <a:buNone/>
+            </a:pPr>
+            <a:r>
+              <a:rPr lang="en-US" sz="1400" dirty="0">
+                <a:solidFill>
+                  <a:srgbClr val="2D3748"/>
+                </a:solidFill>
+                <a:latin typeface="Arial" pitchFamily="34" charset="0"/>
+                <a:ea typeface="Arial" pitchFamily="34" charset="-122"/>
+                <a:cs typeface="Arial" pitchFamily="34" charset="-120"/>
+              </a:rPr>
+              <a:t>↓  Aanbodlijn verschuift parallel omlaag (met het subsidiebedrag)</a:t>
+            </a:r>
+            <a:endParaRPr lang="en-US" sz="1400" dirty="0"/>
+          </a:p>
+        </p:txBody>
+      </p:sp>
+      <p:sp>
+        <p:nvSpPr>
+          <p:cNvPr id="7" name="Shape 5"/>
+          <p:cNvSpPr/>
+          <p:nvPr/>
+        </p:nvSpPr>
+        <p:spPr>
+          <a:xfrm>
+            <a:off x="1188720" y="2322576"/>
+            <a:ext cx="6766560" cy="548640"/>
+          </a:xfrm>
+          <a:prstGeom prst="rect">
+            <a:avLst>
+              <a:gd name="adj" fmla="val 6667"/>
+            </a:avLst>
+          </a:prstGeom>
+          <a:solidFill>
+            <a:srgbClr val="E67E22"/>
+          </a:solidFill>
+          <a:ln/>
+          <a:effectLst>
+            <a:outerShdw sx="100000" sy="100000" kx="0" ky="0" algn="bl" rotWithShape="0" blurRad="76200" dist="25400" dir="8100000">
+              <a:srgbClr val="000000">
+                <a:alpha val="10000"/>
+              </a:srgbClr>
+            </a:outerShdw>
+          </a:effectLst>
+        </p:spPr>
+      </p:sp>
+      <p:sp>
+        <p:nvSpPr>
+          <p:cNvPr id="8" name="Text 6"/>
+          <p:cNvSpPr/>
+          <p:nvPr/>
+        </p:nvSpPr>
+        <p:spPr>
+          <a:xfrm>
+            <a:off x="1371600" y="2322576"/>
+            <a:ext cx="6492240" cy="548640"/>
+          </a:xfrm>
+          <a:prstGeom prst="rect">
+            <a:avLst/>
+          </a:prstGeom>
+          <a:noFill/>
+          <a:ln/>
+        </p:spPr>
+        <p:txBody>
+          <a:bodyPr wrap="square" lIns="0" tIns="0" rIns="0" bIns="0" rtlCol="0" anchor="ctr"/>
+          <a:lstStyle/>
+          <a:p>
+            <a:pPr indent="0" marL="0">
+              <a:buNone/>
+            </a:pPr>
+            <a:r>
+              <a:rPr lang="en-US" sz="1400" b="1" dirty="0">
+                <a:solidFill>
+                  <a:srgbClr val="FFFFFF"/>
+                </a:solidFill>
+                <a:latin typeface="Arial" pitchFamily="34" charset="0"/>
+                <a:ea typeface="Arial" pitchFamily="34" charset="-122"/>
+                <a:cs typeface="Arial" pitchFamily="34" charset="-120"/>
+              </a:rPr>
+              <a:t>↓  Prijs voor consument daalt, hoeveelheid stijgt</a:t>
+            </a:r>
+            <a:endParaRPr lang="en-US" sz="1400" dirty="0"/>
+          </a:p>
+        </p:txBody>
+      </p:sp>
+      <p:sp>
+        <p:nvSpPr>
+          <p:cNvPr id="9" name="Shape 7"/>
+          <p:cNvSpPr/>
+          <p:nvPr/>
+        </p:nvSpPr>
+        <p:spPr>
+          <a:xfrm>
+            <a:off x="1188720" y="2980944"/>
+            <a:ext cx="6766560" cy="548640"/>
+          </a:xfrm>
+          <a:prstGeom prst="rect">
+            <a:avLst>
+              <a:gd name="adj" fmla="val 6667"/>
+            </a:avLst>
+          </a:prstGeom>
+          <a:solidFill>
+            <a:srgbClr val="F9F6F1"/>
+          </a:solidFill>
+          <a:ln/>
+          <a:effectLst>
+            <a:outerShdw sx="100000" sy="100000" kx="0" ky="0" algn="bl" rotWithShape="0" blurRad="76200" dist="25400" dir="8100000">
+              <a:srgbClr val="000000">
+                <a:alpha val="10000"/>
+              </a:srgbClr>
+            </a:outerShdw>
+          </a:effectLst>
+        </p:spPr>
+      </p:sp>
+      <p:sp>
+        <p:nvSpPr>
+          <p:cNvPr id="10" name="Text 8"/>
+          <p:cNvSpPr/>
+          <p:nvPr/>
+        </p:nvSpPr>
+        <p:spPr>
+          <a:xfrm>
+            <a:off x="1371600" y="2980944"/>
+            <a:ext cx="6492240" cy="548640"/>
+          </a:xfrm>
+          <a:prstGeom prst="rect">
+            <a:avLst/>
+          </a:prstGeom>
+          <a:noFill/>
+          <a:ln/>
+        </p:spPr>
+        <p:txBody>
+          <a:bodyPr wrap="square" lIns="0" tIns="0" rIns="0" bIns="0" rtlCol="0" anchor="ctr"/>
+          <a:lstStyle/>
+          <a:p>
+            <a:pPr indent="0" marL="0">
+              <a:buNone/>
+            </a:pPr>
+            <a:r>
+              <a:rPr lang="en-US" sz="1400" dirty="0">
+                <a:solidFill>
+                  <a:srgbClr val="2D3748"/>
+                </a:solidFill>
+                <a:latin typeface="Arial" pitchFamily="34" charset="0"/>
+                <a:ea typeface="Arial" pitchFamily="34" charset="-122"/>
+                <a:cs typeface="Arial" pitchFamily="34" charset="-120"/>
+              </a:rPr>
+              <a:t>↓  Zowel CS als PS stijgen — beide profiteren</a:t>
+            </a:r>
+            <a:endParaRPr lang="en-US" sz="1400" dirty="0"/>
+          </a:p>
+        </p:txBody>
+      </p:sp>
+      <p:sp>
+        <p:nvSpPr>
+          <p:cNvPr id="11" name="Shape 9"/>
+          <p:cNvSpPr/>
+          <p:nvPr/>
+        </p:nvSpPr>
+        <p:spPr>
+          <a:xfrm>
+            <a:off x="1188720" y="3639312"/>
+            <a:ext cx="6766560" cy="548640"/>
+          </a:xfrm>
+          <a:prstGeom prst="rect">
+            <a:avLst>
+              <a:gd name="adj" fmla="val 6667"/>
+            </a:avLst>
+          </a:prstGeom>
+          <a:solidFill>
+            <a:srgbClr val="E67E22"/>
+          </a:solidFill>
+          <a:ln/>
+          <a:effectLst>
+            <a:outerShdw sx="100000" sy="100000" kx="0" ky="0" algn="bl" rotWithShape="0" blurRad="76200" dist="25400" dir="8100000">
+              <a:srgbClr val="000000">
+                <a:alpha val="10000"/>
+              </a:srgbClr>
+            </a:outerShdw>
+          </a:effectLst>
+        </p:spPr>
+      </p:sp>
+      <p:sp>
+        <p:nvSpPr>
+          <p:cNvPr id="12" name="Text 10"/>
+          <p:cNvSpPr/>
+          <p:nvPr/>
+        </p:nvSpPr>
+        <p:spPr>
+          <a:xfrm>
+            <a:off x="1371600" y="3639312"/>
+            <a:ext cx="6492240" cy="548640"/>
+          </a:xfrm>
+          <a:prstGeom prst="rect">
+            <a:avLst/>
+          </a:prstGeom>
+          <a:noFill/>
+          <a:ln/>
+        </p:spPr>
+        <p:txBody>
+          <a:bodyPr wrap="square" lIns="0" tIns="0" rIns="0" bIns="0" rtlCol="0" anchor="ctr"/>
+          <a:lstStyle/>
+          <a:p>
+            <a:pPr indent="0" marL="0">
+              <a:buNone/>
+            </a:pPr>
+            <a:r>
+              <a:rPr lang="en-US" sz="1400" b="1" dirty="0">
+                <a:solidFill>
+                  <a:srgbClr val="FFFFFF"/>
+                </a:solidFill>
+                <a:latin typeface="Arial" pitchFamily="34" charset="0"/>
+                <a:ea typeface="Arial" pitchFamily="34" charset="-122"/>
+                <a:cs typeface="Arial" pitchFamily="34" charset="-120"/>
+              </a:rPr>
+              <a:t>↓  Kosten voor de overheid: subsidie × nieuwe hoeveelheid</a:t>
+            </a:r>
+            <a:endParaRPr lang="en-US" sz="1400" dirty="0"/>
+          </a:p>
+        </p:txBody>
+      </p:sp>
+    </p:spTree>
+  </p:cSld>
+  <p:clrMapOvr>
+    <a:masterClrMapping/>
+  </p:clrMapOvr>
+</p:sld>
+</file>
+
+<file path=ppt/slides/slide15.xml><?xml version="1.0" encoding="utf-8"?>
+<p:sld xmlns:a="http://schemas.openxmlformats.org/drawingml/2006/main" xmlns:r="http://schemas.openxmlformats.org/officeDocument/2006/relationships" xmlns:p="http://schemas.openxmlformats.org/presentationml/2006/main">
+  <p:cSld name="Slide 15">
+    <p:spTree>
+      <p:nvGrpSpPr>
+        <p:cNvPr id="1" name=""/>
+        <p:cNvGrpSpPr/>
+        <p:nvPr/>
+      </p:nvGrpSpPr>
+      <p:grpSpPr>
+        <a:xfrm>
+          <a:off x="0" y="0"/>
+          <a:ext cx="0" cy="0"/>
+          <a:chOff x="0" y="0"/>
+          <a:chExt cx="0" cy="0"/>
+        </a:xfrm>
+      </p:grpSpPr>
+      <p:sp>
+        <p:nvSpPr>
+          <p:cNvPr id="2" name="Text 0"/>
+          <p:cNvSpPr/>
+          <p:nvPr/>
+        </p:nvSpPr>
+        <p:spPr>
+          <a:xfrm>
+            <a:off x="457200" y="0"/>
+            <a:ext cx="8229600" cy="685800"/>
+          </a:xfrm>
+          <a:prstGeom prst="rect">
+            <a:avLst/>
+          </a:prstGeom>
+          <a:noFill/>
+          <a:ln/>
+        </p:spPr>
+        <p:txBody>
+          <a:bodyPr wrap="square" rtlCol="0" anchor="ctr"/>
+          <a:lstStyle/>
+          <a:p>
+            <a:pPr indent="0" marL="0">
+              <a:buNone/>
+            </a:pPr>
+            <a:r>
+              <a:rPr lang="en-US" sz="2400" b="1" dirty="0">
+                <a:solidFill>
+                  <a:srgbClr val="FFFFFF"/>
+                </a:solidFill>
+                <a:latin typeface="Arial" pitchFamily="34" charset="0"/>
+                <a:ea typeface="Arial" pitchFamily="34" charset="-122"/>
+                <a:cs typeface="Arial" pitchFamily="34" charset="-120"/>
+              </a:rPr>
+              <a:t>Subsidie in de grafiek</a:t>
+            </a:r>
+            <a:endParaRPr lang="en-US" sz="2400" dirty="0"/>
+          </a:p>
+        </p:txBody>
+      </p:sp>
+      <p:pic>
+        <p:nvPicPr>
+          <p:cNvPr id="3" name="Image 0" descr="preencoded.png">    </p:cNvPr>
+          <p:cNvPicPr>
+            <a:picLocks noChangeAspect="1"/>
+          </p:cNvPicPr>
+          <p:nvPr/>
+        </p:nvPicPr>
+        <p:blipFill>
+          <a:blip r:embed="rId1"/>
+          <a:stretch>
+            <a:fillRect/>
+          </a:stretch>
+        </p:blipFill>
+        <p:spPr>
+          <a:xfrm>
+            <a:off x="914400" y="749808"/>
+            <a:ext cx="7315200" cy="3657600"/>
+          </a:xfrm>
+          <a:prstGeom prst="rect">
+            <a:avLst/>
+          </a:prstGeom>
+        </p:spPr>
+      </p:pic>
+      <p:sp>
+        <p:nvSpPr>
+          <p:cNvPr id="4" name="Shape 1"/>
+          <p:cNvSpPr/>
+          <p:nvPr/>
+        </p:nvSpPr>
+        <p:spPr>
+          <a:xfrm>
+            <a:off x="457200" y="4480560"/>
+            <a:ext cx="8229600" cy="566928"/>
+          </a:xfrm>
+          <a:prstGeom prst="rect">
+            <a:avLst/>
+          </a:prstGeom>
+          <a:solidFill>
+            <a:srgbClr val="F7F8FA"/>
+          </a:solidFill>
+          <a:ln w="6350">
+            <a:solidFill>
+              <a:srgbClr val="CBD5E0"/>
+            </a:solidFill>
+            <a:prstDash val="solid"/>
+          </a:ln>
+        </p:spPr>
+      </p:sp>
+      <p:sp>
+        <p:nvSpPr>
+          <p:cNvPr id="5" name="Shape 2"/>
+          <p:cNvSpPr/>
+          <p:nvPr/>
+        </p:nvSpPr>
+        <p:spPr>
+          <a:xfrm>
+            <a:off x="566928" y="4636008"/>
+            <a:ext cx="201168" cy="201168"/>
+          </a:xfrm>
+          <a:prstGeom prst="rect">
+            <a:avLst/>
+          </a:prstGeom>
+          <a:solidFill>
+            <a:srgbClr val="1A5276"/>
+          </a:solidFill>
+          <a:ln/>
+        </p:spPr>
+      </p:sp>
+      <p:sp>
+        <p:nvSpPr>
+          <p:cNvPr id="6" name="Text 3"/>
+          <p:cNvSpPr/>
+          <p:nvPr/>
+        </p:nvSpPr>
+        <p:spPr>
+          <a:xfrm>
+            <a:off x="841248" y="4553712"/>
+            <a:ext cx="1600200" cy="420624"/>
+          </a:xfrm>
+          <a:prstGeom prst="rect">
+            <a:avLst/>
+          </a:prstGeom>
+          <a:noFill/>
+          <a:ln/>
+        </p:spPr>
+        <p:txBody>
+          <a:bodyPr wrap="square" lIns="0" tIns="0" rIns="0" bIns="0" rtlCol="0" anchor="ctr"/>
+          <a:lstStyle/>
+          <a:p>
+            <a:pPr indent="0" marL="0">
+              <a:buNone/>
+            </a:pPr>
+            <a:r>
+              <a:rPr lang="en-US" sz="1100" b="1" dirty="0">
+                <a:solidFill>
+                  <a:srgbClr val="1A5276"/>
+                </a:solidFill>
+                <a:latin typeface="Arial" pitchFamily="34" charset="0"/>
+                <a:ea typeface="Arial" pitchFamily="34" charset="-122"/>
+                <a:cs typeface="Arial" pitchFamily="34" charset="-120"/>
+              </a:rPr>
+              <a:t>V</a:t>
+            </a:r>
+            <a:pPr indent="0" marL="0">
+              <a:buNone/>
+            </a:pPr>
+            <a:r>
+              <a:rPr lang="en-US" sz="1100" dirty="0">
+                <a:solidFill>
+                  <a:srgbClr val="2D3748"/>
+                </a:solidFill>
+                <a:latin typeface="Arial" pitchFamily="34" charset="0"/>
+                <a:ea typeface="Arial" pitchFamily="34" charset="-122"/>
+                <a:cs typeface="Arial" pitchFamily="34" charset="-120"/>
+              </a:rPr>
+              <a:t>  vraag</a:t>
+            </a:r>
+            <a:endParaRPr lang="en-US" sz="1100" dirty="0"/>
+          </a:p>
+        </p:txBody>
+      </p:sp>
+      <p:sp>
+        <p:nvSpPr>
+          <p:cNvPr id="7" name="Shape 4"/>
+          <p:cNvSpPr/>
+          <p:nvPr/>
+        </p:nvSpPr>
+        <p:spPr>
+          <a:xfrm>
+            <a:off x="2624328" y="4636008"/>
+            <a:ext cx="201168" cy="201168"/>
+          </a:xfrm>
+          <a:prstGeom prst="rect">
+            <a:avLst/>
+          </a:prstGeom>
+          <a:solidFill>
+            <a:srgbClr val="E67E22"/>
+          </a:solidFill>
+          <a:ln/>
+        </p:spPr>
+      </p:sp>
+      <p:sp>
+        <p:nvSpPr>
+          <p:cNvPr id="8" name="Text 5"/>
+          <p:cNvSpPr/>
+          <p:nvPr/>
+        </p:nvSpPr>
+        <p:spPr>
+          <a:xfrm>
+            <a:off x="2898648" y="4553712"/>
+            <a:ext cx="1600200" cy="420624"/>
+          </a:xfrm>
+          <a:prstGeom prst="rect">
+            <a:avLst/>
+          </a:prstGeom>
+          <a:noFill/>
+          <a:ln/>
+        </p:spPr>
+        <p:txBody>
+          <a:bodyPr wrap="square" lIns="0" tIns="0" rIns="0" bIns="0" rtlCol="0" anchor="ctr"/>
+          <a:lstStyle/>
+          <a:p>
+            <a:pPr indent="0" marL="0">
+              <a:buNone/>
+            </a:pPr>
+            <a:r>
+              <a:rPr lang="en-US" sz="1100" b="1" dirty="0">
+                <a:solidFill>
+                  <a:srgbClr val="E67E22"/>
+                </a:solidFill>
+                <a:latin typeface="Arial" pitchFamily="34" charset="0"/>
+                <a:ea typeface="Arial" pitchFamily="34" charset="-122"/>
+                <a:cs typeface="Arial" pitchFamily="34" charset="-120"/>
+              </a:rPr>
+              <a:t>A-sub.</a:t>
+            </a:r>
+            <a:pPr indent="0" marL="0">
+              <a:buNone/>
+            </a:pPr>
+            <a:r>
+              <a:rPr lang="en-US" sz="1100" dirty="0">
+                <a:solidFill>
+                  <a:srgbClr val="2D3748"/>
+                </a:solidFill>
+                <a:latin typeface="Arial" pitchFamily="34" charset="0"/>
+                <a:ea typeface="Arial" pitchFamily="34" charset="-122"/>
+                <a:cs typeface="Arial" pitchFamily="34" charset="-120"/>
+              </a:rPr>
+              <a:t>  aanbod na subsidie</a:t>
+            </a:r>
+            <a:endParaRPr lang="en-US" sz="1100" dirty="0"/>
+          </a:p>
+        </p:txBody>
+      </p:sp>
+      <p:sp>
+        <p:nvSpPr>
+          <p:cNvPr id="9" name="Shape 6"/>
+          <p:cNvSpPr/>
+          <p:nvPr/>
+        </p:nvSpPr>
+        <p:spPr>
+          <a:xfrm>
+            <a:off x="4681728" y="4636008"/>
+            <a:ext cx="201168" cy="201168"/>
+          </a:xfrm>
+          <a:prstGeom prst="rect">
+            <a:avLst/>
+          </a:prstGeom>
+          <a:solidFill>
+            <a:srgbClr val="F8C471"/>
+          </a:solidFill>
+          <a:ln/>
+        </p:spPr>
+      </p:sp>
+      <p:sp>
+        <p:nvSpPr>
+          <p:cNvPr id="10" name="Text 7"/>
+          <p:cNvSpPr/>
+          <p:nvPr/>
+        </p:nvSpPr>
+        <p:spPr>
+          <a:xfrm>
+            <a:off x="4956048" y="4553712"/>
+            <a:ext cx="1600200" cy="420624"/>
+          </a:xfrm>
+          <a:prstGeom prst="rect">
+            <a:avLst/>
+          </a:prstGeom>
+          <a:noFill/>
+          <a:ln/>
+        </p:spPr>
+        <p:txBody>
+          <a:bodyPr wrap="square" lIns="0" tIns="0" rIns="0" bIns="0" rtlCol="0" anchor="ctr"/>
+          <a:lstStyle/>
+          <a:p>
+            <a:pPr indent="0" marL="0">
+              <a:buNone/>
+            </a:pPr>
+            <a:r>
+              <a:rPr lang="en-US" sz="1100" b="1" dirty="0">
+                <a:solidFill>
+                  <a:srgbClr val="F8C471"/>
+                </a:solidFill>
+                <a:latin typeface="Arial" pitchFamily="34" charset="0"/>
+                <a:ea typeface="Arial" pitchFamily="34" charset="-122"/>
+                <a:cs typeface="Arial" pitchFamily="34" charset="-120"/>
+              </a:rPr>
+              <a:t>■</a:t>
+            </a:r>
+            <a:pPr indent="0" marL="0">
+              <a:buNone/>
+            </a:pPr>
+            <a:r>
+              <a:rPr lang="en-US" sz="1100" dirty="0">
+                <a:solidFill>
+                  <a:srgbClr val="2D3748"/>
+                </a:solidFill>
+                <a:latin typeface="Arial" pitchFamily="34" charset="0"/>
+                <a:ea typeface="Arial" pitchFamily="34" charset="-122"/>
+                <a:cs typeface="Arial" pitchFamily="34" charset="-120"/>
+              </a:rPr>
+              <a:t>  subsidiekosten</a:t>
+            </a:r>
+            <a:endParaRPr lang="en-US" sz="1100" dirty="0"/>
+          </a:p>
+        </p:txBody>
+      </p:sp>
+      <p:sp>
+        <p:nvSpPr>
+          <p:cNvPr id="11" name="Shape 8"/>
+          <p:cNvSpPr/>
+          <p:nvPr/>
+        </p:nvSpPr>
+        <p:spPr>
+          <a:xfrm>
+            <a:off x="6739128" y="4636008"/>
+            <a:ext cx="201168" cy="201168"/>
+          </a:xfrm>
+          <a:prstGeom prst="rect">
+            <a:avLst/>
+          </a:prstGeom>
+          <a:solidFill>
+            <a:srgbClr val="7B4A12"/>
+          </a:solidFill>
+          <a:ln/>
+        </p:spPr>
+      </p:sp>
+      <p:sp>
+        <p:nvSpPr>
+          <p:cNvPr id="12" name="Text 9"/>
+          <p:cNvSpPr/>
+          <p:nvPr/>
+        </p:nvSpPr>
+        <p:spPr>
+          <a:xfrm>
+            <a:off x="7013448" y="4553712"/>
+            <a:ext cx="1600200" cy="420624"/>
+          </a:xfrm>
+          <a:prstGeom prst="rect">
+            <a:avLst/>
+          </a:prstGeom>
+          <a:noFill/>
+          <a:ln/>
+        </p:spPr>
+        <p:txBody>
+          <a:bodyPr wrap="square" lIns="0" tIns="0" rIns="0" bIns="0" rtlCol="0" anchor="ctr"/>
+          <a:lstStyle/>
+          <a:p>
+            <a:pPr indent="0" marL="0">
+              <a:buNone/>
+            </a:pPr>
+            <a:r>
+              <a:rPr lang="en-US" sz="1100" b="1" dirty="0">
+                <a:solidFill>
+                  <a:srgbClr val="7B4A12"/>
+                </a:solidFill>
+                <a:latin typeface="Arial" pitchFamily="34" charset="0"/>
+                <a:ea typeface="Arial" pitchFamily="34" charset="-122"/>
+                <a:cs typeface="Arial" pitchFamily="34" charset="-120"/>
+              </a:rPr>
+              <a:t>s</a:t>
+            </a:r>
+            <a:pPr indent="0" marL="0">
+              <a:buNone/>
+            </a:pPr>
+            <a:r>
+              <a:rPr lang="en-US" sz="1100" dirty="0">
+                <a:solidFill>
+                  <a:srgbClr val="2D3748"/>
+                </a:solidFill>
+                <a:latin typeface="Arial" pitchFamily="34" charset="0"/>
+                <a:ea typeface="Arial" pitchFamily="34" charset="-122"/>
+                <a:cs typeface="Arial" pitchFamily="34" charset="-120"/>
+              </a:rPr>
+              <a:t>  subsidie per eenheid</a:t>
+            </a:r>
+            <a:endParaRPr lang="en-US" sz="1100" dirty="0"/>
+          </a:p>
+        </p:txBody>
+      </p:sp>
+    </p:spTree>
+  </p:cSld>
+  <p:clrMapOvr>
+    <a:masterClrMapping/>
+  </p:clrMapOvr>
+</p:sld>
+</file>
+
+<file path=ppt/slides/slide16.xml><?xml version="1.0" encoding="utf-8"?>
+<p:sld xmlns:a="http://schemas.openxmlformats.org/drawingml/2006/main" xmlns:r="http://schemas.openxmlformats.org/officeDocument/2006/relationships" xmlns:p="http://schemas.openxmlformats.org/presentationml/2006/main">
+  <p:cSld name="Slide 16">
+    <p:spTree>
+      <p:nvGrpSpPr>
+        <p:cNvPr id="1" name=""/>
+        <p:cNvGrpSpPr/>
+        <p:nvPr/>
+      </p:nvGrpSpPr>
+      <p:grpSpPr>
+        <a:xfrm>
+          <a:off x="0" y="0"/>
+          <a:ext cx="0" cy="0"/>
+          <a:chOff x="0" y="0"/>
+          <a:chExt cx="0" cy="0"/>
+        </a:xfrm>
+      </p:grpSpPr>
+      <p:sp>
+        <p:nvSpPr>
+          <p:cNvPr id="2" name="Text 0"/>
+          <p:cNvSpPr/>
+          <p:nvPr/>
+        </p:nvSpPr>
+        <p:spPr>
+          <a:xfrm>
+            <a:off x="457200" y="0"/>
+            <a:ext cx="8229600" cy="685800"/>
+          </a:xfrm>
+          <a:prstGeom prst="rect">
+            <a:avLst/>
+          </a:prstGeom>
+          <a:noFill/>
+          <a:ln/>
+        </p:spPr>
+        <p:txBody>
+          <a:bodyPr wrap="square" rtlCol="0" anchor="ctr"/>
+          <a:lstStyle/>
+          <a:p>
+            <a:pPr indent="0" marL="0">
+              <a:buNone/>
+            </a:pPr>
+            <a:r>
+              <a:rPr lang="en-US" sz="2400" b="1" dirty="0">
+                <a:solidFill>
+                  <a:srgbClr val="FFFFFF"/>
+                </a:solidFill>
+                <a:latin typeface="Arial" pitchFamily="34" charset="0"/>
+                <a:ea typeface="Arial" pitchFamily="34" charset="-122"/>
+                <a:cs typeface="Arial" pitchFamily="34" charset="-120"/>
+              </a:rPr>
+              <a:t>Valkuilen</a:t>
+            </a:r>
+            <a:endParaRPr lang="en-US" sz="2400" dirty="0"/>
+          </a:p>
+        </p:txBody>
+      </p:sp>
+      <p:sp>
+        <p:nvSpPr>
+          <p:cNvPr id="3" name="Shape 1"/>
+          <p:cNvSpPr/>
+          <p:nvPr/>
+        </p:nvSpPr>
+        <p:spPr>
+          <a:xfrm>
+            <a:off x="548640" y="960120"/>
+            <a:ext cx="8046720" cy="1069848"/>
+          </a:xfrm>
+          <a:prstGeom prst="rect">
+            <a:avLst>
+              <a:gd name="adj" fmla="val 3419"/>
+            </a:avLst>
+          </a:prstGeom>
+          <a:solidFill>
+            <a:srgbClr val="FDE8E8"/>
+          </a:solidFill>
+          <a:ln/>
+        </p:spPr>
+      </p:sp>
+      <p:sp>
+        <p:nvSpPr>
+          <p:cNvPr id="4" name="Shape 2"/>
+          <p:cNvSpPr/>
+          <p:nvPr/>
+        </p:nvSpPr>
+        <p:spPr>
+          <a:xfrm>
+            <a:off x="548640" y="960120"/>
+            <a:ext cx="54864" cy="1069848"/>
+          </a:xfrm>
+          <a:prstGeom prst="rect">
+            <a:avLst/>
+          </a:prstGeom>
+          <a:solidFill>
+            <a:srgbClr val="D9534F"/>
+          </a:solidFill>
+          <a:ln/>
+        </p:spPr>
+      </p:sp>
+      <p:sp>
+        <p:nvSpPr>
+          <p:cNvPr id="5" name="Text 3"/>
+          <p:cNvSpPr/>
+          <p:nvPr/>
+        </p:nvSpPr>
+        <p:spPr>
+          <a:xfrm>
+            <a:off x="777240" y="1051560"/>
+            <a:ext cx="7680960" cy="365760"/>
+          </a:xfrm>
+          <a:prstGeom prst="rect">
+            <a:avLst/>
+          </a:prstGeom>
+          <a:noFill/>
+          <a:ln/>
+        </p:spPr>
+        <p:txBody>
+          <a:bodyPr wrap="square" lIns="0" tIns="0" rIns="0" bIns="0" rtlCol="0" anchor="t"/>
+          <a:lstStyle/>
+          <a:p>
+            <a:pPr indent="0" marL="0">
+              <a:buNone/>
+            </a:pPr>
+            <a:r>
+              <a:rPr lang="en-US" sz="1600" b="1" dirty="0">
+                <a:solidFill>
+                  <a:srgbClr val="922B21"/>
+                </a:solidFill>
+                <a:latin typeface="Arial" pitchFamily="34" charset="0"/>
+                <a:ea typeface="Arial" pitchFamily="34" charset="-122"/>
+                <a:cs typeface="Arial" pitchFamily="34" charset="-120"/>
+              </a:rPr>
+              <a:t>“Een minimumprijs helpt altijd”</a:t>
+            </a:r>
+            <a:endParaRPr lang="en-US" sz="1600" dirty="0"/>
+          </a:p>
+        </p:txBody>
+      </p:sp>
+      <p:sp>
+        <p:nvSpPr>
+          <p:cNvPr id="6" name="Text 4"/>
+          <p:cNvSpPr/>
+          <p:nvPr/>
+        </p:nvSpPr>
+        <p:spPr>
+          <a:xfrm>
+            <a:off x="777240" y="1399032"/>
+            <a:ext cx="7680960" cy="566928"/>
+          </a:xfrm>
+          <a:prstGeom prst="rect">
+            <a:avLst/>
+          </a:prstGeom>
+          <a:noFill/>
+          <a:ln/>
+        </p:spPr>
+        <p:txBody>
+          <a:bodyPr wrap="square" lIns="0" tIns="0" rIns="0" bIns="0" rtlCol="0" anchor="t"/>
+          <a:lstStyle/>
+          <a:p>
+            <a:pPr indent="0" marL="0">
+              <a:lnSpc>
+                <a:spcPct val="120000"/>
+              </a:lnSpc>
+              <a:buNone/>
+            </a:pPr>
+            <a:r>
+              <a:rPr lang="en-US" sz="1300" dirty="0">
+                <a:solidFill>
+                  <a:srgbClr val="2D3748"/>
+                </a:solidFill>
+                <a:latin typeface="Arial" pitchFamily="34" charset="0"/>
+                <a:ea typeface="Arial" pitchFamily="34" charset="-122"/>
+                <a:cs typeface="Arial" pitchFamily="34" charset="-120"/>
+              </a:rPr>
+              <a:t>Onjuist. Alleen bindend als Pmin &gt; P*. En zelfs dan ontstaat er een aanbodoverschot waar niemand op zit te wachten.</a:t>
+            </a:r>
+            <a:endParaRPr lang="en-US" sz="1300" dirty="0"/>
+          </a:p>
+        </p:txBody>
+      </p:sp>
+      <p:sp>
+        <p:nvSpPr>
+          <p:cNvPr id="7" name="Shape 5"/>
+          <p:cNvSpPr/>
+          <p:nvPr/>
+        </p:nvSpPr>
+        <p:spPr>
+          <a:xfrm>
+            <a:off x="548640" y="2157984"/>
+            <a:ext cx="8046720" cy="1069848"/>
+          </a:xfrm>
+          <a:prstGeom prst="rect">
+            <a:avLst>
+              <a:gd name="adj" fmla="val 3419"/>
+            </a:avLst>
+          </a:prstGeom>
+          <a:solidFill>
+            <a:srgbClr val="FDE8E8"/>
+          </a:solidFill>
+          <a:ln/>
+        </p:spPr>
+      </p:sp>
+      <p:sp>
+        <p:nvSpPr>
+          <p:cNvPr id="8" name="Shape 6"/>
+          <p:cNvSpPr/>
+          <p:nvPr/>
+        </p:nvSpPr>
+        <p:spPr>
+          <a:xfrm>
+            <a:off x="548640" y="2157984"/>
+            <a:ext cx="54864" cy="1069848"/>
+          </a:xfrm>
+          <a:prstGeom prst="rect">
+            <a:avLst/>
+          </a:prstGeom>
+          <a:solidFill>
+            <a:srgbClr val="D9534F"/>
+          </a:solidFill>
+          <a:ln/>
+        </p:spPr>
+      </p:sp>
+      <p:sp>
+        <p:nvSpPr>
+          <p:cNvPr id="9" name="Text 7"/>
+          <p:cNvSpPr/>
+          <p:nvPr/>
+        </p:nvSpPr>
+        <p:spPr>
+          <a:xfrm>
+            <a:off x="777240" y="2249424"/>
+            <a:ext cx="7680960" cy="365760"/>
+          </a:xfrm>
+          <a:prstGeom prst="rect">
+            <a:avLst/>
+          </a:prstGeom>
+          <a:noFill/>
+          <a:ln/>
+        </p:spPr>
+        <p:txBody>
+          <a:bodyPr wrap="square" lIns="0" tIns="0" rIns="0" bIns="0" rtlCol="0" anchor="t"/>
+          <a:lstStyle/>
+          <a:p>
+            <a:pPr indent="0" marL="0">
+              <a:buNone/>
+            </a:pPr>
+            <a:r>
+              <a:rPr lang="en-US" sz="1600" b="1" dirty="0">
+                <a:solidFill>
+                  <a:srgbClr val="922B21"/>
+                </a:solidFill>
+                <a:latin typeface="Arial" pitchFamily="34" charset="0"/>
+                <a:ea typeface="Arial" pitchFamily="34" charset="-122"/>
+                <a:cs typeface="Arial" pitchFamily="34" charset="-120"/>
+              </a:rPr>
+              <a:t>“Bij een accijns stijgt de prijs met het volle accijnsbedrag”</a:t>
+            </a:r>
+            <a:endParaRPr lang="en-US" sz="1600" dirty="0"/>
+          </a:p>
+        </p:txBody>
+      </p:sp>
+      <p:sp>
+        <p:nvSpPr>
+          <p:cNvPr id="10" name="Text 8"/>
+          <p:cNvSpPr/>
+          <p:nvPr/>
+        </p:nvSpPr>
+        <p:spPr>
+          <a:xfrm>
+            <a:off x="777240" y="2596896"/>
+            <a:ext cx="7680960" cy="566928"/>
+          </a:xfrm>
+          <a:prstGeom prst="rect">
+            <a:avLst/>
+          </a:prstGeom>
+          <a:noFill/>
+          <a:ln/>
+        </p:spPr>
+        <p:txBody>
+          <a:bodyPr wrap="square" lIns="0" tIns="0" rIns="0" bIns="0" rtlCol="0" anchor="t"/>
+          <a:lstStyle/>
+          <a:p>
+            <a:pPr indent="0" marL="0">
+              <a:lnSpc>
+                <a:spcPct val="120000"/>
+              </a:lnSpc>
+              <a:buNone/>
+            </a:pPr>
+            <a:r>
+              <a:rPr lang="en-US" sz="1300" dirty="0">
+                <a:solidFill>
+                  <a:srgbClr val="2D3748"/>
+                </a:solidFill>
+                <a:latin typeface="Arial" pitchFamily="34" charset="0"/>
+                <a:ea typeface="Arial" pitchFamily="34" charset="-122"/>
+                <a:cs typeface="Arial" pitchFamily="34" charset="-120"/>
+              </a:rPr>
+              <a:t>Onjuist. De prijsstijging is kleiner dan de accijns — de last wordt gedeeld tussen consument en producent.</a:t>
+            </a:r>
+            <a:endParaRPr lang="en-US" sz="1300" dirty="0"/>
+          </a:p>
+        </p:txBody>
+      </p:sp>
+      <p:sp>
+        <p:nvSpPr>
+          <p:cNvPr id="11" name="Shape 9"/>
+          <p:cNvSpPr/>
+          <p:nvPr/>
+        </p:nvSpPr>
+        <p:spPr>
+          <a:xfrm>
+            <a:off x="548640" y="3355848"/>
+            <a:ext cx="8046720" cy="1069848"/>
+          </a:xfrm>
+          <a:prstGeom prst="rect">
+            <a:avLst>
+              <a:gd name="adj" fmla="val 3419"/>
+            </a:avLst>
+          </a:prstGeom>
+          <a:solidFill>
+            <a:srgbClr val="FDE8E8"/>
+          </a:solidFill>
+          <a:ln/>
+        </p:spPr>
+      </p:sp>
+      <p:sp>
+        <p:nvSpPr>
+          <p:cNvPr id="12" name="Shape 10"/>
+          <p:cNvSpPr/>
+          <p:nvPr/>
+        </p:nvSpPr>
+        <p:spPr>
+          <a:xfrm>
+            <a:off x="548640" y="3355848"/>
+            <a:ext cx="54864" cy="1069848"/>
+          </a:xfrm>
+          <a:prstGeom prst="rect">
+            <a:avLst/>
+          </a:prstGeom>
+          <a:solidFill>
+            <a:srgbClr val="D9534F"/>
+          </a:solidFill>
+          <a:ln/>
+        </p:spPr>
+      </p:sp>
+      <p:sp>
+        <p:nvSpPr>
+          <p:cNvPr id="13" name="Text 11"/>
+          <p:cNvSpPr/>
+          <p:nvPr/>
+        </p:nvSpPr>
+        <p:spPr>
+          <a:xfrm>
+            <a:off x="777240" y="3447288"/>
+            <a:ext cx="7680960" cy="365760"/>
+          </a:xfrm>
+          <a:prstGeom prst="rect">
+            <a:avLst/>
+          </a:prstGeom>
+          <a:noFill/>
+          <a:ln/>
+        </p:spPr>
+        <p:txBody>
+          <a:bodyPr wrap="square" lIns="0" tIns="0" rIns="0" bIns="0" rtlCol="0" anchor="t"/>
+          <a:lstStyle/>
+          <a:p>
+            <a:pPr indent="0" marL="0">
+              <a:buNone/>
+            </a:pPr>
+            <a:r>
+              <a:rPr lang="en-US" sz="1600" b="1" dirty="0">
+                <a:solidFill>
+                  <a:srgbClr val="922B21"/>
+                </a:solidFill>
+                <a:latin typeface="Arial" pitchFamily="34" charset="0"/>
+                <a:ea typeface="Arial" pitchFamily="34" charset="-122"/>
+                <a:cs typeface="Arial" pitchFamily="34" charset="-120"/>
+              </a:rPr>
+              <a:t>“Een maximumprijs maakt alles goedkoper voor iedereen”</a:t>
+            </a:r>
+            <a:endParaRPr lang="en-US" sz="1600" dirty="0"/>
+          </a:p>
+        </p:txBody>
+      </p:sp>
+      <p:sp>
+        <p:nvSpPr>
+          <p:cNvPr id="14" name="Text 12"/>
+          <p:cNvSpPr/>
+          <p:nvPr/>
+        </p:nvSpPr>
+        <p:spPr>
+          <a:xfrm>
+            <a:off x="777240" y="3794760"/>
+            <a:ext cx="7680960" cy="566928"/>
+          </a:xfrm>
+          <a:prstGeom prst="rect">
+            <a:avLst/>
+          </a:prstGeom>
+          <a:noFill/>
+          <a:ln/>
+        </p:spPr>
+        <p:txBody>
+          <a:bodyPr wrap="square" lIns="0" tIns="0" rIns="0" bIns="0" rtlCol="0" anchor="t"/>
+          <a:lstStyle/>
+          <a:p>
+            <a:pPr indent="0" marL="0">
+              <a:lnSpc>
+                <a:spcPct val="120000"/>
+              </a:lnSpc>
+              <a:buNone/>
+            </a:pPr>
+            <a:r>
+              <a:rPr lang="en-US" sz="1300" dirty="0">
+                <a:solidFill>
+                  <a:srgbClr val="2D3748"/>
+                </a:solidFill>
+                <a:latin typeface="Arial" pitchFamily="34" charset="0"/>
+                <a:ea typeface="Arial" pitchFamily="34" charset="-122"/>
+                <a:cs typeface="Arial" pitchFamily="34" charset="-120"/>
+              </a:rPr>
+              <a:t>Onjuist. Er ontstaat een tekort: sommigen betalen minder, maar anderen krijgen het product helemaal niet.</a:t>
+            </a:r>
+            <a:endParaRPr lang="en-US" sz="1300" dirty="0"/>
+          </a:p>
+        </p:txBody>
+      </p:sp>
+    </p:spTree>
+  </p:cSld>
+  <p:clrMapOvr>
+    <a:masterClrMapping/>
+  </p:clrMapOvr>
+</p:sld>
+</file>
+
+<file path=ppt/slides/slide17.xml><?xml version="1.0" encoding="utf-8"?>
+<p:sld xmlns:a="http://schemas.openxmlformats.org/drawingml/2006/main" xmlns:r="http://schemas.openxmlformats.org/officeDocument/2006/relationships" xmlns:p="http://schemas.openxmlformats.org/presentationml/2006/main">
+  <p:cSld name="Slide 17">
+    <p:spTree>
+      <p:nvGrpSpPr>
+        <p:cNvPr id="1" name=""/>
+        <p:cNvGrpSpPr/>
+        <p:nvPr/>
+      </p:nvGrpSpPr>
+      <p:grpSpPr>
+        <a:xfrm>
+          <a:off x="0" y="0"/>
+          <a:ext cx="0" cy="0"/>
+          <a:chOff x="0" y="0"/>
+          <a:chExt cx="0" cy="0"/>
+        </a:xfrm>
+      </p:grpSpPr>
+      <p:sp>
+        <p:nvSpPr>
+          <p:cNvPr id="2" name="Text 0"/>
+          <p:cNvSpPr/>
+          <p:nvPr/>
+        </p:nvSpPr>
+        <p:spPr>
+          <a:xfrm>
+            <a:off x="640080" y="320040"/>
+            <a:ext cx="7863840" cy="548640"/>
+          </a:xfrm>
+          <a:prstGeom prst="rect">
+            <a:avLst/>
+          </a:prstGeom>
+          <a:noFill/>
+          <a:ln/>
+        </p:spPr>
+        <p:txBody>
+          <a:bodyPr wrap="square" rtlCol="0" anchor="ctr"/>
+          <a:lstStyle/>
+          <a:p>
+            <a:pPr indent="0" marL="0">
+              <a:buNone/>
+            </a:pPr>
+            <a:r>
+              <a:rPr lang="en-US" sz="3000" b="1" dirty="0">
+                <a:solidFill>
+                  <a:srgbClr val="FFFFFF"/>
+                </a:solidFill>
+                <a:latin typeface="Arial" pitchFamily="34" charset="0"/>
+                <a:ea typeface="Arial" pitchFamily="34" charset="-122"/>
+                <a:cs typeface="Arial" pitchFamily="34" charset="-120"/>
+              </a:rPr>
+              <a:t>Samenvatting</a:t>
+            </a:r>
+            <a:endParaRPr lang="en-US" sz="3000" dirty="0"/>
+          </a:p>
+        </p:txBody>
+      </p:sp>
+      <p:sp>
+        <p:nvSpPr>
+          <p:cNvPr id="3" name="Text 1"/>
+          <p:cNvSpPr/>
+          <p:nvPr/>
+        </p:nvSpPr>
+        <p:spPr>
+          <a:xfrm>
+            <a:off x="640080" y="868680"/>
+            <a:ext cx="7863840" cy="365760"/>
+          </a:xfrm>
+          <a:prstGeom prst="rect">
+            <a:avLst/>
+          </a:prstGeom>
+          <a:noFill/>
+          <a:ln/>
+        </p:spPr>
+        <p:txBody>
+          <a:bodyPr wrap="square" rtlCol="0" anchor="ctr"/>
+          <a:lstStyle/>
+          <a:p>
+            <a:pPr indent="0" marL="0">
+              <a:buNone/>
+            </a:pPr>
+            <a:r>
+              <a:rPr lang="en-US" sz="1400" i="1" dirty="0">
+                <a:solidFill>
+                  <a:srgbClr val="718096"/>
+                </a:solidFill>
+                <a:latin typeface="Arial" pitchFamily="34" charset="0"/>
+                <a:ea typeface="Arial" pitchFamily="34" charset="-122"/>
+                <a:cs typeface="Arial" pitchFamily="34" charset="-120"/>
+              </a:rPr>
+              <a:t>Check: beheers je dit voordat je gaat oefenen?</a:t>
+            </a:r>
+            <a:endParaRPr lang="en-US" sz="1400" dirty="0"/>
+          </a:p>
+        </p:txBody>
+      </p:sp>
+      <p:sp>
+        <p:nvSpPr>
+          <p:cNvPr id="4" name="Text 2"/>
+          <p:cNvSpPr/>
+          <p:nvPr/>
+        </p:nvSpPr>
+        <p:spPr>
+          <a:xfrm>
+            <a:off x="640080" y="1417320"/>
+            <a:ext cx="7863840" cy="3200400"/>
+          </a:xfrm>
+          <a:prstGeom prst="rect">
+            <a:avLst/>
+          </a:prstGeom>
+          <a:noFill/>
+          <a:ln/>
+        </p:spPr>
+        <p:txBody>
+          <a:bodyPr wrap="square" rtlCol="0" anchor="ctr"/>
+          <a:lstStyle/>
+          <a:p>
+            <a:pPr marL="342900" indent="-342900">
+              <a:lnSpc>
+                <a:spcPct val="125000"/>
               </a:lnSpc>
               <a:spcAft>
-                <a:spcPts val="600"/>
+                <a:spcPts val="800"/>
               </a:spcAft>
               <a:buSzPct val="100000"/>
-              <a:buChar char="•"/>
+              <a:buChar char="■"/>
             </a:pPr>
             <a:r>
               <a:rPr lang="en-US" sz="1500" dirty="0">
@@ -2055,19 +5611,20 @@
                 <a:ea typeface="Arial" pitchFamily="34" charset="-122"/>
                 <a:cs typeface="Arial" pitchFamily="34" charset="-120"/>
               </a:rPr>
-              <a:t>Minimumprijs boven P* → aanbodoverschot</a:t>
-            </a:r>
-          </a:p>
-          <a:p>
-            <a:pPr algn="l" marL="342900" indent="-342900">
+              <a:t>Minimumprijs boven P*  →  aanbodoverschot (bv. melkgarantieprijs)</a:t>
+            </a:r>
+            <a:endParaRPr lang="en-US" sz="1500" dirty="0"/>
+          </a:p>
+          <a:p>
+            <a:pPr marL="342900" indent="-342900">
               <a:lnSpc>
-                <a:spcPct val="160000"/>
+                <a:spcPct val="125000"/>
               </a:lnSpc>
               <a:spcAft>
-                <a:spcPts val="600"/>
+                <a:spcPts val="800"/>
               </a:spcAft>
               <a:buSzPct val="100000"/>
-              <a:buChar char="•"/>
+              <a:buChar char="■"/>
             </a:pPr>
             <a:r>
               <a:rPr lang="en-US" sz="1500" dirty="0">
@@ -2078,19 +5635,20 @@
                 <a:ea typeface="Arial" pitchFamily="34" charset="-122"/>
                 <a:cs typeface="Arial" pitchFamily="34" charset="-120"/>
               </a:rPr>
-              <a:t>Maximumprijs onder P* → vraagoverschot</a:t>
-            </a:r>
-          </a:p>
-          <a:p>
-            <a:pPr algn="l" marL="342900" indent="-342900">
+              <a:t>Maximumprijs onder P*  →  vraagoverschot / tekort (bv. huurplafond)</a:t>
+            </a:r>
+            <a:endParaRPr lang="en-US" sz="1500" dirty="0"/>
+          </a:p>
+          <a:p>
+            <a:pPr marL="342900" indent="-342900">
               <a:lnSpc>
-                <a:spcPct val="160000"/>
+                <a:spcPct val="125000"/>
               </a:lnSpc>
               <a:spcAft>
-                <a:spcPts val="600"/>
+                <a:spcPts val="800"/>
               </a:spcAft>
               <a:buSzPct val="100000"/>
-              <a:buChar char="•"/>
+              <a:buChar char="■"/>
             </a:pPr>
             <a:r>
               <a:rPr lang="en-US" sz="1500" dirty="0">
@@ -2101,19 +5659,20 @@
                 <a:ea typeface="Arial" pitchFamily="34" charset="-122"/>
                 <a:cs typeface="Arial" pitchFamily="34" charset="-120"/>
               </a:rPr>
-              <a:t>Minimumloon = minimumprijs op de arbeidsmarkt</a:t>
-            </a:r>
-          </a:p>
-          <a:p>
-            <a:pPr algn="l" marL="342900" indent="-342900">
+              <a:t>Minimumloon = minimumprijs op de arbeidsmarkt  →  werkloosheid bij Wmin &gt; W*</a:t>
+            </a:r>
+            <a:endParaRPr lang="en-US" sz="1500" dirty="0"/>
+          </a:p>
+          <a:p>
+            <a:pPr marL="342900" indent="-342900">
               <a:lnSpc>
-                <a:spcPct val="160000"/>
+                <a:spcPct val="125000"/>
               </a:lnSpc>
               <a:spcAft>
-                <a:spcPts val="600"/>
+                <a:spcPts val="800"/>
               </a:spcAft>
               <a:buSzPct val="100000"/>
-              <a:buChar char="•"/>
+              <a:buChar char="■"/>
             </a:pPr>
             <a:r>
               <a:rPr lang="en-US" sz="1500" dirty="0">
@@ -2124,19 +5683,20 @@
                 <a:ea typeface="Arial" pitchFamily="34" charset="-122"/>
                 <a:cs typeface="Arial" pitchFamily="34" charset="-120"/>
               </a:rPr>
-              <a:t>Accijns → aanbod verschuift omhoog, prijs stijgt</a:t>
-            </a:r>
-          </a:p>
-          <a:p>
-            <a:pPr algn="l" marL="342900" indent="-342900">
+              <a:t>Accijns  →  A verschuift omhoog, prijs stijgt, last gedeeld tussen consument en producent</a:t>
+            </a:r>
+            <a:endParaRPr lang="en-US" sz="1500" dirty="0"/>
+          </a:p>
+          <a:p>
+            <a:pPr marL="342900" indent="-342900">
               <a:lnSpc>
-                <a:spcPct val="160000"/>
+                <a:spcPct val="125000"/>
               </a:lnSpc>
               <a:spcAft>
-                <a:spcPts val="600"/>
+                <a:spcPts val="800"/>
               </a:spcAft>
               <a:buSzPct val="100000"/>
-              <a:buChar char="•"/>
+              <a:buChar char="■"/>
             </a:pPr>
             <a:r>
               <a:rPr lang="en-US" sz="1500" dirty="0">
@@ -2147,8 +5707,33 @@
                 <a:ea typeface="Arial" pitchFamily="34" charset="-122"/>
                 <a:cs typeface="Arial" pitchFamily="34" charset="-120"/>
               </a:rPr>
-              <a:t>Subsidie → aanbod verschuift omlaag, prijs daalt</a:t>
-            </a:r>
+              <a:t>Subsidie  →  A verschuift omlaag, prijs daalt, hoeveelheid stijgt, overheid betaalt</a:t>
+            </a:r>
+            <a:endParaRPr lang="en-US" sz="1500" dirty="0"/>
+          </a:p>
+          <a:p>
+            <a:pPr marL="342900" indent="-342900">
+              <a:lnSpc>
+                <a:spcPct val="125000"/>
+              </a:lnSpc>
+              <a:spcAft>
+                <a:spcPts val="800"/>
+              </a:spcAft>
+              <a:buSzPct val="100000"/>
+              <a:buChar char="■"/>
+            </a:pPr>
+            <a:r>
+              <a:rPr lang="en-US" sz="1500" dirty="0">
+                <a:solidFill>
+                  <a:srgbClr val="FFFFFF"/>
+                </a:solidFill>
+                <a:latin typeface="Arial" pitchFamily="34" charset="0"/>
+                <a:ea typeface="Arial" pitchFamily="34" charset="-122"/>
+                <a:cs typeface="Arial" pitchFamily="34" charset="-120"/>
+              </a:rPr>
+              <a:t>Een prijsmaatregel is alleen bindend als hij het evenwicht blokkeert</a:t>
+            </a:r>
+            <a:endParaRPr lang="en-US" sz="1500" dirty="0"/>
           </a:p>
         </p:txBody>
       </p:sp>
@@ -2224,8 +5809,8 @@
         </p:nvSpPr>
         <p:spPr>
           <a:xfrm>
-            <a:off x="457200" y="914400"/>
-            <a:ext cx="8229600" cy="365760"/>
+            <a:off x="640080" y="1051560"/>
+            <a:ext cx="7863840" cy="3291840"/>
           </a:xfrm>
           <a:prstGeom prst="rect">
             <a:avLst/>
@@ -2237,57 +5822,18 @@
           <a:bodyPr wrap="square" rtlCol="0" anchor="ctr"/>
           <a:lstStyle/>
           <a:p>
-            <a:pPr indent="0" marL="0">
-              <a:buNone/>
-            </a:pPr>
-            <a:r>
-              <a:rPr lang="en-US" sz="2000" b="1" dirty="0">
-                <a:solidFill>
-                  <a:srgbClr val="1A5276"/>
-                </a:solidFill>
-                <a:latin typeface="Arial" pitchFamily="34" charset="0"/>
-                <a:ea typeface="Arial" pitchFamily="34" charset="-122"/>
-                <a:cs typeface="Arial" pitchFamily="34" charset="-120"/>
-              </a:rPr>
-              <a:t>Leerdoelen</a:t>
-            </a:r>
-            <a:endParaRPr lang="en-US" sz="2000" dirty="0"/>
-          </a:p>
-        </p:txBody>
-      </p:sp>
-      <p:sp>
-        <p:nvSpPr>
-          <p:cNvPr id="4" name="Text 2"/>
-          <p:cNvSpPr/>
-          <p:nvPr/>
-        </p:nvSpPr>
-        <p:spPr>
-          <a:xfrm>
-            <a:off x="640080" y="1371600"/>
-            <a:ext cx="7863840" cy="2926080"/>
-          </a:xfrm>
-          <a:prstGeom prst="rect">
-            <a:avLst/>
-          </a:prstGeom>
-          <a:noFill/>
-          <a:ln/>
-        </p:spPr>
-        <p:txBody>
-          <a:bodyPr wrap="square" rtlCol="0" anchor="t"/>
-          <a:lstStyle/>
-          <a:p>
-            <a:pPr algn="l" marL="342900" indent="-342900">
+            <a:pPr marL="342900" indent="-342900">
               <a:lnSpc>
-                <a:spcPct val="150000"/>
+                <a:spcPct val="125000"/>
               </a:lnSpc>
               <a:spcAft>
-                <a:spcPts val="800"/>
+                <a:spcPts val="1000"/>
               </a:spcAft>
               <a:buSzPct val="100000"/>
-              <a:buChar char="•"/>
-            </a:pPr>
-            <a:r>
-              <a:rPr lang="en-US" sz="1500" dirty="0">
+              <a:buChar char="■"/>
+            </a:pPr>
+            <a:r>
+              <a:rPr lang="en-US" sz="1700" dirty="0">
                 <a:solidFill>
                   <a:srgbClr val="2D3748"/>
                 </a:solidFill>
@@ -2297,20 +5843,21 @@
               </a:rPr>
               <a:t>Begrijpen waarom de overheid ingrijpt in markten</a:t>
             </a:r>
-          </a:p>
-          <a:p>
-            <a:pPr algn="l" marL="342900" indent="-342900">
+            <a:endParaRPr lang="en-US" sz="1700" dirty="0"/>
+          </a:p>
+          <a:p>
+            <a:pPr marL="342900" indent="-342900">
               <a:lnSpc>
-                <a:spcPct val="150000"/>
+                <a:spcPct val="125000"/>
               </a:lnSpc>
               <a:spcAft>
-                <a:spcPts val="800"/>
+                <a:spcPts val="1000"/>
               </a:spcAft>
               <a:buSzPct val="100000"/>
-              <a:buChar char="•"/>
-            </a:pPr>
-            <a:r>
-              <a:rPr lang="en-US" sz="1500" dirty="0">
+              <a:buChar char="■"/>
+            </a:pPr>
+            <a:r>
+              <a:rPr lang="en-US" sz="1700" dirty="0">
                 <a:solidFill>
                   <a:srgbClr val="2D3748"/>
                 </a:solidFill>
@@ -2318,22 +5865,23 @@
                 <a:ea typeface="Arial" pitchFamily="34" charset="-122"/>
                 <a:cs typeface="Arial" pitchFamily="34" charset="-120"/>
               </a:rPr>
-              <a:t>Minimumprijs en maximumprijs analyseren</a:t>
-            </a:r>
-          </a:p>
-          <a:p>
-            <a:pPr algn="l" marL="342900" indent="-342900">
+              <a:t>Minimumprijs en maximumprijs analyseren in een V/A-grafiek</a:t>
+            </a:r>
+            <a:endParaRPr lang="en-US" sz="1700" dirty="0"/>
+          </a:p>
+          <a:p>
+            <a:pPr marL="342900" indent="-342900">
               <a:lnSpc>
-                <a:spcPct val="150000"/>
+                <a:spcPct val="125000"/>
               </a:lnSpc>
               <a:spcAft>
-                <a:spcPts val="800"/>
+                <a:spcPts val="1000"/>
               </a:spcAft>
               <a:buSzPct val="100000"/>
-              <a:buChar char="•"/>
-            </a:pPr>
-            <a:r>
-              <a:rPr lang="en-US" sz="1500" dirty="0">
+              <a:buChar char="■"/>
+            </a:pPr>
+            <a:r>
+              <a:rPr lang="en-US" sz="1700" dirty="0">
                 <a:solidFill>
                   <a:srgbClr val="2D3748"/>
                 </a:solidFill>
@@ -2341,22 +5889,23 @@
                 <a:ea typeface="Arial" pitchFamily="34" charset="-122"/>
                 <a:cs typeface="Arial" pitchFamily="34" charset="-120"/>
               </a:rPr>
-              <a:t>Minimumloon op de arbeidsmarkt toepassen</a:t>
-            </a:r>
-          </a:p>
-          <a:p>
-            <a:pPr algn="l" marL="342900" indent="-342900">
+              <a:t>Minimumloon toepassen op de arbeidsmarkt</a:t>
+            </a:r>
+            <a:endParaRPr lang="en-US" sz="1700" dirty="0"/>
+          </a:p>
+          <a:p>
+            <a:pPr marL="342900" indent="-342900">
               <a:lnSpc>
-                <a:spcPct val="150000"/>
+                <a:spcPct val="125000"/>
               </a:lnSpc>
               <a:spcAft>
-                <a:spcPts val="800"/>
+                <a:spcPts val="1000"/>
               </a:spcAft>
               <a:buSzPct val="100000"/>
-              <a:buChar char="•"/>
-            </a:pPr>
-            <a:r>
-              <a:rPr lang="en-US" sz="1500" dirty="0">
+              <a:buChar char="■"/>
+            </a:pPr>
+            <a:r>
+              <a:rPr lang="en-US" sz="1700" dirty="0">
                 <a:solidFill>
                   <a:srgbClr val="2D3748"/>
                 </a:solidFill>
@@ -2364,22 +5913,23 @@
                 <a:ea typeface="Arial" pitchFamily="34" charset="-122"/>
                 <a:cs typeface="Arial" pitchFamily="34" charset="-120"/>
               </a:rPr>
-              <a:t>Het effect van een accijns uitleggen</a:t>
-            </a:r>
-          </a:p>
-          <a:p>
-            <a:pPr algn="l" marL="342900" indent="-342900">
+              <a:t>Het effect van een accijns uitleggen (burden split)</a:t>
+            </a:r>
+            <a:endParaRPr lang="en-US" sz="1700" dirty="0"/>
+          </a:p>
+          <a:p>
+            <a:pPr marL="342900" indent="-342900">
               <a:lnSpc>
-                <a:spcPct val="150000"/>
+                <a:spcPct val="125000"/>
               </a:lnSpc>
               <a:spcAft>
-                <a:spcPts val="800"/>
+                <a:spcPts val="1000"/>
               </a:spcAft>
               <a:buSzPct val="100000"/>
-              <a:buChar char="•"/>
-            </a:pPr>
-            <a:r>
-              <a:rPr lang="en-US" sz="1500" dirty="0">
+              <a:buChar char="■"/>
+            </a:pPr>
+            <a:r>
+              <a:rPr lang="en-US" sz="1700" dirty="0">
                 <a:solidFill>
                   <a:srgbClr val="2D3748"/>
                 </a:solidFill>
@@ -2387,8 +5937,9 @@
                 <a:ea typeface="Arial" pitchFamily="34" charset="-122"/>
                 <a:cs typeface="Arial" pitchFamily="34" charset="-120"/>
               </a:rPr>
-              <a:t>Het effect van een subsidie op surplus analyseren</a:t>
-            </a:r>
+              <a:t>Het effect van een subsidie op prijs en hoeveelheid analyseren</a:t>
+            </a:r>
+            <a:endParaRPr lang="en-US" sz="1700" dirty="0"/>
           </a:p>
         </p:txBody>
       </p:sp>
@@ -2450,339 +6001,36 @@
                 <a:ea typeface="Arial" pitchFamily="34" charset="-122"/>
                 <a:cs typeface="Arial" pitchFamily="34" charset="-120"/>
               </a:rPr>
-              <a:t>Waarom grijpt de overheid in?</a:t>
+              <a:t>Vier instrumenten in één oogopslag</a:t>
             </a:r>
             <a:endParaRPr lang="en-US" sz="2400" dirty="0"/>
           </a:p>
         </p:txBody>
       </p:sp>
-      <p:sp>
-        <p:nvSpPr>
-          <p:cNvPr id="3" name="Text 1"/>
-          <p:cNvSpPr/>
-          <p:nvPr/>
-        </p:nvSpPr>
-        <p:spPr>
-          <a:xfrm>
-            <a:off x="457200" y="914400"/>
-            <a:ext cx="8229600" cy="365760"/>
-          </a:xfrm>
-          <a:prstGeom prst="rect">
-            <a:avLst/>
-          </a:prstGeom>
-          <a:noFill/>
-          <a:ln/>
-        </p:spPr>
-        <p:txBody>
-          <a:bodyPr wrap="square" rtlCol="0" anchor="ctr"/>
-          <a:lstStyle/>
-          <a:p>
-            <a:pPr indent="0" marL="0">
-              <a:buNone/>
-            </a:pPr>
-            <a:r>
-              <a:rPr lang="en-US" sz="2000" b="1" dirty="0">
-                <a:solidFill>
-                  <a:srgbClr val="1A5276"/>
-                </a:solidFill>
-                <a:latin typeface="Arial" pitchFamily="34" charset="0"/>
-                <a:ea typeface="Arial" pitchFamily="34" charset="-122"/>
-                <a:cs typeface="Arial" pitchFamily="34" charset="-120"/>
-              </a:rPr>
-              <a:t>Marktfalen</a:t>
-            </a:r>
-            <a:endParaRPr lang="en-US" sz="2000" dirty="0"/>
-          </a:p>
-        </p:txBody>
-      </p:sp>
-      <p:sp>
-        <p:nvSpPr>
-          <p:cNvPr id="4" name="Shape 2"/>
-          <p:cNvSpPr/>
-          <p:nvPr/>
-        </p:nvSpPr>
-        <p:spPr>
-          <a:xfrm>
-            <a:off x="1371600" y="1463040"/>
-            <a:ext cx="6400800" cy="502920"/>
-          </a:xfrm>
-          <a:prstGeom prst="rect">
-            <a:avLst>
-              <a:gd name="adj" fmla="val 9091"/>
-            </a:avLst>
-          </a:prstGeom>
-          <a:solidFill>
-            <a:srgbClr val="F9F6F1"/>
-          </a:solidFill>
-          <a:ln/>
-          <a:effectLst>
-            <a:outerShdw sx="100000" sy="100000" kx="0" ky="0" algn="bl" rotWithShape="0" blurRad="76200" dist="25400" dir="8100000">
-              <a:srgbClr val="000000">
-                <a:alpha val="10000"/>
-              </a:srgbClr>
-            </a:outerShdw>
-          </a:effectLst>
-        </p:spPr>
-        <p:txBody>
-          <a:bodyPr/>
-          <a:p/>
-        </p:txBody>
-      </p:sp>
-      <p:sp>
-        <p:nvSpPr>
-          <p:cNvPr id="5" name="Text 3"/>
-          <p:cNvSpPr/>
-          <p:nvPr/>
-        </p:nvSpPr>
-        <p:spPr>
-          <a:xfrm>
-            <a:off x="1554480" y="1463040"/>
-            <a:ext cx="6035040" cy="502920"/>
-          </a:xfrm>
-          <a:prstGeom prst="rect">
-            <a:avLst/>
-          </a:prstGeom>
-          <a:noFill/>
-          <a:ln/>
-        </p:spPr>
-        <p:txBody>
-          <a:bodyPr wrap="square" rtlCol="0" anchor="ctr"/>
-          <a:lstStyle/>
-          <a:p>
-            <a:pPr indent="0" marL="0">
-              <a:buNone/>
-            </a:pPr>
-            <a:r>
-              <a:rPr lang="en-US" sz="1500" dirty="0">
-                <a:solidFill>
-                  <a:srgbClr val="2D3748"/>
-                </a:solidFill>
-                <a:latin typeface="Arial" pitchFamily="34" charset="0"/>
-                <a:ea typeface="Arial" pitchFamily="34" charset="-122"/>
-                <a:cs typeface="Arial" pitchFamily="34" charset="-120"/>
-              </a:rPr>
-              <a:t>Natuurlijk monopolie → te hoge prijzen</a:t>
-            </a:r>
-            <a:endParaRPr lang="en-US" sz="1500" dirty="0"/>
-          </a:p>
-        </p:txBody>
-      </p:sp>
-      <p:sp>
-        <p:nvSpPr>
-          <p:cNvPr id="6" name="Shape 4"/>
-          <p:cNvSpPr/>
-          <p:nvPr/>
-        </p:nvSpPr>
-        <p:spPr>
-          <a:xfrm>
-            <a:off x="1371600" y="2075688"/>
-            <a:ext cx="6400800" cy="502920"/>
-          </a:xfrm>
-          <a:prstGeom prst="rect">
-            <a:avLst>
-              <a:gd name="adj" fmla="val 9091"/>
-            </a:avLst>
-          </a:prstGeom>
-          <a:solidFill>
-            <a:srgbClr val="F9F6F1"/>
-          </a:solidFill>
-          <a:ln/>
-          <a:effectLst>
-            <a:outerShdw sx="100000" sy="100000" kx="0" ky="0" algn="bl" rotWithShape="0" blurRad="76200" dist="25400" dir="8100000">
-              <a:srgbClr val="000000">
-                <a:alpha val="10000"/>
-              </a:srgbClr>
-            </a:outerShdw>
-          </a:effectLst>
-        </p:spPr>
-        <p:txBody>
-          <a:bodyPr/>
-          <a:p/>
-        </p:txBody>
-      </p:sp>
-      <p:sp>
-        <p:nvSpPr>
-          <p:cNvPr id="7" name="Text 5"/>
-          <p:cNvSpPr/>
-          <p:nvPr/>
-        </p:nvSpPr>
-        <p:spPr>
-          <a:xfrm>
-            <a:off x="1554480" y="2075688"/>
-            <a:ext cx="6035040" cy="502920"/>
-          </a:xfrm>
-          <a:prstGeom prst="rect">
-            <a:avLst/>
-          </a:prstGeom>
-          <a:noFill/>
-          <a:ln/>
-        </p:spPr>
-        <p:txBody>
-          <a:bodyPr wrap="square" rtlCol="0" anchor="ctr"/>
-          <a:lstStyle/>
-          <a:p>
-            <a:pPr indent="0" marL="0">
-              <a:buNone/>
-            </a:pPr>
-            <a:r>
-              <a:rPr lang="en-US" sz="1500" dirty="0">
-                <a:solidFill>
-                  <a:srgbClr val="2D3748"/>
-                </a:solidFill>
-                <a:latin typeface="Arial" pitchFamily="34" charset="0"/>
-                <a:ea typeface="Arial" pitchFamily="34" charset="-122"/>
-                <a:cs typeface="Arial" pitchFamily="34" charset="-120"/>
-              </a:rPr>
-              <a:t>↓  Negatieve externe effecten → milieuschade</a:t>
-            </a:r>
-            <a:endParaRPr lang="en-US" sz="1500" dirty="0"/>
-          </a:p>
-        </p:txBody>
-      </p:sp>
-      <p:sp>
-        <p:nvSpPr>
-          <p:cNvPr id="8" name="Shape 6"/>
-          <p:cNvSpPr/>
-          <p:nvPr/>
-        </p:nvSpPr>
-        <p:spPr>
-          <a:xfrm>
-            <a:off x="1371600" y="2688336"/>
-            <a:ext cx="6400800" cy="502920"/>
-          </a:xfrm>
-          <a:prstGeom prst="rect">
-            <a:avLst>
-              <a:gd name="adj" fmla="val 9091"/>
-            </a:avLst>
-          </a:prstGeom>
-          <a:solidFill>
-            <a:srgbClr val="F9F6F1"/>
-          </a:solidFill>
-          <a:ln/>
-          <a:effectLst>
-            <a:outerShdw sx="100000" sy="100000" kx="0" ky="0" algn="bl" rotWithShape="0" blurRad="76200" dist="25400" dir="8100000">
-              <a:srgbClr val="000000">
-                <a:alpha val="10000"/>
-              </a:srgbClr>
-            </a:outerShdw>
-          </a:effectLst>
-        </p:spPr>
-        <p:txBody>
-          <a:bodyPr/>
-          <a:p/>
-        </p:txBody>
-      </p:sp>
-      <p:sp>
-        <p:nvSpPr>
-          <p:cNvPr id="9" name="Text 7"/>
-          <p:cNvSpPr/>
-          <p:nvPr/>
-        </p:nvSpPr>
-        <p:spPr>
-          <a:xfrm>
-            <a:off x="1554480" y="2688336"/>
-            <a:ext cx="6035040" cy="502920"/>
-          </a:xfrm>
-          <a:prstGeom prst="rect">
-            <a:avLst/>
-          </a:prstGeom>
-          <a:noFill/>
-          <a:ln/>
-        </p:spPr>
-        <p:txBody>
-          <a:bodyPr wrap="square" rtlCol="0" anchor="ctr"/>
-          <a:lstStyle/>
-          <a:p>
-            <a:pPr indent="0" marL="0">
-              <a:buNone/>
-            </a:pPr>
-            <a:r>
-              <a:rPr lang="en-US" sz="1500" dirty="0">
-                <a:solidFill>
-                  <a:srgbClr val="2D3748"/>
-                </a:solidFill>
-                <a:latin typeface="Arial" pitchFamily="34" charset="0"/>
-                <a:ea typeface="Arial" pitchFamily="34" charset="-122"/>
-                <a:cs typeface="Arial" pitchFamily="34" charset="-120"/>
-              </a:rPr>
-              <a:t>↓  Ongelijke verdeling → oneerlijk</a:t>
-            </a:r>
-            <a:endParaRPr lang="en-US" sz="1500" dirty="0"/>
-          </a:p>
-        </p:txBody>
-      </p:sp>
-      <p:sp>
-        <p:nvSpPr>
-          <p:cNvPr id="10" name="Shape 8"/>
-          <p:cNvSpPr/>
-          <p:nvPr/>
-        </p:nvSpPr>
-        <p:spPr>
-          <a:xfrm>
-            <a:off x="1371600" y="3300984"/>
-            <a:ext cx="6400800" cy="502920"/>
-          </a:xfrm>
-          <a:prstGeom prst="rect">
-            <a:avLst>
-              <a:gd name="adj" fmla="val 9091"/>
-            </a:avLst>
-          </a:prstGeom>
-          <a:solidFill>
-            <a:srgbClr val="1A5276"/>
-          </a:solidFill>
-          <a:ln/>
-          <a:effectLst>
-            <a:outerShdw sx="100000" sy="100000" kx="0" ky="0" algn="bl" rotWithShape="0" blurRad="76200" dist="25400" dir="8100000">
-              <a:srgbClr val="000000">
-                <a:alpha val="10000"/>
-              </a:srgbClr>
-            </a:outerShdw>
-          </a:effectLst>
-        </p:spPr>
-        <p:txBody>
-          <a:bodyPr/>
-          <a:p/>
-        </p:txBody>
-      </p:sp>
-      <p:sp>
-        <p:nvSpPr>
-          <p:cNvPr id="11" name="Text 9"/>
-          <p:cNvSpPr/>
-          <p:nvPr/>
-        </p:nvSpPr>
-        <p:spPr>
-          <a:xfrm>
-            <a:off x="1554480" y="3300984"/>
-            <a:ext cx="6035040" cy="502920"/>
-          </a:xfrm>
-          <a:prstGeom prst="rect">
-            <a:avLst/>
-          </a:prstGeom>
-          <a:noFill/>
-          <a:ln/>
-        </p:spPr>
-        <p:txBody>
-          <a:bodyPr wrap="square" rtlCol="0" anchor="ctr"/>
-          <a:lstStyle/>
-          <a:p>
-            <a:pPr indent="0" marL="0">
-              <a:buNone/>
-            </a:pPr>
-            <a:r>
-              <a:rPr lang="en-US" sz="1500" b="1" dirty="0">
-                <a:solidFill>
-                  <a:srgbClr val="FFFFFF"/>
-                </a:solidFill>
-                <a:latin typeface="Arial" pitchFamily="34" charset="0"/>
-                <a:ea typeface="Arial" pitchFamily="34" charset="-122"/>
-                <a:cs typeface="Arial" pitchFamily="34" charset="-120"/>
-              </a:rPr>
-              <a:t>↓  Overheid gebruikt beleidsinstrumenten</a:t>
-            </a:r>
-            <a:endParaRPr lang="en-US" sz="1500" dirty="0"/>
-          </a:p>
-        </p:txBody>
-      </p:sp>
+      <p:pic>
+        <p:nvPicPr>
+          <p:cNvPr id="3" name="Image 0" descr="preencoded.png">    </p:cNvPr>
+          <p:cNvPicPr>
+            <a:picLocks noChangeAspect="1"/>
+          </p:cNvPicPr>
+          <p:nvPr/>
+        </p:nvPicPr>
+        <p:blipFill>
+          <a:blip r:embed="rId1"/>
+          <a:stretch>
+            <a:fillRect/>
+          </a:stretch>
+        </p:blipFill>
+        <p:spPr>
+          <a:xfrm>
+            <a:off x="685800" y="868680"/>
+            <a:ext cx="7772400" cy="3886200"/>
+          </a:xfrm>
+          <a:prstGeom prst="rect">
+            <a:avLst/>
+          </a:prstGeom>
+        </p:spPr>
+      </p:pic>
     </p:spTree>
   </p:cSld>
   <p:clrMapOvr>
@@ -2841,7 +6089,7 @@
                 <a:ea typeface="Arial" pitchFamily="34" charset="-122"/>
                 <a:cs typeface="Arial" pitchFamily="34" charset="-120"/>
               </a:rPr>
-              <a:t>Bindende minimumprijs</a:t>
+              <a:t>Waarom grijpt de overheid in?</a:t>
             </a:r>
             <a:endParaRPr lang="en-US" sz="2400" dirty="0"/>
           </a:p>
@@ -2855,12 +6103,12 @@
         </p:nvSpPr>
         <p:spPr>
           <a:xfrm>
-            <a:off x="457200" y="1005840"/>
-            <a:ext cx="3931920" cy="3291840"/>
+            <a:off x="1188720" y="1005840"/>
+            <a:ext cx="6766560" cy="548640"/>
           </a:xfrm>
           <a:prstGeom prst="rect">
             <a:avLst>
-              <a:gd name="adj" fmla="val 1389"/>
+              <a:gd name="adj" fmla="val 6667"/>
             </a:avLst>
           </a:prstGeom>
           <a:solidFill>
@@ -2875,278 +6123,64 @@
             </a:outerShdw>
           </a:effectLst>
         </p:spPr>
-        <p:txBody>
-          <a:bodyPr/>
-          <a:p/>
-        </p:txBody>
-      </p:sp>
-      <p:sp>
-        <p:nvSpPr>
-          <p:cNvPr id="4" name="Shape 2"/>
-          <p:cNvSpPr/>
-          <p:nvPr/>
-        </p:nvSpPr>
-        <p:spPr>
-          <a:xfrm>
-            <a:off x="457200" y="1005840"/>
-            <a:ext cx="54864" cy="3291840"/>
-          </a:xfrm>
-          <a:prstGeom prst="rect">
-            <a:avLst/>
+      </p:sp>
+      <p:sp>
+        <p:nvSpPr>
+          <p:cNvPr id="4" name="Text 2"/>
+          <p:cNvSpPr/>
+          <p:nvPr/>
+        </p:nvSpPr>
+        <p:spPr>
+          <a:xfrm>
+            <a:off x="1371600" y="1005840"/>
+            <a:ext cx="6492240" cy="548640"/>
+          </a:xfrm>
+          <a:prstGeom prst="rect">
+            <a:avLst/>
+          </a:prstGeom>
+          <a:noFill/>
+          <a:ln/>
+        </p:spPr>
+        <p:txBody>
+          <a:bodyPr wrap="square" lIns="0" tIns="0" rIns="0" bIns="0" rtlCol="0" anchor="ctr"/>
+          <a:lstStyle/>
+          <a:p>
+            <a:pPr indent="0" marL="0">
+              <a:buNone/>
+            </a:pPr>
+            <a:r>
+              <a:rPr lang="en-US" sz="1400" dirty="0">
+                <a:solidFill>
+                  <a:srgbClr val="2D3748"/>
+                </a:solidFill>
+                <a:latin typeface="Arial" pitchFamily="34" charset="0"/>
+                <a:ea typeface="Arial" pitchFamily="34" charset="-122"/>
+                <a:cs typeface="Arial" pitchFamily="34" charset="-120"/>
+              </a:rPr>
+              <a:t>De markt levert niet altijd het beste resultaat (marktfalen)</a:t>
+            </a:r>
+            <a:endParaRPr lang="en-US" sz="1400" dirty="0"/>
+          </a:p>
+        </p:txBody>
+      </p:sp>
+      <p:sp>
+        <p:nvSpPr>
+          <p:cNvPr id="5" name="Shape 3"/>
+          <p:cNvSpPr/>
+          <p:nvPr/>
+        </p:nvSpPr>
+        <p:spPr>
+          <a:xfrm>
+            <a:off x="1188720" y="1664208"/>
+            <a:ext cx="6766560" cy="548640"/>
+          </a:xfrm>
+          <a:prstGeom prst="rect">
+            <a:avLst>
+              <a:gd name="adj" fmla="val 6667"/>
+            </a:avLst>
           </a:prstGeom>
           <a:solidFill>
-            <a:srgbClr val="1A5276"/>
-          </a:solidFill>
-          <a:ln/>
-        </p:spPr>
-        <p:txBody>
-          <a:bodyPr/>
-          <a:p/>
-        </p:txBody>
-      </p:sp>
-      <p:sp>
-        <p:nvSpPr>
-          <p:cNvPr id="5" name="Text 3"/>
-          <p:cNvSpPr/>
-          <p:nvPr/>
-        </p:nvSpPr>
-        <p:spPr>
-          <a:xfrm>
-            <a:off x="640080" y="1143000"/>
-            <a:ext cx="3611880" cy="365760"/>
-          </a:xfrm>
-          <a:prstGeom prst="rect">
-            <a:avLst/>
-          </a:prstGeom>
-          <a:noFill/>
-          <a:ln/>
-        </p:spPr>
-        <p:txBody>
-          <a:bodyPr wrap="square" rtlCol="0" anchor="t"/>
-          <a:lstStyle/>
-          <a:p>
-            <a:pPr indent="0" marL="0">
-              <a:buNone/>
-            </a:pPr>
-            <a:r>
-              <a:rPr lang="en-US" sz="2000" b="1" dirty="0">
-                <a:solidFill>
-                  <a:srgbClr val="1A5276"/>
-                </a:solidFill>
-                <a:latin typeface="Arial" pitchFamily="34" charset="0"/>
-                <a:ea typeface="Arial" pitchFamily="34" charset="-122"/>
-                <a:cs typeface="Arial" pitchFamily="34" charset="-120"/>
-              </a:rPr>
-              <a:t>Minimumprijs &gt; P*</a:t>
-            </a:r>
-            <a:endParaRPr lang="en-US" sz="2000" dirty="0"/>
-          </a:p>
-        </p:txBody>
-      </p:sp>
-      <p:sp>
-        <p:nvSpPr>
-          <p:cNvPr id="6" name="Text 4"/>
-          <p:cNvSpPr/>
-          <p:nvPr/>
-        </p:nvSpPr>
-        <p:spPr>
-          <a:xfrm>
-            <a:off x="640080" y="1554480"/>
-            <a:ext cx="3611880" cy="2606040"/>
-          </a:xfrm>
-          <a:prstGeom prst="rect">
-            <a:avLst/>
-          </a:prstGeom>
-          <a:noFill/>
-          <a:ln/>
-        </p:spPr>
-        <p:txBody>
-          <a:bodyPr wrap="square" rtlCol="0" anchor="t"/>
-          <a:lstStyle/>
-          <a:p>
-            <a:pPr algn="l" indent="0" marL="0">
-              <a:lnSpc>
-                <a:spcPct val="115000"/>
-              </a:lnSpc>
-              <a:buNone/>
-            </a:pPr>
-            <a:r>
-              <a:rPr lang="en-US" sz="1400" dirty="0">
-                <a:solidFill>
-                  <a:srgbClr val="2D3748"/>
-                </a:solidFill>
-                <a:latin typeface="Arial" pitchFamily="34" charset="0"/>
-                <a:ea typeface="Arial" pitchFamily="34" charset="-122"/>
-                <a:cs typeface="Arial" pitchFamily="34" charset="-120"/>
-              </a:rPr>
-              <a:t>De overheid stelt een prijs </a:t>
-            </a:r>
-            <a:pPr algn="l" indent="0" marL="0">
-              <a:lnSpc>
-                <a:spcPct val="115000"/>
-              </a:lnSpc>
-              <a:buNone/>
-            </a:pPr>
-            <a:r>
-              <a:rPr lang="en-US" sz="1400" b="1" dirty="0">
-                <a:solidFill>
-                  <a:srgbClr val="D9534F"/>
-                </a:solidFill>
-                <a:latin typeface="Arial" pitchFamily="34" charset="0"/>
-                <a:ea typeface="Arial" pitchFamily="34" charset="-122"/>
-                <a:cs typeface="Arial" pitchFamily="34" charset="-120"/>
-              </a:rPr>
-              <a:t>BOVEN</a:t>
-            </a:r>
-            <a:pPr algn="l" indent="0" marL="0">
-              <a:lnSpc>
-                <a:spcPct val="115000"/>
-              </a:lnSpc>
-              <a:buNone/>
-            </a:pPr>
-            <a:r>
-              <a:rPr lang="en-US" sz="1400" dirty="0">
-                <a:solidFill>
-                  <a:srgbClr val="2D3748"/>
-                </a:solidFill>
-                <a:latin typeface="Arial" pitchFamily="34" charset="0"/>
-                <a:ea typeface="Arial" pitchFamily="34" charset="-122"/>
-                <a:cs typeface="Arial" pitchFamily="34" charset="-120"/>
-              </a:rPr>
-              <a:t> de evenwichtsprijs.
-Gevolgen:
-</a:t>
-            </a:r>
-            <a:pPr algn="l" marL="342900" indent="-342900">
-              <a:lnSpc>
-                <a:spcPct val="115000"/>
-              </a:lnSpc>
-              <a:buSzPct val="100000"/>
-              <a:buChar char="•"/>
-            </a:pPr>
-            <a:r>
-              <a:rPr lang="en-US" sz="1400" dirty="0">
-                <a:solidFill>
-                  <a:srgbClr val="2D3748"/>
-                </a:solidFill>
-                <a:latin typeface="Arial" pitchFamily="34" charset="0"/>
-                <a:ea typeface="Arial" pitchFamily="34" charset="-122"/>
-                <a:cs typeface="Arial" pitchFamily="34" charset="-120"/>
-              </a:rPr>
-              <a:t>Aanbod &gt; Vraag</a:t>
-            </a:r>
-            <a:pPr algn="l" marL="342900" indent="-342900">
-              <a:lnSpc>
-                <a:spcPct val="115000"/>
-              </a:lnSpc>
-              <a:buSzPct val="100000"/>
-              <a:buChar char="•"/>
-            </a:pPr>
-            <a:endParaRPr lang="en-US" sz="1400" dirty="0"/>
-          </a:p>
-          <a:p>
-            <a:pPr algn="l" marL="342900" indent="-342900">
-              <a:lnSpc>
-                <a:spcPct val="115000"/>
-              </a:lnSpc>
-              <a:buSzPct val="100000"/>
-              <a:buChar char="•"/>
-            </a:pPr>
-            <a:r>
-              <a:rPr lang="en-US" sz="1400" dirty="0">
-                <a:solidFill>
-                  <a:srgbClr val="2D3748"/>
-                </a:solidFill>
-                <a:latin typeface="Arial" pitchFamily="34" charset="0"/>
-                <a:ea typeface="Arial" pitchFamily="34" charset="-122"/>
-                <a:cs typeface="Arial" pitchFamily="34" charset="-120"/>
-              </a:rPr>
-              <a:t>Aanbodoverschot</a:t>
-            </a:r>
-            <a:endParaRPr lang="en-US" sz="1400" dirty="0"/>
-          </a:p>
-          <a:p>
-            <a:pPr algn="l" marL="342900" indent="-342900">
-              <a:lnSpc>
-                <a:spcPct val="115000"/>
-              </a:lnSpc>
-              <a:buSzPct val="100000"/>
-              <a:buChar char="•"/>
-            </a:pPr>
-            <a:endParaRPr lang="en-US" sz="1400" dirty="0"/>
-          </a:p>
-          <a:p>
-            <a:pPr algn="l" marL="342900" indent="-342900">
-              <a:lnSpc>
-                <a:spcPct val="115000"/>
-              </a:lnSpc>
-              <a:buSzPct val="100000"/>
-              <a:buChar char="•"/>
-            </a:pPr>
-            <a:r>
-              <a:rPr lang="en-US" sz="1400" dirty="0">
-                <a:solidFill>
-                  <a:srgbClr val="2D3748"/>
-                </a:solidFill>
-                <a:latin typeface="Arial" pitchFamily="34" charset="0"/>
-                <a:ea typeface="Arial" pitchFamily="34" charset="-122"/>
-                <a:cs typeface="Arial" pitchFamily="34" charset="-120"/>
-              </a:rPr>
-              <a:t>Producentensurplus stijgt</a:t>
-            </a:r>
-            <a:endParaRPr lang="en-US" sz="1400" dirty="0"/>
-          </a:p>
-          <a:p>
-            <a:pPr algn="l" marL="342900" indent="-342900">
-              <a:lnSpc>
-                <a:spcPct val="115000"/>
-              </a:lnSpc>
-              <a:buSzPct val="100000"/>
-              <a:buChar char="•"/>
-            </a:pPr>
-            <a:endParaRPr lang="en-US" sz="1400" dirty="0"/>
-          </a:p>
-          <a:p>
-            <a:pPr algn="l" marL="342900" indent="-342900">
-              <a:lnSpc>
-                <a:spcPct val="115000"/>
-              </a:lnSpc>
-              <a:buSzPct val="100000"/>
-              <a:buChar char="•"/>
-            </a:pPr>
-            <a:r>
-              <a:rPr lang="en-US" sz="1400" dirty="0">
-                <a:solidFill>
-                  <a:srgbClr val="2D3748"/>
-                </a:solidFill>
-                <a:latin typeface="Arial" pitchFamily="34" charset="0"/>
-                <a:ea typeface="Arial" pitchFamily="34" charset="-122"/>
-                <a:cs typeface="Arial" pitchFamily="34" charset="-120"/>
-              </a:rPr>
-              <a:t>Consumentensurplus daalt</a:t>
-            </a:r>
-            <a:endParaRPr lang="en-US" sz="1400" dirty="0"/>
-          </a:p>
-        </p:txBody>
-      </p:sp>
-      <p:sp>
-        <p:nvSpPr>
-          <p:cNvPr id="7" name="Shape 5"/>
-          <p:cNvSpPr/>
-          <p:nvPr/>
-        </p:nvSpPr>
-        <p:spPr>
-          <a:xfrm>
-            <a:off x="4754880" y="1005840"/>
-            <a:ext cx="3931920" cy="3291840"/>
-          </a:xfrm>
-          <a:prstGeom prst="rect">
-            <a:avLst>
-              <a:gd name="adj" fmla="val 1389"/>
-            </a:avLst>
-          </a:prstGeom>
-          <a:solidFill>
-            <a:srgbClr val="FEF5E7"/>
+            <a:srgbClr val="F9F6F1"/>
           </a:solidFill>
           <a:ln/>
           <a:effectLst>
@@ -3157,45 +6191,85 @@
             </a:outerShdw>
           </a:effectLst>
         </p:spPr>
-        <p:txBody>
-          <a:bodyPr/>
-          <a:p/>
-        </p:txBody>
-      </p:sp>
-      <p:sp>
-        <p:nvSpPr>
-          <p:cNvPr id="8" name="Shape 6"/>
-          <p:cNvSpPr/>
-          <p:nvPr/>
-        </p:nvSpPr>
-        <p:spPr>
-          <a:xfrm>
-            <a:off x="4754880" y="1005840"/>
-            <a:ext cx="54864" cy="3291840"/>
-          </a:xfrm>
-          <a:prstGeom prst="rect">
-            <a:avLst/>
+      </p:sp>
+      <p:sp>
+        <p:nvSpPr>
+          <p:cNvPr id="6" name="Text 4"/>
+          <p:cNvSpPr/>
+          <p:nvPr/>
+        </p:nvSpPr>
+        <p:spPr>
+          <a:xfrm>
+            <a:off x="1371600" y="1664208"/>
+            <a:ext cx="6492240" cy="548640"/>
+          </a:xfrm>
+          <a:prstGeom prst="rect">
+            <a:avLst/>
+          </a:prstGeom>
+          <a:noFill/>
+          <a:ln/>
+        </p:spPr>
+        <p:txBody>
+          <a:bodyPr wrap="square" lIns="0" tIns="0" rIns="0" bIns="0" rtlCol="0" anchor="ctr"/>
+          <a:lstStyle/>
+          <a:p>
+            <a:pPr indent="0" marL="0">
+              <a:buNone/>
+            </a:pPr>
+            <a:r>
+              <a:rPr lang="en-US" sz="1400" dirty="0">
+                <a:solidFill>
+                  <a:srgbClr val="2D3748"/>
+                </a:solidFill>
+                <a:latin typeface="Arial" pitchFamily="34" charset="0"/>
+                <a:ea typeface="Arial" pitchFamily="34" charset="-122"/>
+                <a:cs typeface="Arial" pitchFamily="34" charset="-120"/>
+              </a:rPr>
+              <a:t>↓  Monopolie, externe effecten, ongelijke verdeling</a:t>
+            </a:r>
+            <a:endParaRPr lang="en-US" sz="1400" dirty="0"/>
+          </a:p>
+        </p:txBody>
+      </p:sp>
+      <p:sp>
+        <p:nvSpPr>
+          <p:cNvPr id="7" name="Shape 5"/>
+          <p:cNvSpPr/>
+          <p:nvPr/>
+        </p:nvSpPr>
+        <p:spPr>
+          <a:xfrm>
+            <a:off x="1188720" y="2322576"/>
+            <a:ext cx="6766560" cy="548640"/>
+          </a:xfrm>
+          <a:prstGeom prst="rect">
+            <a:avLst>
+              <a:gd name="adj" fmla="val 6667"/>
+            </a:avLst>
           </a:prstGeom>
           <a:solidFill>
-            <a:srgbClr val="E67E22"/>
+            <a:srgbClr val="1A5276"/>
           </a:solidFill>
           <a:ln/>
-        </p:spPr>
-        <p:txBody>
-          <a:bodyPr/>
-          <a:p/>
-        </p:txBody>
-      </p:sp>
-      <p:sp>
-        <p:nvSpPr>
-          <p:cNvPr id="9" name="Text 7"/>
-          <p:cNvSpPr/>
-          <p:nvPr/>
-        </p:nvSpPr>
-        <p:spPr>
-          <a:xfrm>
-            <a:off x="4937760" y="1143000"/>
-            <a:ext cx="3611880" cy="365760"/>
+          <a:effectLst>
+            <a:outerShdw sx="100000" sy="100000" kx="0" ky="0" algn="bl" rotWithShape="0" blurRad="76200" dist="25400" dir="8100000">
+              <a:srgbClr val="000000">
+                <a:alpha val="10000"/>
+              </a:srgbClr>
+            </a:outerShdw>
+          </a:effectLst>
+        </p:spPr>
+      </p:sp>
+      <p:sp>
+        <p:nvSpPr>
+          <p:cNvPr id="8" name="Text 6"/>
+          <p:cNvSpPr/>
+          <p:nvPr/>
+        </p:nvSpPr>
+        <p:spPr>
+          <a:xfrm>
+            <a:off x="1371600" y="2322576"/>
+            <a:ext cx="6492240" cy="548640"/>
           </a:xfrm>
           <a:prstGeom prst="rect">
             <a:avLst/>
@@ -3204,26 +6278,55 @@
           <a:ln/>
         </p:spPr>
         <p:txBody>
-          <a:bodyPr wrap="square" rtlCol="0" anchor="t"/>
+          <a:bodyPr wrap="square" lIns="0" tIns="0" rIns="0" bIns="0" rtlCol="0" anchor="ctr"/>
           <a:lstStyle/>
           <a:p>
             <a:pPr indent="0" marL="0">
               <a:buNone/>
             </a:pPr>
             <a:r>
-              <a:rPr lang="en-US" sz="2000" b="1" dirty="0">
-                <a:solidFill>
-                  <a:srgbClr val="E67E22"/>
-                </a:solidFill>
-                <a:latin typeface="Arial" pitchFamily="34" charset="0"/>
-                <a:ea typeface="Arial" pitchFamily="34" charset="-122"/>
-                <a:cs typeface="Arial" pitchFamily="34" charset="-120"/>
-              </a:rPr>
-              <a:t>Voorbeeld: melkprijs</a:t>
-            </a:r>
-            <a:endParaRPr lang="en-US" sz="2000" dirty="0"/>
-          </a:p>
-        </p:txBody>
+              <a:rPr lang="en-US" sz="1400" b="1" dirty="0">
+                <a:solidFill>
+                  <a:srgbClr val="FFFFFF"/>
+                </a:solidFill>
+                <a:latin typeface="Arial" pitchFamily="34" charset="0"/>
+                <a:ea typeface="Arial" pitchFamily="34" charset="-122"/>
+                <a:cs typeface="Arial" pitchFamily="34" charset="-120"/>
+              </a:rPr>
+              <a:t>↓  Overheid zet beleidsinstrumenten in: prijzen, belastingen, subsidies</a:t>
+            </a:r>
+            <a:endParaRPr lang="en-US" sz="1400" dirty="0"/>
+          </a:p>
+        </p:txBody>
+      </p:sp>
+      <p:sp>
+        <p:nvSpPr>
+          <p:cNvPr id="9" name="Shape 7"/>
+          <p:cNvSpPr/>
+          <p:nvPr/>
+        </p:nvSpPr>
+        <p:spPr>
+          <a:xfrm>
+            <a:off x="1188720" y="2980944"/>
+            <a:ext cx="6766560" cy="548640"/>
+          </a:xfrm>
+          <a:prstGeom prst="rect">
+            <a:avLst>
+              <a:gd name="adj" fmla="val 6667"/>
+            </a:avLst>
+          </a:prstGeom>
+          <a:solidFill>
+            <a:srgbClr val="F9F6F1"/>
+          </a:solidFill>
+          <a:ln/>
+          <a:effectLst>
+            <a:outerShdw sx="100000" sy="100000" kx="0" ky="0" algn="bl" rotWithShape="0" blurRad="76200" dist="25400" dir="8100000">
+              <a:srgbClr val="000000">
+                <a:alpha val="10000"/>
+              </a:srgbClr>
+            </a:outerShdw>
+          </a:effectLst>
+        </p:spPr>
       </p:sp>
       <p:sp>
         <p:nvSpPr>
@@ -3233,8 +6336,8 @@
         </p:nvSpPr>
         <p:spPr>
           <a:xfrm>
-            <a:off x="4937760" y="1554480"/>
-            <a:ext cx="3611880" cy="2606040"/>
+            <a:off x="1371600" y="2980944"/>
+            <a:ext cx="6492240" cy="548640"/>
           </a:xfrm>
           <a:prstGeom prst="rect">
             <a:avLst/>
@@ -3243,13 +6346,10 @@
           <a:ln/>
         </p:spPr>
         <p:txBody>
-          <a:bodyPr wrap="square" rtlCol="0" anchor="t"/>
-          <a:lstStyle/>
-          <a:p>
-            <a:pPr algn="l" indent="0" marL="0">
-              <a:lnSpc>
-                <a:spcPct val="115000"/>
-              </a:lnSpc>
+          <a:bodyPr wrap="square" lIns="0" tIns="0" rIns="0" bIns="0" rtlCol="0" anchor="ctr"/>
+          <a:lstStyle/>
+          <a:p>
+            <a:pPr indent="0" marL="0">
               <a:buNone/>
             </a:pPr>
             <a:r>
@@ -3261,60 +6361,7 @@
                 <a:ea typeface="Arial" pitchFamily="34" charset="-122"/>
                 <a:cs typeface="Arial" pitchFamily="34" charset="-120"/>
               </a:rPr>
-              <a:t>De overheid beschermt boeren door een minimumprijs voor melk in te stellen.
-</a:t>
-            </a:r>
-            <a:pPr algn="l" indent="0" marL="0">
-              <a:lnSpc>
-                <a:spcPct val="115000"/>
-              </a:lnSpc>
-              <a:buNone/>
-            </a:pPr>
-            <a:r>
-              <a:rPr lang="en-US" sz="1400" b="1" dirty="0">
-                <a:solidFill>
-                  <a:srgbClr val="2D3748"/>
-                </a:solidFill>
-                <a:latin typeface="Arial" pitchFamily="34" charset="0"/>
-                <a:ea typeface="Arial" pitchFamily="34" charset="-122"/>
-                <a:cs typeface="Arial" pitchFamily="34" charset="-120"/>
-              </a:rPr>
-              <a:t>Gevolg: </a:t>
-            </a:r>
-            <a:pPr algn="l" indent="0" marL="0">
-              <a:lnSpc>
-                <a:spcPct val="115000"/>
-              </a:lnSpc>
-              <a:buNone/>
-            </a:pPr>
-            <a:r>
-              <a:rPr lang="en-US" sz="1400" dirty="0">
-                <a:solidFill>
-                  <a:srgbClr val="2D3748"/>
-                </a:solidFill>
-                <a:latin typeface="Arial" pitchFamily="34" charset="0"/>
-                <a:ea typeface="Arial" pitchFamily="34" charset="-122"/>
-                <a:cs typeface="Arial" pitchFamily="34" charset="-120"/>
-              </a:rPr>
-              <a:t>boeren produceren meer dan consumenten kopen → overschot.
-</a:t>
-            </a:r>
-            <a:pPr algn="l" indent="0" marL="0">
-              <a:lnSpc>
-                <a:spcPct val="115000"/>
-              </a:lnSpc>
-              <a:buNone/>
-            </a:pPr>
-            <a:r>
-              <a:rPr lang="en-US" sz="1400" i="1" dirty="0">
-                <a:solidFill>
-                  <a:srgbClr val="718096"/>
-                </a:solidFill>
-                <a:latin typeface="Arial" pitchFamily="34" charset="0"/>
-                <a:ea typeface="Arial" pitchFamily="34" charset="-122"/>
-                <a:cs typeface="Arial" pitchFamily="34" charset="-120"/>
-              </a:rPr>
-              <a:t>De overheid koopt het overschot op (garantieprijs).</a:t>
+              <a:t>↓  Doel: meer welvaart én eerlijkere verdeling</a:t>
             </a:r>
             <a:endParaRPr lang="en-US" sz="1400" dirty="0"/>
           </a:p>
@@ -3378,7 +6425,7 @@
                 <a:ea typeface="Arial" pitchFamily="34" charset="-122"/>
                 <a:cs typeface="Arial" pitchFamily="34" charset="-120"/>
               </a:rPr>
-              <a:t>Bindende maximumprijs</a:t>
+              <a:t>Bindende minimumprijs — theorie</a:t>
             </a:r>
             <a:endParaRPr lang="en-US" sz="2400" dirty="0"/>
           </a:p>
@@ -3392,16 +6439,16 @@
         </p:nvSpPr>
         <p:spPr>
           <a:xfrm>
-            <a:off x="457200" y="1005840"/>
-            <a:ext cx="3931920" cy="3291840"/>
+            <a:off x="457200" y="960120"/>
+            <a:ext cx="3931920" cy="3566160"/>
           </a:xfrm>
           <a:prstGeom prst="rect">
             <a:avLst>
-              <a:gd name="adj" fmla="val 1389"/>
+              <a:gd name="adj" fmla="val 1282"/>
             </a:avLst>
           </a:prstGeom>
           <a:solidFill>
-            <a:srgbClr val="F9F6F1"/>
+            <a:srgbClr val="E8F8F0"/>
           </a:solidFill>
           <a:ln/>
           <a:effectLst>
@@ -3412,10 +6459,6 @@
             </a:outerShdw>
           </a:effectLst>
         </p:spPr>
-        <p:txBody>
-          <a:bodyPr/>
-          <a:p/>
-        </p:txBody>
       </p:sp>
       <p:sp>
         <p:nvSpPr>
@@ -3425,21 +6468,17 @@
         </p:nvSpPr>
         <p:spPr>
           <a:xfrm>
-            <a:off x="457200" y="1005840"/>
-            <a:ext cx="54864" cy="3291840"/>
+            <a:off x="457200" y="960120"/>
+            <a:ext cx="54864" cy="3566160"/>
           </a:xfrm>
           <a:prstGeom prst="rect">
             <a:avLst/>
           </a:prstGeom>
           <a:solidFill>
-            <a:srgbClr val="1A5276"/>
+            <a:srgbClr val="186A3B"/>
           </a:solidFill>
           <a:ln/>
         </p:spPr>
-        <p:txBody>
-          <a:bodyPr/>
-          <a:p/>
-        </p:txBody>
       </p:sp>
       <p:sp>
         <p:nvSpPr>
@@ -3449,7 +6488,7 @@
         </p:nvSpPr>
         <p:spPr>
           <a:xfrm>
-            <a:off x="640080" y="1143000"/>
+            <a:off x="640080" y="1069848"/>
             <a:ext cx="3611880" cy="365760"/>
           </a:xfrm>
           <a:prstGeom prst="rect">
@@ -3459,24 +6498,24 @@
           <a:ln/>
         </p:spPr>
         <p:txBody>
-          <a:bodyPr wrap="square" rtlCol="0" anchor="t"/>
+          <a:bodyPr wrap="square" lIns="0" tIns="0" rIns="0" bIns="0" rtlCol="0" anchor="t"/>
           <a:lstStyle/>
           <a:p>
             <a:pPr indent="0" marL="0">
               <a:buNone/>
             </a:pPr>
             <a:r>
-              <a:rPr lang="en-US" sz="2000" b="1" dirty="0">
-                <a:solidFill>
-                  <a:srgbClr val="1A5276"/>
-                </a:solidFill>
-                <a:latin typeface="Arial" pitchFamily="34" charset="0"/>
-                <a:ea typeface="Arial" pitchFamily="34" charset="-122"/>
-                <a:cs typeface="Arial" pitchFamily="34" charset="-120"/>
-              </a:rPr>
-              <a:t>Maximumprijs &lt; P*</a:t>
-            </a:r>
-            <a:endParaRPr lang="en-US" sz="2000" dirty="0"/>
+              <a:rPr lang="en-US" sz="1800" b="1" dirty="0">
+                <a:solidFill>
+                  <a:srgbClr val="186A3B"/>
+                </a:solidFill>
+                <a:latin typeface="Arial" pitchFamily="34" charset="0"/>
+                <a:ea typeface="Arial" pitchFamily="34" charset="-122"/>
+                <a:cs typeface="Arial" pitchFamily="34" charset="-120"/>
+              </a:rPr>
+              <a:t>Definitie</a:t>
+            </a:r>
+            <a:endParaRPr lang="en-US" sz="1800" dirty="0"/>
           </a:p>
         </p:txBody>
       </p:sp>
@@ -3488,8 +6527,8 @@
         </p:nvSpPr>
         <p:spPr>
           <a:xfrm>
-            <a:off x="640080" y="1554480"/>
-            <a:ext cx="3611880" cy="2606040"/>
+            <a:off x="640080" y="1463040"/>
+            <a:ext cx="3611880" cy="2926080"/>
           </a:xfrm>
           <a:prstGeom prst="rect">
             <a:avLst/>
@@ -3498,171 +6537,111 @@
           <a:ln/>
         </p:spPr>
         <p:txBody>
-          <a:bodyPr wrap="square" rtlCol="0" anchor="t"/>
-          <a:lstStyle/>
+          <a:bodyPr wrap="square" lIns="0" tIns="0" rIns="0" bIns="0" rtlCol="0" anchor="t"/>
+          <a:lstStyle/>
+          <a:p>
+            <a:pPr algn="l" marL="342900" indent="-342900">
+              <a:lnSpc>
+                <a:spcPct val="120000"/>
+              </a:lnSpc>
+              <a:buSzPct val="100000"/>
+              <a:buChar char="■"/>
+            </a:pPr>
+            <a:r>
+              <a:rPr lang="en-US" sz="1300" b="1" dirty="0">
+                <a:solidFill>
+                  <a:srgbClr val="2D3748"/>
+                </a:solidFill>
+                <a:latin typeface="Arial" pitchFamily="34" charset="0"/>
+                <a:ea typeface="Arial" pitchFamily="34" charset="-122"/>
+                <a:cs typeface="Arial" pitchFamily="34" charset="-120"/>
+              </a:rPr>
+              <a:t>Wettelijke minimumprijs</a:t>
+            </a:r>
+            <a:endParaRPr lang="en-US" sz="1300" dirty="0"/>
+          </a:p>
+          <a:p>
+            <a:pPr algn="l" marL="342900" indent="-342900">
+              <a:lnSpc>
+                <a:spcPct val="120000"/>
+              </a:lnSpc>
+              <a:buSzPct val="100000"/>
+              <a:buChar char="■"/>
+            </a:pPr>
+            <a:r>
+              <a:rPr lang="en-US" sz="1300" dirty="0">
+                <a:solidFill>
+                  <a:srgbClr val="2D3748"/>
+                </a:solidFill>
+                <a:latin typeface="Arial" pitchFamily="34" charset="0"/>
+                <a:ea typeface="Arial" pitchFamily="34" charset="-122"/>
+                <a:cs typeface="Arial" pitchFamily="34" charset="-120"/>
+              </a:rPr>
+              <a:t>Pmin &gt; P*  → bindend</a:t>
+            </a:r>
+            <a:endParaRPr lang="en-US" sz="1300" dirty="0"/>
+          </a:p>
+          <a:p>
+            <a:pPr algn="l" marL="342900" indent="-342900">
+              <a:lnSpc>
+                <a:spcPct val="120000"/>
+              </a:lnSpc>
+              <a:buSzPct val="100000"/>
+              <a:buChar char="■"/>
+            </a:pPr>
+            <a:r>
+              <a:rPr lang="en-US" sz="1300" dirty="0">
+                <a:solidFill>
+                  <a:srgbClr val="2D3748"/>
+                </a:solidFill>
+                <a:latin typeface="Arial" pitchFamily="34" charset="0"/>
+                <a:ea typeface="Arial" pitchFamily="34" charset="-122"/>
+                <a:cs typeface="Arial" pitchFamily="34" charset="-120"/>
+              </a:rPr>
+              <a:t>Prijs mag niet onder Pmin</a:t>
+            </a:r>
+            <a:endParaRPr lang="en-US" sz="1300" dirty="0"/>
+          </a:p>
+          <a:p>
+            <a:pPr algn="l" marL="342900" indent="-342900">
+              <a:lnSpc>
+                <a:spcPct val="120000"/>
+              </a:lnSpc>
+              <a:buSzPct val="100000"/>
+              <a:buChar char="■"/>
+            </a:pPr>
+            <a:r>
+              <a:rPr lang="en-US" sz="1300" b="1" dirty="0">
+                <a:solidFill>
+                  <a:srgbClr val="922B21"/>
+                </a:solidFill>
+                <a:latin typeface="Arial" pitchFamily="34" charset="0"/>
+                <a:ea typeface="Arial" pitchFamily="34" charset="-122"/>
+                <a:cs typeface="Arial" pitchFamily="34" charset="-120"/>
+              </a:rPr>
+              <a:t>Gevolg: aanbodoverschot</a:t>
+            </a:r>
+            <a:endParaRPr lang="en-US" sz="1300" dirty="0"/>
+          </a:p>
           <a:p>
             <a:pPr algn="l" indent="0" marL="0">
               <a:lnSpc>
-                <a:spcPct val="115000"/>
+                <a:spcPct val="120000"/>
               </a:lnSpc>
               <a:buNone/>
             </a:pPr>
             <a:r>
-              <a:rPr lang="en-US" sz="1400" dirty="0">
-                <a:solidFill>
-                  <a:srgbClr val="2D3748"/>
-                </a:solidFill>
-                <a:latin typeface="Arial" pitchFamily="34" charset="0"/>
-                <a:ea typeface="Arial" pitchFamily="34" charset="-122"/>
-                <a:cs typeface="Arial" pitchFamily="34" charset="-120"/>
-              </a:rPr>
-              <a:t>De overheid stelt een prijs </a:t>
-            </a:r>
-            <a:pPr algn="l" indent="0" marL="0">
-              <a:lnSpc>
-                <a:spcPct val="115000"/>
-              </a:lnSpc>
-              <a:buNone/>
-            </a:pPr>
-            <a:r>
-              <a:rPr lang="en-US" sz="1400" b="1" dirty="0">
-                <a:solidFill>
-                  <a:srgbClr val="D9534F"/>
-                </a:solidFill>
-                <a:latin typeface="Arial" pitchFamily="34" charset="0"/>
-                <a:ea typeface="Arial" pitchFamily="34" charset="-122"/>
-                <a:cs typeface="Arial" pitchFamily="34" charset="-120"/>
-              </a:rPr>
-              <a:t>ONDER</a:t>
-            </a:r>
-            <a:pPr algn="l" indent="0" marL="0">
-              <a:lnSpc>
-                <a:spcPct val="115000"/>
-              </a:lnSpc>
-              <a:buNone/>
-            </a:pPr>
-            <a:r>
-              <a:rPr lang="en-US" sz="1400" dirty="0">
-                <a:solidFill>
-                  <a:srgbClr val="2D3748"/>
-                </a:solidFill>
-                <a:latin typeface="Arial" pitchFamily="34" charset="0"/>
-                <a:ea typeface="Arial" pitchFamily="34" charset="-122"/>
-                <a:cs typeface="Arial" pitchFamily="34" charset="-120"/>
-              </a:rPr>
-              <a:t> de evenwichtsprijs.
-Gevolgen:
-</a:t>
-            </a:r>
-            <a:pPr algn="l" marL="342900" indent="-342900">
-              <a:lnSpc>
-                <a:spcPct val="115000"/>
-              </a:lnSpc>
-              <a:buSzPct val="100000"/>
-              <a:buChar char="•"/>
-            </a:pPr>
-            <a:r>
-              <a:rPr lang="en-US" sz="1400" dirty="0">
-                <a:solidFill>
-                  <a:srgbClr val="2D3748"/>
-                </a:solidFill>
-                <a:latin typeface="Arial" pitchFamily="34" charset="0"/>
-                <a:ea typeface="Arial" pitchFamily="34" charset="-122"/>
-                <a:cs typeface="Arial" pitchFamily="34" charset="-120"/>
-              </a:rPr>
-              <a:t>Vraag &gt; Aanbod</a:t>
-            </a:r>
-            <a:pPr algn="l" marL="342900" indent="-342900">
-              <a:lnSpc>
-                <a:spcPct val="115000"/>
-              </a:lnSpc>
-              <a:buSzPct val="100000"/>
-              <a:buChar char="•"/>
-            </a:pPr>
-            <a:endParaRPr lang="en-US" sz="1400" dirty="0"/>
-          </a:p>
-          <a:p>
-            <a:pPr algn="l" marL="342900" indent="-342900">
-              <a:lnSpc>
-                <a:spcPct val="115000"/>
-              </a:lnSpc>
-              <a:buSzPct val="100000"/>
-              <a:buChar char="•"/>
-            </a:pPr>
-            <a:r>
-              <a:rPr lang="en-US" sz="1400" dirty="0">
-                <a:solidFill>
-                  <a:srgbClr val="2D3748"/>
-                </a:solidFill>
-                <a:latin typeface="Arial" pitchFamily="34" charset="0"/>
-                <a:ea typeface="Arial" pitchFamily="34" charset="-122"/>
-                <a:cs typeface="Arial" pitchFamily="34" charset="-120"/>
-              </a:rPr>
-              <a:t>Vraagoverschot (tekort)</a:t>
-            </a:r>
-            <a:endParaRPr lang="en-US" sz="1400" dirty="0"/>
-          </a:p>
-          <a:p>
-            <a:pPr algn="l" marL="342900" indent="-342900">
-              <a:lnSpc>
-                <a:spcPct val="115000"/>
-              </a:lnSpc>
-              <a:buSzPct val="100000"/>
-              <a:buChar char="•"/>
-            </a:pPr>
-            <a:endParaRPr lang="en-US" sz="1400" dirty="0"/>
-          </a:p>
-          <a:p>
-            <a:pPr algn="l" marL="342900" indent="-342900">
-              <a:lnSpc>
-                <a:spcPct val="115000"/>
-              </a:lnSpc>
-              <a:buSzPct val="100000"/>
-              <a:buChar char="•"/>
-            </a:pPr>
-            <a:r>
-              <a:rPr lang="en-US" sz="1400" dirty="0">
-                <a:solidFill>
-                  <a:srgbClr val="2D3748"/>
-                </a:solidFill>
-                <a:latin typeface="Arial" pitchFamily="34" charset="0"/>
-                <a:ea typeface="Arial" pitchFamily="34" charset="-122"/>
-                <a:cs typeface="Arial" pitchFamily="34" charset="-120"/>
-              </a:rPr>
-              <a:t>Consumenten betalen minder</a:t>
-            </a:r>
-            <a:endParaRPr lang="en-US" sz="1400" dirty="0"/>
-          </a:p>
-          <a:p>
-            <a:pPr algn="l" marL="342900" indent="-342900">
-              <a:lnSpc>
-                <a:spcPct val="115000"/>
-              </a:lnSpc>
-              <a:buSzPct val="100000"/>
-              <a:buChar char="•"/>
-            </a:pPr>
-            <a:endParaRPr lang="en-US" sz="1400" dirty="0"/>
-          </a:p>
-          <a:p>
-            <a:pPr algn="l" marL="342900" indent="-342900">
-              <a:lnSpc>
-                <a:spcPct val="115000"/>
-              </a:lnSpc>
-              <a:buSzPct val="100000"/>
-              <a:buChar char="•"/>
-            </a:pPr>
-            <a:r>
-              <a:rPr lang="en-US" sz="1400" dirty="0">
-                <a:solidFill>
-                  <a:srgbClr val="2D3748"/>
-                </a:solidFill>
-                <a:latin typeface="Arial" pitchFamily="34" charset="0"/>
-                <a:ea typeface="Arial" pitchFamily="34" charset="-122"/>
-                <a:cs typeface="Arial" pitchFamily="34" charset="-120"/>
-              </a:rPr>
-              <a:t>Niet iedereen krijgt het product</a:t>
-            </a:r>
-            <a:endParaRPr lang="en-US" sz="1400" dirty="0"/>
+              <a:rPr lang="en-US" sz="1200" i="1" dirty="0">
+                <a:solidFill>
+                  <a:srgbClr val="718096"/>
+                </a:solidFill>
+                <a:latin typeface="Arial" pitchFamily="34" charset="0"/>
+                <a:ea typeface="Arial" pitchFamily="34" charset="-122"/>
+                <a:cs typeface="Arial" pitchFamily="34" charset="-120"/>
+              </a:rPr>
+              <a:t>→ overheid koopt overschot (bv. melk)</a:t>
+            </a:r>
+            <a:endParaRPr lang="en-US" sz="1300" dirty="0"/>
           </a:p>
         </p:txBody>
       </p:sp>
@@ -3674,16 +6653,16 @@
         </p:nvSpPr>
         <p:spPr>
           <a:xfrm>
-            <a:off x="4754880" y="1005840"/>
-            <a:ext cx="3931920" cy="3291840"/>
+            <a:off x="4754880" y="960120"/>
+            <a:ext cx="3931920" cy="3566160"/>
           </a:xfrm>
           <a:prstGeom prst="rect">
             <a:avLst>
-              <a:gd name="adj" fmla="val 1389"/>
+              <a:gd name="adj" fmla="val 1282"/>
             </a:avLst>
           </a:prstGeom>
           <a:solidFill>
-            <a:srgbClr val="FEF5E7"/>
+            <a:srgbClr val="F9F6F1"/>
           </a:solidFill>
           <a:ln/>
           <a:effectLst>
@@ -3694,10 +6673,6 @@
             </a:outerShdw>
           </a:effectLst>
         </p:spPr>
-        <p:txBody>
-          <a:bodyPr/>
-          <a:p/>
-        </p:txBody>
       </p:sp>
       <p:sp>
         <p:nvSpPr>
@@ -3707,21 +6682,17 @@
         </p:nvSpPr>
         <p:spPr>
           <a:xfrm>
-            <a:off x="4754880" y="1005840"/>
-            <a:ext cx="54864" cy="3291840"/>
+            <a:off x="4754880" y="960120"/>
+            <a:ext cx="54864" cy="3566160"/>
           </a:xfrm>
           <a:prstGeom prst="rect">
             <a:avLst/>
           </a:prstGeom>
           <a:solidFill>
-            <a:srgbClr val="E67E22"/>
+            <a:srgbClr val="1A5276"/>
           </a:solidFill>
           <a:ln/>
         </p:spPr>
-        <p:txBody>
-          <a:bodyPr/>
-          <a:p/>
-        </p:txBody>
       </p:sp>
       <p:sp>
         <p:nvSpPr>
@@ -3731,7 +6702,7 @@
         </p:nvSpPr>
         <p:spPr>
           <a:xfrm>
-            <a:off x="4937760" y="1143000"/>
+            <a:off x="4937760" y="1069848"/>
             <a:ext cx="3611880" cy="365760"/>
           </a:xfrm>
           <a:prstGeom prst="rect">
@@ -3741,24 +6712,24 @@
           <a:ln/>
         </p:spPr>
         <p:txBody>
-          <a:bodyPr wrap="square" rtlCol="0" anchor="t"/>
+          <a:bodyPr wrap="square" lIns="0" tIns="0" rIns="0" bIns="0" rtlCol="0" anchor="t"/>
           <a:lstStyle/>
           <a:p>
             <a:pPr indent="0" marL="0">
               <a:buNone/>
             </a:pPr>
             <a:r>
-              <a:rPr lang="en-US" sz="2000" b="1" dirty="0">
-                <a:solidFill>
-                  <a:srgbClr val="E67E22"/>
-                </a:solidFill>
-                <a:latin typeface="Arial" pitchFamily="34" charset="0"/>
-                <a:ea typeface="Arial" pitchFamily="34" charset="-122"/>
-                <a:cs typeface="Arial" pitchFamily="34" charset="-120"/>
-              </a:rPr>
-              <a:t>Voorbeeld: huurplafond</a:t>
-            </a:r>
-            <a:endParaRPr lang="en-US" sz="2000" dirty="0"/>
+              <a:rPr lang="en-US" sz="1800" b="1" dirty="0">
+                <a:solidFill>
+                  <a:srgbClr val="154360"/>
+                </a:solidFill>
+                <a:latin typeface="Arial" pitchFamily="34" charset="0"/>
+                <a:ea typeface="Arial" pitchFamily="34" charset="-122"/>
+                <a:cs typeface="Arial" pitchFamily="34" charset="-120"/>
+              </a:rPr>
+              <a:t>Voorbeeld: melk</a:t>
+            </a:r>
+            <a:endParaRPr lang="en-US" sz="1800" dirty="0"/>
           </a:p>
         </p:txBody>
       </p:sp>
@@ -3770,8 +6741,8 @@
         </p:nvSpPr>
         <p:spPr>
           <a:xfrm>
-            <a:off x="4937760" y="1554480"/>
-            <a:ext cx="3611880" cy="2606040"/>
+            <a:off x="4937760" y="1463040"/>
+            <a:ext cx="3611880" cy="2926080"/>
           </a:xfrm>
           <a:prstGeom prst="rect">
             <a:avLst/>
@@ -3780,17 +6751,17 @@
           <a:ln/>
         </p:spPr>
         <p:txBody>
-          <a:bodyPr wrap="square" rtlCol="0" anchor="t"/>
+          <a:bodyPr wrap="square" lIns="0" tIns="0" rIns="0" bIns="0" rtlCol="0" anchor="t"/>
           <a:lstStyle/>
           <a:p>
             <a:pPr algn="l" indent="0" marL="0">
               <a:lnSpc>
-                <a:spcPct val="115000"/>
+                <a:spcPct val="120000"/>
               </a:lnSpc>
               <a:buNone/>
             </a:pPr>
             <a:r>
-              <a:rPr lang="en-US" sz="1400" dirty="0">
+              <a:rPr lang="en-US" sz="1300" dirty="0">
                 <a:solidFill>
                   <a:srgbClr val="2D3748"/>
                 </a:solidFill>
@@ -3798,17 +6769,19 @@
                 <a:ea typeface="Arial" pitchFamily="34" charset="-122"/>
                 <a:cs typeface="Arial" pitchFamily="34" charset="-120"/>
               </a:rPr>
-              <a:t>De overheid beschermt huurders door een maximumprijs voor huur in te stellen.
-</a:t>
-            </a:r>
+              <a:t>De overheid beschermt boeren met een garantieprijs boven het evenwicht.</a:t>
+            </a:r>
+            <a:endParaRPr lang="en-US" sz="1300" dirty="0"/>
+          </a:p>
+          <a:p>
             <a:pPr algn="l" indent="0" marL="0">
               <a:lnSpc>
-                <a:spcPct val="115000"/>
+                <a:spcPct val="120000"/>
               </a:lnSpc>
               <a:buNone/>
             </a:pPr>
             <a:r>
-              <a:rPr lang="en-US" sz="1400" b="1" dirty="0">
+              <a:rPr lang="en-US" sz="1300" dirty="0">
                 <a:solidFill>
                   <a:srgbClr val="2D3748"/>
                 </a:solidFill>
@@ -3816,16 +6789,19 @@
                 <a:ea typeface="Arial" pitchFamily="34" charset="-122"/>
                 <a:cs typeface="Arial" pitchFamily="34" charset="-120"/>
               </a:rPr>
-              <a:t>Gevolg: </a:t>
-            </a:r>
+              <a:t>Gevolg: boeren produceren meer dan consumenten kopen → overschot.</a:t>
+            </a:r>
+            <a:endParaRPr lang="en-US" sz="1300" dirty="0"/>
+          </a:p>
+          <a:p>
             <a:pPr algn="l" indent="0" marL="0">
               <a:lnSpc>
-                <a:spcPct val="115000"/>
+                <a:spcPct val="120000"/>
               </a:lnSpc>
               <a:buNone/>
             </a:pPr>
             <a:r>
-              <a:rPr lang="en-US" sz="1400" dirty="0">
+              <a:rPr lang="en-US" sz="1300" dirty="0">
                 <a:solidFill>
                   <a:srgbClr val="2D3748"/>
                 </a:solidFill>
@@ -3833,27 +6809,9 @@
                 <a:ea typeface="Arial" pitchFamily="34" charset="-122"/>
                 <a:cs typeface="Arial" pitchFamily="34" charset="-120"/>
               </a:rPr>
-              <a:t>meer vraag naar woningen dan aanbod → woningtekort.
-</a:t>
-            </a:r>
-            <a:pPr algn="l" indent="0" marL="0">
-              <a:lnSpc>
-                <a:spcPct val="115000"/>
-              </a:lnSpc>
-              <a:buNone/>
-            </a:pPr>
-            <a:r>
-              <a:rPr lang="en-US" sz="1400" i="1" dirty="0">
-                <a:solidFill>
-                  <a:srgbClr val="718096"/>
-                </a:solidFill>
-                <a:latin typeface="Arial" pitchFamily="34" charset="0"/>
-                <a:ea typeface="Arial" pitchFamily="34" charset="-122"/>
-                <a:cs typeface="Arial" pitchFamily="34" charset="-120"/>
-              </a:rPr>
-              <a:t>Lange wachtlijsten en zwarte markt.</a:t>
-            </a:r>
-            <a:endParaRPr lang="en-US" sz="1400" dirty="0"/>
+              <a:t>De overheid koopt het overschot op (boterberg, melkplas in de jaren 80).</a:t>
+            </a:r>
+            <a:endParaRPr lang="en-US" sz="1300" dirty="0"/>
           </a:p>
         </p:txBody>
       </p:sp>
@@ -3915,55 +6873,71 @@
                 <a:ea typeface="Arial" pitchFamily="34" charset="-122"/>
                 <a:cs typeface="Arial" pitchFamily="34" charset="-120"/>
               </a:rPr>
-              <a:t>Wanneer werkt een prijsmaatregel?</a:t>
+              <a:t>Minimumprijs in de grafiek</a:t>
             </a:r>
             <a:endParaRPr lang="en-US" sz="2400" dirty="0"/>
           </a:p>
         </p:txBody>
       </p:sp>
-      <p:sp>
-        <p:nvSpPr>
-          <p:cNvPr id="3" name="Shape 1"/>
-          <p:cNvSpPr/>
-          <p:nvPr/>
-        </p:nvSpPr>
-        <p:spPr>
-          <a:xfrm>
-            <a:off x="457200" y="1005840"/>
-            <a:ext cx="3931920" cy="2560320"/>
-          </a:xfrm>
-          <a:prstGeom prst="rect">
-            <a:avLst>
-              <a:gd name="adj" fmla="val 1786"/>
-            </a:avLst>
+      <p:pic>
+        <p:nvPicPr>
+          <p:cNvPr id="3" name="Image 0" descr="preencoded.png">    </p:cNvPr>
+          <p:cNvPicPr>
+            <a:picLocks noChangeAspect="1"/>
+          </p:cNvPicPr>
+          <p:nvPr/>
+        </p:nvPicPr>
+        <p:blipFill>
+          <a:blip r:embed="rId1"/>
+          <a:stretch>
+            <a:fillRect/>
+          </a:stretch>
+        </p:blipFill>
+        <p:spPr>
+          <a:xfrm>
+            <a:off x="914400" y="749808"/>
+            <a:ext cx="7315200" cy="3657600"/>
+          </a:xfrm>
+          <a:prstGeom prst="rect">
+            <a:avLst/>
+          </a:prstGeom>
+        </p:spPr>
+      </p:pic>
+      <p:sp>
+        <p:nvSpPr>
+          <p:cNvPr id="4" name="Shape 1"/>
+          <p:cNvSpPr/>
+          <p:nvPr/>
+        </p:nvSpPr>
+        <p:spPr>
+          <a:xfrm>
+            <a:off x="457200" y="4480560"/>
+            <a:ext cx="8229600" cy="566928"/>
+          </a:xfrm>
+          <a:prstGeom prst="rect">
+            <a:avLst/>
           </a:prstGeom>
           <a:solidFill>
-            <a:srgbClr val="F9F6F1"/>
+            <a:srgbClr val="F7F8FA"/>
           </a:solidFill>
-          <a:ln/>
-          <a:effectLst>
-            <a:outerShdw sx="100000" sy="100000" kx="0" ky="0" algn="bl" rotWithShape="0" blurRad="76200" dist="25400" dir="8100000">
-              <a:srgbClr val="000000">
-                <a:alpha val="10000"/>
-              </a:srgbClr>
-            </a:outerShdw>
-          </a:effectLst>
-        </p:spPr>
-        <p:txBody>
-          <a:bodyPr/>
-          <a:p/>
-        </p:txBody>
-      </p:sp>
-      <p:sp>
-        <p:nvSpPr>
-          <p:cNvPr id="4" name="Shape 2"/>
-          <p:cNvSpPr/>
-          <p:nvPr/>
-        </p:nvSpPr>
-        <p:spPr>
-          <a:xfrm>
-            <a:off x="457200" y="1005840"/>
-            <a:ext cx="54864" cy="2560320"/>
+          <a:ln w="6350">
+            <a:solidFill>
+              <a:srgbClr val="CBD5E0"/>
+            </a:solidFill>
+            <a:prstDash val="solid"/>
+          </a:ln>
+        </p:spPr>
+      </p:sp>
+      <p:sp>
+        <p:nvSpPr>
+          <p:cNvPr id="5" name="Shape 2"/>
+          <p:cNvSpPr/>
+          <p:nvPr/>
+        </p:nvSpPr>
+        <p:spPr>
+          <a:xfrm>
+            <a:off x="566928" y="4636008"/>
+            <a:ext cx="201168" cy="201168"/>
           </a:xfrm>
           <a:prstGeom prst="rect">
             <a:avLst/>
@@ -3973,21 +6947,17 @@
           </a:solidFill>
           <a:ln/>
         </p:spPr>
-        <p:txBody>
-          <a:bodyPr/>
-          <a:p/>
-        </p:txBody>
-      </p:sp>
-      <p:sp>
-        <p:nvSpPr>
-          <p:cNvPr id="5" name="Text 3"/>
-          <p:cNvSpPr/>
-          <p:nvPr/>
-        </p:nvSpPr>
-        <p:spPr>
-          <a:xfrm>
-            <a:off x="640080" y="1143000"/>
-            <a:ext cx="3611880" cy="365760"/>
+      </p:sp>
+      <p:sp>
+        <p:nvSpPr>
+          <p:cNvPr id="6" name="Text 3"/>
+          <p:cNvSpPr/>
+          <p:nvPr/>
+        </p:nvSpPr>
+        <p:spPr>
+          <a:xfrm>
+            <a:off x="841248" y="4553712"/>
+            <a:ext cx="1600200" cy="420624"/>
           </a:xfrm>
           <a:prstGeom prst="rect">
             <a:avLst/>
@@ -3996,14 +6966,14 @@
           <a:ln/>
         </p:spPr>
         <p:txBody>
-          <a:bodyPr wrap="square" rtlCol="0" anchor="t"/>
+          <a:bodyPr wrap="square" lIns="0" tIns="0" rIns="0" bIns="0" rtlCol="0" anchor="ctr"/>
           <a:lstStyle/>
           <a:p>
             <a:pPr indent="0" marL="0">
               <a:buNone/>
             </a:pPr>
             <a:r>
-              <a:rPr lang="en-US" sz="2000" b="1" dirty="0">
+              <a:rPr lang="en-US" sz="1100" b="1" dirty="0">
                 <a:solidFill>
                   <a:srgbClr val="1A5276"/>
                 </a:solidFill>
@@ -4011,22 +6981,56 @@
                 <a:ea typeface="Arial" pitchFamily="34" charset="-122"/>
                 <a:cs typeface="Arial" pitchFamily="34" charset="-120"/>
               </a:rPr>
-              <a:t>Minimumprijs boven P*</a:t>
-            </a:r>
-            <a:endParaRPr lang="en-US" sz="2000" dirty="0"/>
-          </a:p>
-        </p:txBody>
-      </p:sp>
-      <p:sp>
-        <p:nvSpPr>
-          <p:cNvPr id="6" name="Text 4"/>
-          <p:cNvSpPr/>
-          <p:nvPr/>
-        </p:nvSpPr>
-        <p:spPr>
-          <a:xfrm>
-            <a:off x="640080" y="1554480"/>
-            <a:ext cx="3611880" cy="1874520"/>
+              <a:t>V</a:t>
+            </a:r>
+            <a:pPr indent="0" marL="0">
+              <a:buNone/>
+            </a:pPr>
+            <a:r>
+              <a:rPr lang="en-US" sz="1100" dirty="0">
+                <a:solidFill>
+                  <a:srgbClr val="2D3748"/>
+                </a:solidFill>
+                <a:latin typeface="Arial" pitchFamily="34" charset="0"/>
+                <a:ea typeface="Arial" pitchFamily="34" charset="-122"/>
+                <a:cs typeface="Arial" pitchFamily="34" charset="-120"/>
+              </a:rPr>
+              <a:t>  vraag</a:t>
+            </a:r>
+            <a:endParaRPr lang="en-US" sz="1100" dirty="0"/>
+          </a:p>
+        </p:txBody>
+      </p:sp>
+      <p:sp>
+        <p:nvSpPr>
+          <p:cNvPr id="7" name="Shape 4"/>
+          <p:cNvSpPr/>
+          <p:nvPr/>
+        </p:nvSpPr>
+        <p:spPr>
+          <a:xfrm>
+            <a:off x="2624328" y="4636008"/>
+            <a:ext cx="201168" cy="201168"/>
+          </a:xfrm>
+          <a:prstGeom prst="rect">
+            <a:avLst/>
+          </a:prstGeom>
+          <a:solidFill>
+            <a:srgbClr val="1E8449"/>
+          </a:solidFill>
+          <a:ln/>
+        </p:spPr>
+      </p:sp>
+      <p:sp>
+        <p:nvSpPr>
+          <p:cNvPr id="8" name="Text 5"/>
+          <p:cNvSpPr/>
+          <p:nvPr/>
+        </p:nvSpPr>
+        <p:spPr>
+          <a:xfrm>
+            <a:off x="2898648" y="4553712"/>
+            <a:ext cx="1600200" cy="420624"/>
           </a:xfrm>
           <a:prstGeom prst="rect">
             <a:avLst/>
@@ -4035,17 +7039,28 @@
           <a:ln/>
         </p:spPr>
         <p:txBody>
-          <a:bodyPr wrap="square" rtlCol="0" anchor="t"/>
-          <a:lstStyle/>
-          <a:p>
-            <a:pPr algn="l" indent="0" marL="0">
-              <a:lnSpc>
-                <a:spcPct val="115000"/>
-              </a:lnSpc>
-              <a:buNone/>
-            </a:pPr>
-            <a:r>
-              <a:rPr lang="en-US" sz="1400" b="1" dirty="0">
+          <a:bodyPr wrap="square" lIns="0" tIns="0" rIns="0" bIns="0" rtlCol="0" anchor="ctr"/>
+          <a:lstStyle/>
+          <a:p>
+            <a:pPr indent="0" marL="0">
+              <a:buNone/>
+            </a:pPr>
+            <a:r>
+              <a:rPr lang="en-US" sz="1100" b="1" dirty="0">
+                <a:solidFill>
+                  <a:srgbClr val="1E8449"/>
+                </a:solidFill>
+                <a:latin typeface="Arial" pitchFamily="34" charset="0"/>
+                <a:ea typeface="Arial" pitchFamily="34" charset="-122"/>
+                <a:cs typeface="Arial" pitchFamily="34" charset="-120"/>
+              </a:rPr>
+              <a:t>A</a:t>
+            </a:r>
+            <a:pPr indent="0" marL="0">
+              <a:buNone/>
+            </a:pPr>
+            <a:r>
+              <a:rPr lang="en-US" sz="1100" dirty="0">
                 <a:solidFill>
                   <a:srgbClr val="2D3748"/>
                 </a:solidFill>
@@ -4053,17 +7068,72 @@
                 <a:ea typeface="Arial" pitchFamily="34" charset="-122"/>
                 <a:cs typeface="Arial" pitchFamily="34" charset="-120"/>
               </a:rPr>
-              <a:t>Pmin &gt; P*
-</a:t>
-            </a:r>
-            <a:pPr algn="l" indent="0" marL="0">
-              <a:lnSpc>
-                <a:spcPct val="115000"/>
-              </a:lnSpc>
-              <a:buNone/>
-            </a:pPr>
-            <a:r>
-              <a:rPr lang="en-US" sz="1400" dirty="0">
+              <a:t>  aanbod</a:t>
+            </a:r>
+            <a:endParaRPr lang="en-US" sz="1100" dirty="0"/>
+          </a:p>
+        </p:txBody>
+      </p:sp>
+      <p:sp>
+        <p:nvSpPr>
+          <p:cNvPr id="9" name="Shape 6"/>
+          <p:cNvSpPr/>
+          <p:nvPr/>
+        </p:nvSpPr>
+        <p:spPr>
+          <a:xfrm>
+            <a:off x="4681728" y="4636008"/>
+            <a:ext cx="201168" cy="201168"/>
+          </a:xfrm>
+          <a:prstGeom prst="rect">
+            <a:avLst/>
+          </a:prstGeom>
+          <a:solidFill>
+            <a:srgbClr val="186A3B"/>
+          </a:solidFill>
+          <a:ln/>
+        </p:spPr>
+      </p:sp>
+      <p:sp>
+        <p:nvSpPr>
+          <p:cNvPr id="10" name="Text 7"/>
+          <p:cNvSpPr/>
+          <p:nvPr/>
+        </p:nvSpPr>
+        <p:spPr>
+          <a:xfrm>
+            <a:off x="4956048" y="4553712"/>
+            <a:ext cx="1600200" cy="420624"/>
+          </a:xfrm>
+          <a:prstGeom prst="rect">
+            <a:avLst/>
+          </a:prstGeom>
+          <a:noFill/>
+          <a:ln/>
+        </p:spPr>
+        <p:txBody>
+          <a:bodyPr wrap="square" lIns="0" tIns="0" rIns="0" bIns="0" rtlCol="0" anchor="ctr"/>
+          <a:lstStyle/>
+          <a:p>
+            <a:pPr indent="0" marL="0">
+              <a:buNone/>
+            </a:pPr>
+            <a:r>
+              <a:rPr lang="en-US" sz="1100" b="1" dirty="0">
+                <a:solidFill>
+                  <a:srgbClr val="186A3B"/>
+                </a:solidFill>
+                <a:latin typeface="Arial" pitchFamily="34" charset="0"/>
+                <a:ea typeface="Arial" pitchFamily="34" charset="-122"/>
+                <a:cs typeface="Arial" pitchFamily="34" charset="-120"/>
+              </a:rPr>
+              <a:t>Pmin</a:t>
+            </a:r>
+            <a:pPr indent="0" marL="0">
+              <a:buNone/>
+            </a:pPr>
+            <a:r>
+              <a:rPr lang="en-US" sz="1100" dirty="0">
                 <a:solidFill>
                   <a:srgbClr val="2D3748"/>
                 </a:solidFill>
@@ -4071,18 +7141,58 @@
                 <a:ea typeface="Arial" pitchFamily="34" charset="-122"/>
                 <a:cs typeface="Arial" pitchFamily="34" charset="-120"/>
               </a:rPr>
-              <a:t>Prijs mag niet onder Pmin
-Aanbod &gt; Vraag
-</a:t>
-            </a:r>
-            <a:pPr algn="l" indent="0" marL="0">
-              <a:lnSpc>
-                <a:spcPct val="115000"/>
-              </a:lnSpc>
-              <a:buNone/>
-            </a:pPr>
-            <a:r>
-              <a:rPr lang="en-US" sz="1400" b="1" dirty="0">
+              <a:t>  wettelijke ondergrens</a:t>
+            </a:r>
+            <a:endParaRPr lang="en-US" sz="1100" dirty="0"/>
+          </a:p>
+        </p:txBody>
+      </p:sp>
+      <p:sp>
+        <p:nvSpPr>
+          <p:cNvPr id="11" name="Shape 8"/>
+          <p:cNvSpPr/>
+          <p:nvPr/>
+        </p:nvSpPr>
+        <p:spPr>
+          <a:xfrm>
+            <a:off x="6739128" y="4636008"/>
+            <a:ext cx="201168" cy="201168"/>
+          </a:xfrm>
+          <a:prstGeom prst="rect">
+            <a:avLst/>
+          </a:prstGeom>
+          <a:solidFill>
+            <a:srgbClr val="D9534F"/>
+          </a:solidFill>
+          <a:ln/>
+        </p:spPr>
+      </p:sp>
+      <p:sp>
+        <p:nvSpPr>
+          <p:cNvPr id="12" name="Text 9"/>
+          <p:cNvSpPr/>
+          <p:nvPr/>
+        </p:nvSpPr>
+        <p:spPr>
+          <a:xfrm>
+            <a:off x="7013448" y="4553712"/>
+            <a:ext cx="1600200" cy="420624"/>
+          </a:xfrm>
+          <a:prstGeom prst="rect">
+            <a:avLst/>
+          </a:prstGeom>
+          <a:noFill/>
+          <a:ln/>
+        </p:spPr>
+        <p:txBody>
+          <a:bodyPr wrap="square" lIns="0" tIns="0" rIns="0" bIns="0" rtlCol="0" anchor="ctr"/>
+          <a:lstStyle/>
+          <a:p>
+            <a:pPr indent="0" marL="0">
+              <a:buNone/>
+            </a:pPr>
+            <a:r>
+              <a:rPr lang="en-US" sz="1100" b="1" dirty="0">
                 <a:solidFill>
                   <a:srgbClr val="D9534F"/>
                 </a:solidFill>
@@ -4090,137 +7200,13 @@
                 <a:ea typeface="Arial" pitchFamily="34" charset="-122"/>
                 <a:cs typeface="Arial" pitchFamily="34" charset="-120"/>
               </a:rPr>
-              <a:t>→ Aanbodoverschot</a:t>
-            </a:r>
-            <a:endParaRPr lang="en-US" sz="1400" dirty="0"/>
-          </a:p>
-        </p:txBody>
-      </p:sp>
-      <p:sp>
-        <p:nvSpPr>
-          <p:cNvPr id="7" name="Shape 5"/>
-          <p:cNvSpPr/>
-          <p:nvPr/>
-        </p:nvSpPr>
-        <p:spPr>
-          <a:xfrm>
-            <a:off x="4754880" y="1005840"/>
-            <a:ext cx="3931920" cy="2560320"/>
-          </a:xfrm>
-          <a:prstGeom prst="rect">
-            <a:avLst>
-              <a:gd name="adj" fmla="val 1786"/>
-            </a:avLst>
-          </a:prstGeom>
-          <a:solidFill>
-            <a:srgbClr val="F7F8FA"/>
-          </a:solidFill>
-          <a:ln/>
-          <a:effectLst>
-            <a:outerShdw sx="100000" sy="100000" kx="0" ky="0" algn="bl" rotWithShape="0" blurRad="76200" dist="25400" dir="8100000">
-              <a:srgbClr val="000000">
-                <a:alpha val="10000"/>
-              </a:srgbClr>
-            </a:outerShdw>
-          </a:effectLst>
-        </p:spPr>
-        <p:txBody>
-          <a:bodyPr/>
-          <a:p/>
-        </p:txBody>
-      </p:sp>
-      <p:sp>
-        <p:nvSpPr>
-          <p:cNvPr id="8" name="Shape 6"/>
-          <p:cNvSpPr/>
-          <p:nvPr/>
-        </p:nvSpPr>
-        <p:spPr>
-          <a:xfrm>
-            <a:off x="4754880" y="1005840"/>
-            <a:ext cx="54864" cy="2560320"/>
-          </a:xfrm>
-          <a:prstGeom prst="rect">
-            <a:avLst/>
-          </a:prstGeom>
-          <a:solidFill>
-            <a:srgbClr val="718096"/>
-          </a:solidFill>
-          <a:ln/>
-        </p:spPr>
-        <p:txBody>
-          <a:bodyPr/>
-          <a:p/>
-        </p:txBody>
-      </p:sp>
-      <p:sp>
-        <p:nvSpPr>
-          <p:cNvPr id="9" name="Text 7"/>
-          <p:cNvSpPr/>
-          <p:nvPr/>
-        </p:nvSpPr>
-        <p:spPr>
-          <a:xfrm>
-            <a:off x="4937760" y="1143000"/>
-            <a:ext cx="3611880" cy="365760"/>
-          </a:xfrm>
-          <a:prstGeom prst="rect">
-            <a:avLst/>
-          </a:prstGeom>
-          <a:noFill/>
-          <a:ln/>
-        </p:spPr>
-        <p:txBody>
-          <a:bodyPr wrap="square" rtlCol="0" anchor="t"/>
-          <a:lstStyle/>
-          <a:p>
+              <a:t>■</a:t>
+            </a:r>
             <a:pPr indent="0" marL="0">
               <a:buNone/>
             </a:pPr>
             <a:r>
-              <a:rPr lang="en-US" sz="2000" b="1" dirty="0">
-                <a:solidFill>
-                  <a:srgbClr val="718096"/>
-                </a:solidFill>
-                <a:latin typeface="Arial" pitchFamily="34" charset="0"/>
-                <a:ea typeface="Arial" pitchFamily="34" charset="-122"/>
-                <a:cs typeface="Arial" pitchFamily="34" charset="-120"/>
-              </a:rPr>
-              <a:t>Minimumprijs onder P*</a:t>
-            </a:r>
-            <a:endParaRPr lang="en-US" sz="2000" dirty="0"/>
-          </a:p>
-        </p:txBody>
-      </p:sp>
-      <p:sp>
-        <p:nvSpPr>
-          <p:cNvPr id="10" name="Text 8"/>
-          <p:cNvSpPr/>
-          <p:nvPr/>
-        </p:nvSpPr>
-        <p:spPr>
-          <a:xfrm>
-            <a:off x="4937760" y="1554480"/>
-            <a:ext cx="3611880" cy="1874520"/>
-          </a:xfrm>
-          <a:prstGeom prst="rect">
-            <a:avLst/>
-          </a:prstGeom>
-          <a:noFill/>
-          <a:ln/>
-        </p:spPr>
-        <p:txBody>
-          <a:bodyPr wrap="square" rtlCol="0" anchor="t"/>
-          <a:lstStyle/>
-          <a:p>
-            <a:pPr algn="l" indent="0" marL="0">
-              <a:lnSpc>
-                <a:spcPct val="115000"/>
-              </a:lnSpc>
-              <a:buNone/>
-            </a:pPr>
-            <a:r>
-              <a:rPr lang="en-US" sz="1400" b="1" dirty="0">
+              <a:rPr lang="en-US" sz="1100" dirty="0">
                 <a:solidFill>
                   <a:srgbClr val="2D3748"/>
                 </a:solidFill>
@@ -4228,135 +7214,9 @@
                 <a:ea typeface="Arial" pitchFamily="34" charset="-122"/>
                 <a:cs typeface="Arial" pitchFamily="34" charset="-120"/>
               </a:rPr>
-              <a:t>Pmin &lt; P*
-</a:t>
-            </a:r>
-            <a:pPr algn="l" indent="0" marL="0">
-              <a:lnSpc>
-                <a:spcPct val="115000"/>
-              </a:lnSpc>
-              <a:buNone/>
-            </a:pPr>
-            <a:r>
-              <a:rPr lang="en-US" sz="1400" dirty="0">
-                <a:solidFill>
-                  <a:srgbClr val="2D3748"/>
-                </a:solidFill>
-                <a:latin typeface="Arial" pitchFamily="34" charset="0"/>
-                <a:ea typeface="Arial" pitchFamily="34" charset="-122"/>
-                <a:cs typeface="Arial" pitchFamily="34" charset="-120"/>
-              </a:rPr>
-              <a:t>Markt kan hoger uitkomen
-Evenwicht P* is toegestaan
-</a:t>
-            </a:r>
-            <a:pPr algn="l" indent="0" marL="0">
-              <a:lnSpc>
-                <a:spcPct val="115000"/>
-              </a:lnSpc>
-              <a:buNone/>
-            </a:pPr>
-            <a:r>
-              <a:rPr lang="en-US" sz="1400" b="1" dirty="0">
-                <a:solidFill>
-                  <a:srgbClr val="718096"/>
-                </a:solidFill>
-                <a:latin typeface="Arial" pitchFamily="34" charset="0"/>
-                <a:ea typeface="Arial" pitchFamily="34" charset="-122"/>
-                <a:cs typeface="Arial" pitchFamily="34" charset="-120"/>
-              </a:rPr>
-              <a:t>→ Geen effect</a:t>
-            </a:r>
-            <a:endParaRPr lang="en-US" sz="1400" dirty="0"/>
-          </a:p>
-        </p:txBody>
-      </p:sp>
-      <p:sp>
-        <p:nvSpPr>
-          <p:cNvPr id="11" name="Shape 9"/>
-          <p:cNvSpPr/>
-          <p:nvPr/>
-        </p:nvSpPr>
-        <p:spPr>
-          <a:xfrm>
-            <a:off x="457200" y="3840480"/>
-            <a:ext cx="8229600" cy="457200"/>
-          </a:xfrm>
-          <a:prstGeom prst="rect">
-            <a:avLst>
-              <a:gd name="adj" fmla="val 10000"/>
-            </a:avLst>
-          </a:prstGeom>
-          <a:solidFill>
-            <a:srgbClr val="EBF5FB"/>
-          </a:solidFill>
-          <a:ln/>
-        </p:spPr>
-        <p:txBody>
-          <a:bodyPr/>
-          <a:p/>
-        </p:txBody>
-      </p:sp>
-      <p:sp>
-        <p:nvSpPr>
-          <p:cNvPr id="12" name="Shape 10"/>
-          <p:cNvSpPr/>
-          <p:nvPr/>
-        </p:nvSpPr>
-        <p:spPr>
-          <a:xfrm>
-            <a:off x="457200" y="3840480"/>
-            <a:ext cx="54864" cy="457200"/>
-          </a:xfrm>
-          <a:prstGeom prst="rect">
-            <a:avLst/>
-          </a:prstGeom>
-          <a:solidFill>
-            <a:srgbClr val="1A5276"/>
-          </a:solidFill>
-          <a:ln/>
-        </p:spPr>
-        <p:txBody>
-          <a:bodyPr/>
-          <a:p/>
-        </p:txBody>
-      </p:sp>
-      <p:sp>
-        <p:nvSpPr>
-          <p:cNvPr id="13" name="Text 11"/>
-          <p:cNvSpPr/>
-          <p:nvPr/>
-        </p:nvSpPr>
-        <p:spPr>
-          <a:xfrm>
-            <a:off x="640080" y="3840480"/>
-            <a:ext cx="7863840" cy="457200"/>
-          </a:xfrm>
-          <a:prstGeom prst="rect">
-            <a:avLst/>
-          </a:prstGeom>
-          <a:noFill/>
-          <a:ln/>
-        </p:spPr>
-        <p:txBody>
-          <a:bodyPr wrap="square" rtlCol="0" anchor="ctr"/>
-          <a:lstStyle/>
-          <a:p>
-            <a:pPr indent="0" marL="0">
-              <a:buNone/>
-            </a:pPr>
-            <a:r>
-              <a:rPr lang="en-US" sz="1400" b="1" dirty="0">
-                <a:solidFill>
-                  <a:srgbClr val="154360"/>
-                </a:solidFill>
-                <a:latin typeface="Arial" pitchFamily="34" charset="0"/>
-                <a:ea typeface="Arial" pitchFamily="34" charset="-122"/>
-                <a:cs typeface="Arial" pitchFamily="34" charset="-120"/>
-              </a:rPr>
-              <a:t>Alleen bindend als de maatregel het evenwicht blokkeert.</a:t>
-            </a:r>
-            <a:endParaRPr lang="en-US" sz="1400" dirty="0"/>
+              <a:t>  aanbodoverschot</a:t>
+            </a:r>
+            <a:endParaRPr lang="en-US" sz="1100" dirty="0"/>
           </a:p>
         </p:txBody>
       </p:sp>
@@ -4418,7 +7278,7 @@
                 <a:ea typeface="Arial" pitchFamily="34" charset="-122"/>
                 <a:cs typeface="Arial" pitchFamily="34" charset="-120"/>
               </a:rPr>
-              <a:t>Minimumloon op de arbeidsmarkt</a:t>
+              <a:t>Bindende maximumprijs — theorie</a:t>
             </a:r>
             <a:endParaRPr lang="en-US" sz="2400" dirty="0"/>
           </a:p>
@@ -4432,122 +7292,16 @@
         </p:nvSpPr>
         <p:spPr>
           <a:xfrm>
-            <a:off x="457200" y="1005840"/>
-            <a:ext cx="8229600" cy="640080"/>
+            <a:off x="457200" y="960120"/>
+            <a:ext cx="3931920" cy="3566160"/>
           </a:xfrm>
           <a:prstGeom prst="rect">
             <a:avLst>
-              <a:gd name="adj" fmla="val 7143"/>
+              <a:gd name="adj" fmla="val 1282"/>
             </a:avLst>
           </a:prstGeom>
           <a:solidFill>
             <a:srgbClr val="EBF5FB"/>
-          </a:solidFill>
-          <a:ln/>
-        </p:spPr>
-        <p:txBody>
-          <a:bodyPr/>
-          <a:p/>
-        </p:txBody>
-      </p:sp>
-      <p:sp>
-        <p:nvSpPr>
-          <p:cNvPr id="4" name="Shape 2"/>
-          <p:cNvSpPr/>
-          <p:nvPr/>
-        </p:nvSpPr>
-        <p:spPr>
-          <a:xfrm>
-            <a:off x="457200" y="1005840"/>
-            <a:ext cx="54864" cy="640080"/>
-          </a:xfrm>
-          <a:prstGeom prst="rect">
-            <a:avLst/>
-          </a:prstGeom>
-          <a:solidFill>
-            <a:srgbClr val="1A5276"/>
-          </a:solidFill>
-          <a:ln/>
-        </p:spPr>
-        <p:txBody>
-          <a:bodyPr/>
-          <a:p/>
-        </p:txBody>
-      </p:sp>
-      <p:sp>
-        <p:nvSpPr>
-          <p:cNvPr id="5" name="Text 3"/>
-          <p:cNvSpPr/>
-          <p:nvPr/>
-        </p:nvSpPr>
-        <p:spPr>
-          <a:xfrm>
-            <a:off x="640080" y="1005840"/>
-            <a:ext cx="7863840" cy="640080"/>
-          </a:xfrm>
-          <a:prstGeom prst="rect">
-            <a:avLst/>
-          </a:prstGeom>
-          <a:noFill/>
-          <a:ln/>
-        </p:spPr>
-        <p:txBody>
-          <a:bodyPr wrap="square" rtlCol="0" anchor="ctr"/>
-          <a:lstStyle/>
-          <a:p>
-            <a:pPr indent="0" marL="0">
-              <a:buNone/>
-            </a:pPr>
-            <a:r>
-              <a:rPr lang="en-US" sz="1400" b="1" dirty="0">
-                <a:solidFill>
-                  <a:srgbClr val="2D3748"/>
-                </a:solidFill>
-                <a:latin typeface="Arial" pitchFamily="34" charset="0"/>
-                <a:ea typeface="Arial" pitchFamily="34" charset="-122"/>
-                <a:cs typeface="Arial" pitchFamily="34" charset="-120"/>
-              </a:rPr>
-              <a:t>Minimumloon = minimumprijs op de arbeidsmarkt</a:t>
-            </a:r>
-            <a:endParaRPr lang="en-US" sz="1400" dirty="0"/>
-          </a:p>
-          <a:p>
-            <a:pPr indent="0" marL="0">
-              <a:buNone/>
-            </a:pPr>
-            <a:r>
-              <a:rPr lang="en-US" sz="1400" b="1" dirty="0">
-                <a:solidFill>
-                  <a:srgbClr val="2D3748"/>
-                </a:solidFill>
-                <a:latin typeface="Arial" pitchFamily="34" charset="0"/>
-                <a:ea typeface="Arial" pitchFamily="34" charset="-122"/>
-                <a:cs typeface="Arial" pitchFamily="34" charset="-120"/>
-              </a:rPr>
-              <a:t>Als het minimumloon boven het evenwichtsloon ligt → werkloosheid (aanbod &gt; vraag)</a:t>
-            </a:r>
-            <a:endParaRPr lang="en-US" sz="1400" dirty="0"/>
-          </a:p>
-        </p:txBody>
-      </p:sp>
-      <p:sp>
-        <p:nvSpPr>
-          <p:cNvPr id="6" name="Shape 4"/>
-          <p:cNvSpPr/>
-          <p:nvPr/>
-        </p:nvSpPr>
-        <p:spPr>
-          <a:xfrm>
-            <a:off x="457200" y="1920240"/>
-            <a:ext cx="3931920" cy="1828800"/>
-          </a:xfrm>
-          <a:prstGeom prst="rect">
-            <a:avLst>
-              <a:gd name="adj" fmla="val 2500"/>
-            </a:avLst>
-          </a:prstGeom>
-          <a:solidFill>
-            <a:srgbClr val="E8F8F0"/>
           </a:solidFill>
           <a:ln/>
           <a:effectLst>
@@ -4558,44 +7312,36 @@
             </a:outerShdw>
           </a:effectLst>
         </p:spPr>
-        <p:txBody>
-          <a:bodyPr/>
-          <a:p/>
-        </p:txBody>
-      </p:sp>
-      <p:sp>
-        <p:nvSpPr>
-          <p:cNvPr id="7" name="Shape 5"/>
-          <p:cNvSpPr/>
-          <p:nvPr/>
-        </p:nvSpPr>
-        <p:spPr>
-          <a:xfrm>
-            <a:off x="457200" y="1920240"/>
-            <a:ext cx="54864" cy="1828800"/>
+      </p:sp>
+      <p:sp>
+        <p:nvSpPr>
+          <p:cNvPr id="4" name="Shape 2"/>
+          <p:cNvSpPr/>
+          <p:nvPr/>
+        </p:nvSpPr>
+        <p:spPr>
+          <a:xfrm>
+            <a:off x="457200" y="960120"/>
+            <a:ext cx="54864" cy="3566160"/>
           </a:xfrm>
           <a:prstGeom prst="rect">
             <a:avLst/>
           </a:prstGeom>
           <a:solidFill>
-            <a:srgbClr val="1E8449"/>
+            <a:srgbClr val="1A5276"/>
           </a:solidFill>
           <a:ln/>
         </p:spPr>
-        <p:txBody>
-          <a:bodyPr/>
-          <a:p/>
-        </p:txBody>
-      </p:sp>
-      <p:sp>
-        <p:nvSpPr>
-          <p:cNvPr id="8" name="Text 6"/>
-          <p:cNvSpPr/>
-          <p:nvPr/>
-        </p:nvSpPr>
-        <p:spPr>
-          <a:xfrm>
-            <a:off x="640080" y="2057400"/>
+      </p:sp>
+      <p:sp>
+        <p:nvSpPr>
+          <p:cNvPr id="5" name="Text 3"/>
+          <p:cNvSpPr/>
+          <p:nvPr/>
+        </p:nvSpPr>
+        <p:spPr>
+          <a:xfrm>
+            <a:off x="640080" y="1069848"/>
             <a:ext cx="3611880" cy="365760"/>
           </a:xfrm>
           <a:prstGeom prst="rect">
@@ -4605,37 +7351,37 @@
           <a:ln/>
         </p:spPr>
         <p:txBody>
-          <a:bodyPr wrap="square" rtlCol="0" anchor="t"/>
+          <a:bodyPr wrap="square" lIns="0" tIns="0" rIns="0" bIns="0" rtlCol="0" anchor="t"/>
           <a:lstStyle/>
           <a:p>
             <a:pPr indent="0" marL="0">
               <a:buNone/>
             </a:pPr>
             <a:r>
-              <a:rPr lang="en-US" sz="2000" b="1" dirty="0">
-                <a:solidFill>
-                  <a:srgbClr val="1E8449"/>
-                </a:solidFill>
-                <a:latin typeface="Arial" pitchFamily="34" charset="0"/>
-                <a:ea typeface="Arial" pitchFamily="34" charset="-122"/>
-                <a:cs typeface="Arial" pitchFamily="34" charset="-120"/>
-              </a:rPr>
-              <a:t>Voordeel</a:t>
-            </a:r>
-            <a:endParaRPr lang="en-US" sz="2000" dirty="0"/>
-          </a:p>
-        </p:txBody>
-      </p:sp>
-      <p:sp>
-        <p:nvSpPr>
-          <p:cNvPr id="9" name="Text 7"/>
-          <p:cNvSpPr/>
-          <p:nvPr/>
-        </p:nvSpPr>
-        <p:spPr>
-          <a:xfrm>
-            <a:off x="640080" y="2468880"/>
-            <a:ext cx="3611880" cy="1143000"/>
+              <a:rPr lang="en-US" sz="1800" b="1" dirty="0">
+                <a:solidFill>
+                  <a:srgbClr val="154360"/>
+                </a:solidFill>
+                <a:latin typeface="Arial" pitchFamily="34" charset="0"/>
+                <a:ea typeface="Arial" pitchFamily="34" charset="-122"/>
+                <a:cs typeface="Arial" pitchFamily="34" charset="-120"/>
+              </a:rPr>
+              <a:t>Definitie</a:t>
+            </a:r>
+            <a:endParaRPr lang="en-US" sz="1800" dirty="0"/>
+          </a:p>
+        </p:txBody>
+      </p:sp>
+      <p:sp>
+        <p:nvSpPr>
+          <p:cNvPr id="6" name="Text 4"/>
+          <p:cNvSpPr/>
+          <p:nvPr/>
+        </p:nvSpPr>
+        <p:spPr>
+          <a:xfrm>
+            <a:off x="640080" y="1463040"/>
+            <a:ext cx="3611880" cy="2926080"/>
           </a:xfrm>
           <a:prstGeom prst="rect">
             <a:avLst/>
@@ -4644,44 +7390,128 @@
           <a:ln/>
         </p:spPr>
         <p:txBody>
-          <a:bodyPr wrap="square" rtlCol="0" anchor="t"/>
-          <a:lstStyle/>
+          <a:bodyPr wrap="square" lIns="0" tIns="0" rIns="0" bIns="0" rtlCol="0" anchor="t"/>
+          <a:lstStyle/>
+          <a:p>
+            <a:pPr algn="l" marL="342900" indent="-342900">
+              <a:lnSpc>
+                <a:spcPct val="120000"/>
+              </a:lnSpc>
+              <a:buSzPct val="100000"/>
+              <a:buChar char="■"/>
+            </a:pPr>
+            <a:r>
+              <a:rPr lang="en-US" sz="1300" b="1" dirty="0">
+                <a:solidFill>
+                  <a:srgbClr val="2D3748"/>
+                </a:solidFill>
+                <a:latin typeface="Arial" pitchFamily="34" charset="0"/>
+                <a:ea typeface="Arial" pitchFamily="34" charset="-122"/>
+                <a:cs typeface="Arial" pitchFamily="34" charset="-120"/>
+              </a:rPr>
+              <a:t>Wettelijke maximumprijs</a:t>
+            </a:r>
+            <a:endParaRPr lang="en-US" sz="1300" dirty="0"/>
+          </a:p>
+          <a:p>
+            <a:pPr algn="l" marL="342900" indent="-342900">
+              <a:lnSpc>
+                <a:spcPct val="120000"/>
+              </a:lnSpc>
+              <a:buSzPct val="100000"/>
+              <a:buChar char="■"/>
+            </a:pPr>
+            <a:r>
+              <a:rPr lang="en-US" sz="1300" dirty="0">
+                <a:solidFill>
+                  <a:srgbClr val="2D3748"/>
+                </a:solidFill>
+                <a:latin typeface="Arial" pitchFamily="34" charset="0"/>
+                <a:ea typeface="Arial" pitchFamily="34" charset="-122"/>
+                <a:cs typeface="Arial" pitchFamily="34" charset="-120"/>
+              </a:rPr>
+              <a:t>Pmax &lt; P*  → bindend</a:t>
+            </a:r>
+            <a:endParaRPr lang="en-US" sz="1300" dirty="0"/>
+          </a:p>
+          <a:p>
+            <a:pPr algn="l" marL="342900" indent="-342900">
+              <a:lnSpc>
+                <a:spcPct val="120000"/>
+              </a:lnSpc>
+              <a:buSzPct val="100000"/>
+              <a:buChar char="■"/>
+            </a:pPr>
+            <a:r>
+              <a:rPr lang="en-US" sz="1300" dirty="0">
+                <a:solidFill>
+                  <a:srgbClr val="2D3748"/>
+                </a:solidFill>
+                <a:latin typeface="Arial" pitchFamily="34" charset="0"/>
+                <a:ea typeface="Arial" pitchFamily="34" charset="-122"/>
+                <a:cs typeface="Arial" pitchFamily="34" charset="-120"/>
+              </a:rPr>
+              <a:t>Prijs mag niet boven Pmax</a:t>
+            </a:r>
+            <a:endParaRPr lang="en-US" sz="1300" dirty="0"/>
+          </a:p>
+          <a:p>
+            <a:pPr algn="l" marL="342900" indent="-342900">
+              <a:lnSpc>
+                <a:spcPct val="120000"/>
+              </a:lnSpc>
+              <a:buSzPct val="100000"/>
+              <a:buChar char="■"/>
+            </a:pPr>
+            <a:r>
+              <a:rPr lang="en-US" sz="1300" b="1" dirty="0">
+                <a:solidFill>
+                  <a:srgbClr val="922B21"/>
+                </a:solidFill>
+                <a:latin typeface="Arial" pitchFamily="34" charset="0"/>
+                <a:ea typeface="Arial" pitchFamily="34" charset="-122"/>
+                <a:cs typeface="Arial" pitchFamily="34" charset="-120"/>
+              </a:rPr>
+              <a:t>Gevolg: vraagoverschot (tekort)</a:t>
+            </a:r>
+            <a:endParaRPr lang="en-US" sz="1300" dirty="0"/>
+          </a:p>
           <a:p>
             <a:pPr algn="l" indent="0" marL="0">
               <a:lnSpc>
-                <a:spcPct val="115000"/>
+                <a:spcPct val="120000"/>
               </a:lnSpc>
               <a:buNone/>
             </a:pPr>
             <a:r>
-              <a:rPr lang="en-US" sz="1400" dirty="0">
-                <a:solidFill>
-                  <a:srgbClr val="2D3748"/>
-                </a:solidFill>
-                <a:latin typeface="Arial" pitchFamily="34" charset="0"/>
-                <a:ea typeface="Arial" pitchFamily="34" charset="-122"/>
-                <a:cs typeface="Arial" pitchFamily="34" charset="-120"/>
-              </a:rPr>
-              <a:t>Werknemers die werk hebben, verdienen meer.</a:t>
-            </a:r>
-            <a:endParaRPr lang="en-US" sz="1400" dirty="0"/>
-          </a:p>
-        </p:txBody>
-      </p:sp>
-      <p:sp>
-        <p:nvSpPr>
-          <p:cNvPr id="10" name="Shape 8"/>
-          <p:cNvSpPr/>
-          <p:nvPr/>
-        </p:nvSpPr>
-        <p:spPr>
-          <a:xfrm>
-            <a:off x="4754880" y="1920240"/>
-            <a:ext cx="3931920" cy="1828800"/>
+              <a:rPr lang="en-US" sz="1200" i="1" dirty="0">
+                <a:solidFill>
+                  <a:srgbClr val="718096"/>
+                </a:solidFill>
+                <a:latin typeface="Arial" pitchFamily="34" charset="0"/>
+                <a:ea typeface="Arial" pitchFamily="34" charset="-122"/>
+                <a:cs typeface="Arial" pitchFamily="34" charset="-120"/>
+              </a:rPr>
+              <a:t>→ wachtlijsten, zwarte markt</a:t>
+            </a:r>
+            <a:endParaRPr lang="en-US" sz="1300" dirty="0"/>
+          </a:p>
+        </p:txBody>
+      </p:sp>
+      <p:sp>
+        <p:nvSpPr>
+          <p:cNvPr id="7" name="Shape 5"/>
+          <p:cNvSpPr/>
+          <p:nvPr/>
+        </p:nvSpPr>
+        <p:spPr>
+          <a:xfrm>
+            <a:off x="4754880" y="960120"/>
+            <a:ext cx="3931920" cy="3566160"/>
           </a:xfrm>
           <a:prstGeom prst="rect">
             <a:avLst>
-              <a:gd name="adj" fmla="val 2500"/>
+              <a:gd name="adj" fmla="val 1282"/>
             </a:avLst>
           </a:prstGeom>
           <a:solidFill>
@@ -4696,21 +7526,17 @@
             </a:outerShdw>
           </a:effectLst>
         </p:spPr>
-        <p:txBody>
-          <a:bodyPr/>
-          <a:p/>
-        </p:txBody>
-      </p:sp>
-      <p:sp>
-        <p:nvSpPr>
-          <p:cNvPr id="11" name="Shape 9"/>
-          <p:cNvSpPr/>
-          <p:nvPr/>
-        </p:nvSpPr>
-        <p:spPr>
-          <a:xfrm>
-            <a:off x="4754880" y="1920240"/>
-            <a:ext cx="54864" cy="1828800"/>
+      </p:sp>
+      <p:sp>
+        <p:nvSpPr>
+          <p:cNvPr id="8" name="Shape 6"/>
+          <p:cNvSpPr/>
+          <p:nvPr/>
+        </p:nvSpPr>
+        <p:spPr>
+          <a:xfrm>
+            <a:off x="4754880" y="960120"/>
+            <a:ext cx="54864" cy="3566160"/>
           </a:xfrm>
           <a:prstGeom prst="rect">
             <a:avLst/>
@@ -4720,20 +7546,16 @@
           </a:solidFill>
           <a:ln/>
         </p:spPr>
-        <p:txBody>
-          <a:bodyPr/>
-          <a:p/>
-        </p:txBody>
-      </p:sp>
-      <p:sp>
-        <p:nvSpPr>
-          <p:cNvPr id="12" name="Text 10"/>
-          <p:cNvSpPr/>
-          <p:nvPr/>
-        </p:nvSpPr>
-        <p:spPr>
-          <a:xfrm>
-            <a:off x="4937760" y="2057400"/>
+      </p:sp>
+      <p:sp>
+        <p:nvSpPr>
+          <p:cNvPr id="9" name="Text 7"/>
+          <p:cNvSpPr/>
+          <p:nvPr/>
+        </p:nvSpPr>
+        <p:spPr>
+          <a:xfrm>
+            <a:off x="4937760" y="1069848"/>
             <a:ext cx="3611880" cy="365760"/>
           </a:xfrm>
           <a:prstGeom prst="rect">
@@ -4743,37 +7565,37 @@
           <a:ln/>
         </p:spPr>
         <p:txBody>
-          <a:bodyPr wrap="square" rtlCol="0" anchor="t"/>
+          <a:bodyPr wrap="square" lIns="0" tIns="0" rIns="0" bIns="0" rtlCol="0" anchor="t"/>
           <a:lstStyle/>
           <a:p>
             <a:pPr indent="0" marL="0">
               <a:buNone/>
             </a:pPr>
             <a:r>
-              <a:rPr lang="en-US" sz="2000" b="1" dirty="0">
-                <a:solidFill>
-                  <a:srgbClr val="D9534F"/>
-                </a:solidFill>
-                <a:latin typeface="Arial" pitchFamily="34" charset="0"/>
-                <a:ea typeface="Arial" pitchFamily="34" charset="-122"/>
-                <a:cs typeface="Arial" pitchFamily="34" charset="-120"/>
-              </a:rPr>
-              <a:t>Nadeel</a:t>
-            </a:r>
-            <a:endParaRPr lang="en-US" sz="2000" dirty="0"/>
-          </a:p>
-        </p:txBody>
-      </p:sp>
-      <p:sp>
-        <p:nvSpPr>
-          <p:cNvPr id="13" name="Text 11"/>
-          <p:cNvSpPr/>
-          <p:nvPr/>
-        </p:nvSpPr>
-        <p:spPr>
-          <a:xfrm>
-            <a:off x="4937760" y="2468880"/>
-            <a:ext cx="3611880" cy="1143000"/>
+              <a:rPr lang="en-US" sz="1800" b="1" dirty="0">
+                <a:solidFill>
+                  <a:srgbClr val="922B21"/>
+                </a:solidFill>
+                <a:latin typeface="Arial" pitchFamily="34" charset="0"/>
+                <a:ea typeface="Arial" pitchFamily="34" charset="-122"/>
+                <a:cs typeface="Arial" pitchFamily="34" charset="-120"/>
+              </a:rPr>
+              <a:t>Voorbeeld: huurplafond</a:t>
+            </a:r>
+            <a:endParaRPr lang="en-US" sz="1800" dirty="0"/>
+          </a:p>
+        </p:txBody>
+      </p:sp>
+      <p:sp>
+        <p:nvSpPr>
+          <p:cNvPr id="10" name="Text 8"/>
+          <p:cNvSpPr/>
+          <p:nvPr/>
+        </p:nvSpPr>
+        <p:spPr>
+          <a:xfrm>
+            <a:off x="4937760" y="1463040"/>
+            <a:ext cx="3611880" cy="2926080"/>
           </a:xfrm>
           <a:prstGeom prst="rect">
             <a:avLst/>
@@ -4782,17 +7604,17 @@
           <a:ln/>
         </p:spPr>
         <p:txBody>
-          <a:bodyPr wrap="square" rtlCol="0" anchor="t"/>
+          <a:bodyPr wrap="square" lIns="0" tIns="0" rIns="0" bIns="0" rtlCol="0" anchor="t"/>
           <a:lstStyle/>
           <a:p>
             <a:pPr algn="l" indent="0" marL="0">
               <a:lnSpc>
-                <a:spcPct val="115000"/>
+                <a:spcPct val="120000"/>
               </a:lnSpc>
               <a:buNone/>
             </a:pPr>
             <a:r>
-              <a:rPr lang="en-US" sz="1400" dirty="0">
+              <a:rPr lang="en-US" sz="1300" dirty="0">
                 <a:solidFill>
                   <a:srgbClr val="2D3748"/>
                 </a:solidFill>
@@ -4800,9 +7622,49 @@
                 <a:ea typeface="Arial" pitchFamily="34" charset="-122"/>
                 <a:cs typeface="Arial" pitchFamily="34" charset="-120"/>
               </a:rPr>
-              <a:t>Meer werkloosheid: aanbod arbeid &gt; vraag arbeid.</a:t>
-            </a:r>
-            <a:endParaRPr lang="en-US" sz="1400" dirty="0"/>
+              <a:t>De overheid beschermt huurders met een maximumhuur onder het evenwicht.</a:t>
+            </a:r>
+            <a:endParaRPr lang="en-US" sz="1300" dirty="0"/>
+          </a:p>
+          <a:p>
+            <a:pPr algn="l" indent="0" marL="0">
+              <a:lnSpc>
+                <a:spcPct val="120000"/>
+              </a:lnSpc>
+              <a:buNone/>
+            </a:pPr>
+            <a:r>
+              <a:rPr lang="en-US" sz="1300" dirty="0">
+                <a:solidFill>
+                  <a:srgbClr val="2D3748"/>
+                </a:solidFill>
+                <a:latin typeface="Arial" pitchFamily="34" charset="0"/>
+                <a:ea typeface="Arial" pitchFamily="34" charset="-122"/>
+                <a:cs typeface="Arial" pitchFamily="34" charset="-120"/>
+              </a:rPr>
+              <a:t>Gevolg: meer vraag dan aanbod → woningtekort.</a:t>
+            </a:r>
+            <a:endParaRPr lang="en-US" sz="1300" dirty="0"/>
+          </a:p>
+          <a:p>
+            <a:pPr algn="l" indent="0" marL="0">
+              <a:lnSpc>
+                <a:spcPct val="120000"/>
+              </a:lnSpc>
+              <a:buNone/>
+            </a:pPr>
+            <a:r>
+              <a:rPr lang="en-US" sz="1300" dirty="0">
+                <a:solidFill>
+                  <a:srgbClr val="2D3748"/>
+                </a:solidFill>
+                <a:latin typeface="Arial" pitchFamily="34" charset="0"/>
+                <a:ea typeface="Arial" pitchFamily="34" charset="-122"/>
+                <a:cs typeface="Arial" pitchFamily="34" charset="-120"/>
+              </a:rPr>
+              <a:t>Lange wachtlijsten en ongecontroleerde doorverhuur.</a:t>
+            </a:r>
+            <a:endParaRPr lang="en-US" sz="1300" dirty="0"/>
           </a:p>
         </p:txBody>
       </p:sp>
@@ -4864,524 +7726,91 @@
                 <a:ea typeface="Arial" pitchFamily="34" charset="-122"/>
                 <a:cs typeface="Arial" pitchFamily="34" charset="-120"/>
               </a:rPr>
-              <a:t>Effect van een accijns</a:t>
+              <a:t>Maximumprijs in de grafiek</a:t>
             </a:r>
             <a:endParaRPr lang="en-US" sz="2400" dirty="0"/>
           </a:p>
         </p:txBody>
       </p:sp>
-      <p:sp>
-        <p:nvSpPr>
-          <p:cNvPr id="3" name="Shape 1"/>
-          <p:cNvSpPr/>
-          <p:nvPr/>
-        </p:nvSpPr>
-        <p:spPr>
-          <a:xfrm>
-            <a:off x="502920" y="1005840"/>
-            <a:ext cx="3840480" cy="457200"/>
-          </a:xfrm>
-          <a:prstGeom prst="rect">
-            <a:avLst>
-              <a:gd name="adj" fmla="val 10000"/>
-            </a:avLst>
+      <p:pic>
+        <p:nvPicPr>
+          <p:cNvPr id="3" name="Image 0" descr="preencoded.png">    </p:cNvPr>
+          <p:cNvPicPr>
+            <a:picLocks noChangeAspect="1"/>
+          </p:cNvPicPr>
+          <p:nvPr/>
+        </p:nvPicPr>
+        <p:blipFill>
+          <a:blip r:embed="rId1"/>
+          <a:stretch>
+            <a:fillRect/>
+          </a:stretch>
+        </p:blipFill>
+        <p:spPr>
+          <a:xfrm>
+            <a:off x="914400" y="749808"/>
+            <a:ext cx="7315200" cy="3657600"/>
+          </a:xfrm>
+          <a:prstGeom prst="rect">
+            <a:avLst/>
+          </a:prstGeom>
+        </p:spPr>
+      </p:pic>
+      <p:sp>
+        <p:nvSpPr>
+          <p:cNvPr id="4" name="Shape 1"/>
+          <p:cNvSpPr/>
+          <p:nvPr/>
+        </p:nvSpPr>
+        <p:spPr>
+          <a:xfrm>
+            <a:off x="457200" y="4480560"/>
+            <a:ext cx="8229600" cy="566928"/>
+          </a:xfrm>
+          <a:prstGeom prst="rect">
+            <a:avLst/>
           </a:prstGeom>
           <a:solidFill>
-            <a:srgbClr val="F9F6F1"/>
+            <a:srgbClr val="F7F8FA"/>
           </a:solidFill>
-          <a:ln w="12700">
+          <a:ln w="6350">
             <a:solidFill>
-              <a:srgbClr val="1A5276"/>
+              <a:srgbClr val="CBD5E0"/>
             </a:solidFill>
             <a:prstDash val="solid"/>
           </a:ln>
-          <a:effectLst>
-            <a:outerShdw sx="100000" sy="100000" kx="0" ky="0" algn="bl" rotWithShape="0" blurRad="76200" dist="25400" dir="8100000">
-              <a:srgbClr val="000000">
-                <a:alpha val="10000"/>
-              </a:srgbClr>
-            </a:outerShdw>
-          </a:effectLst>
-        </p:spPr>
-        <p:txBody>
-          <a:bodyPr/>
-          <a:p/>
-        </p:txBody>
-      </p:sp>
-      <p:sp>
-        <p:nvSpPr>
-          <p:cNvPr id="4" name="Text 2"/>
-          <p:cNvSpPr/>
-          <p:nvPr/>
-        </p:nvSpPr>
-        <p:spPr>
-          <a:xfrm>
-            <a:off x="502920" y="1005840"/>
-            <a:ext cx="3840480" cy="457200"/>
-          </a:xfrm>
-          <a:prstGeom prst="rect">
-            <a:avLst/>
-          </a:prstGeom>
-          <a:noFill/>
-          <a:ln/>
-        </p:spPr>
-        <p:txBody>
-          <a:bodyPr wrap="square" rtlCol="0" anchor="ctr"/>
-          <a:lstStyle/>
-          <a:p>
-            <a:pPr algn="ctr" indent="0" marL="0">
-              <a:buNone/>
-            </a:pPr>
-            <a:r>
-              <a:rPr lang="en-US" sz="1400" b="1" dirty="0">
-                <a:solidFill>
-                  <a:srgbClr val="2D3748"/>
-                </a:solidFill>
-                <a:latin typeface="Arial" pitchFamily="34" charset="0"/>
-                <a:ea typeface="Arial" pitchFamily="34" charset="-122"/>
-                <a:cs typeface="Arial" pitchFamily="34" charset="-120"/>
-              </a:rPr>
-              <a:t>Overheid stelt een accijns in</a:t>
-            </a:r>
-            <a:endParaRPr lang="en-US" sz="1400" dirty="0"/>
-          </a:p>
-        </p:txBody>
-      </p:sp>
-      <p:sp>
-        <p:nvSpPr>
-          <p:cNvPr id="5" name="Text 3"/>
-          <p:cNvSpPr/>
-          <p:nvPr/>
-        </p:nvSpPr>
-        <p:spPr>
-          <a:xfrm>
-            <a:off x="502920" y="1463040"/>
-            <a:ext cx="3840480" cy="164592"/>
-          </a:xfrm>
-          <a:prstGeom prst="rect">
-            <a:avLst/>
-          </a:prstGeom>
-          <a:noFill/>
-          <a:ln/>
-        </p:spPr>
-        <p:txBody>
-          <a:bodyPr wrap="square" rtlCol="0" anchor="ctr"/>
-          <a:lstStyle/>
-          <a:p>
-            <a:pPr algn="ctr" indent="0" marL="0">
-              <a:buNone/>
-            </a:pPr>
-            <a:r>
-              <a:rPr lang="en-US" sz="1400" b="1" dirty="0">
-                <a:solidFill>
-                  <a:srgbClr val="1A5276"/>
-                </a:solidFill>
-                <a:latin typeface="Arial" pitchFamily="34" charset="0"/>
-                <a:ea typeface="Arial" pitchFamily="34" charset="-122"/>
-                <a:cs typeface="Arial" pitchFamily="34" charset="-120"/>
-              </a:rPr>
-              <a:t>↓</a:t>
-            </a:r>
-            <a:endParaRPr lang="en-US" sz="1400" dirty="0"/>
-          </a:p>
-        </p:txBody>
-      </p:sp>
-      <p:sp>
-        <p:nvSpPr>
-          <p:cNvPr id="6" name="Shape 4"/>
-          <p:cNvSpPr/>
-          <p:nvPr/>
-        </p:nvSpPr>
-        <p:spPr>
-          <a:xfrm>
-            <a:off x="502920" y="1627632"/>
-            <a:ext cx="3840480" cy="457200"/>
-          </a:xfrm>
-          <a:prstGeom prst="rect">
-            <a:avLst>
-              <a:gd name="adj" fmla="val 10000"/>
-            </a:avLst>
-          </a:prstGeom>
-          <a:solidFill>
-            <a:srgbClr val="F9F6F1"/>
-          </a:solidFill>
-          <a:ln w="12700">
-            <a:solidFill>
-              <a:srgbClr val="1A5276"/>
-            </a:solidFill>
-            <a:prstDash val="solid"/>
-          </a:ln>
-          <a:effectLst>
-            <a:outerShdw sx="100000" sy="100000" kx="0" ky="0" algn="bl" rotWithShape="0" blurRad="76200" dist="25400" dir="8100000">
-              <a:srgbClr val="000000">
-                <a:alpha val="10000"/>
-              </a:srgbClr>
-            </a:outerShdw>
-          </a:effectLst>
-        </p:spPr>
-        <p:txBody>
-          <a:bodyPr/>
-          <a:p/>
-        </p:txBody>
-      </p:sp>
-      <p:sp>
-        <p:nvSpPr>
-          <p:cNvPr id="7" name="Text 5"/>
-          <p:cNvSpPr/>
-          <p:nvPr/>
-        </p:nvSpPr>
-        <p:spPr>
-          <a:xfrm>
-            <a:off x="502920" y="1627632"/>
-            <a:ext cx="3840480" cy="457200"/>
-          </a:xfrm>
-          <a:prstGeom prst="rect">
-            <a:avLst/>
-          </a:prstGeom>
-          <a:noFill/>
-          <a:ln/>
-        </p:spPr>
-        <p:txBody>
-          <a:bodyPr wrap="square" rtlCol="0" anchor="ctr"/>
-          <a:lstStyle/>
-          <a:p>
-            <a:pPr algn="ctr" indent="0" marL="0">
-              <a:buNone/>
-            </a:pPr>
-            <a:r>
-              <a:rPr lang="en-US" sz="1400" b="1" dirty="0">
-                <a:solidFill>
-                  <a:srgbClr val="2D3748"/>
-                </a:solidFill>
-                <a:latin typeface="Arial" pitchFamily="34" charset="0"/>
-                <a:ea typeface="Arial" pitchFamily="34" charset="-122"/>
-                <a:cs typeface="Arial" pitchFamily="34" charset="-120"/>
-              </a:rPr>
-              <a:t>Aanbodlijn verschuift omhoog</a:t>
-            </a:r>
-            <a:endParaRPr lang="en-US" sz="1400" dirty="0"/>
-          </a:p>
-        </p:txBody>
-      </p:sp>
-      <p:sp>
-        <p:nvSpPr>
-          <p:cNvPr id="8" name="Text 6"/>
-          <p:cNvSpPr/>
-          <p:nvPr/>
-        </p:nvSpPr>
-        <p:spPr>
-          <a:xfrm>
-            <a:off x="502920" y="2084832"/>
-            <a:ext cx="3840480" cy="164592"/>
-          </a:xfrm>
-          <a:prstGeom prst="rect">
-            <a:avLst/>
-          </a:prstGeom>
-          <a:noFill/>
-          <a:ln/>
-        </p:spPr>
-        <p:txBody>
-          <a:bodyPr wrap="square" rtlCol="0" anchor="ctr"/>
-          <a:lstStyle/>
-          <a:p>
-            <a:pPr algn="ctr" indent="0" marL="0">
-              <a:buNone/>
-            </a:pPr>
-            <a:r>
-              <a:rPr lang="en-US" sz="1400" b="1" dirty="0">
-                <a:solidFill>
-                  <a:srgbClr val="1A5276"/>
-                </a:solidFill>
-                <a:latin typeface="Arial" pitchFamily="34" charset="0"/>
-                <a:ea typeface="Arial" pitchFamily="34" charset="-122"/>
-                <a:cs typeface="Arial" pitchFamily="34" charset="-120"/>
-              </a:rPr>
-              <a:t>↓</a:t>
-            </a:r>
-            <a:endParaRPr lang="en-US" sz="1400" dirty="0"/>
-          </a:p>
-        </p:txBody>
-      </p:sp>
-      <p:sp>
-        <p:nvSpPr>
-          <p:cNvPr id="9" name="Shape 7"/>
-          <p:cNvSpPr/>
-          <p:nvPr/>
-        </p:nvSpPr>
-        <p:spPr>
-          <a:xfrm>
-            <a:off x="502920" y="2249424"/>
-            <a:ext cx="3840480" cy="457200"/>
-          </a:xfrm>
-          <a:prstGeom prst="rect">
-            <a:avLst>
-              <a:gd name="adj" fmla="val 10000"/>
-            </a:avLst>
-          </a:prstGeom>
-          <a:solidFill>
-            <a:srgbClr val="F9F6F1"/>
-          </a:solidFill>
-          <a:ln w="12700">
-            <a:solidFill>
-              <a:srgbClr val="1A5276"/>
-            </a:solidFill>
-            <a:prstDash val="solid"/>
-          </a:ln>
-          <a:effectLst>
-            <a:outerShdw sx="100000" sy="100000" kx="0" ky="0" algn="bl" rotWithShape="0" blurRad="76200" dist="25400" dir="8100000">
-              <a:srgbClr val="000000">
-                <a:alpha val="10000"/>
-              </a:srgbClr>
-            </a:outerShdw>
-          </a:effectLst>
-        </p:spPr>
-        <p:txBody>
-          <a:bodyPr/>
-          <a:p/>
-        </p:txBody>
-      </p:sp>
-      <p:sp>
-        <p:nvSpPr>
-          <p:cNvPr id="10" name="Text 8"/>
-          <p:cNvSpPr/>
-          <p:nvPr/>
-        </p:nvSpPr>
-        <p:spPr>
-          <a:xfrm>
-            <a:off x="502920" y="2249424"/>
-            <a:ext cx="3840480" cy="457200"/>
-          </a:xfrm>
-          <a:prstGeom prst="rect">
-            <a:avLst/>
-          </a:prstGeom>
-          <a:noFill/>
-          <a:ln/>
-        </p:spPr>
-        <p:txBody>
-          <a:bodyPr wrap="square" rtlCol="0" anchor="ctr"/>
-          <a:lstStyle/>
-          <a:p>
-            <a:pPr algn="ctr" indent="0" marL="0">
-              <a:buNone/>
-            </a:pPr>
-            <a:r>
-              <a:rPr lang="en-US" sz="1400" b="1" dirty="0">
-                <a:solidFill>
-                  <a:srgbClr val="2D3748"/>
-                </a:solidFill>
-                <a:latin typeface="Arial" pitchFamily="34" charset="0"/>
-                <a:ea typeface="Arial" pitchFamily="34" charset="-122"/>
-                <a:cs typeface="Arial" pitchFamily="34" charset="-120"/>
-              </a:rPr>
-              <a:t>De evenwichtsprijs stijgt</a:t>
-            </a:r>
-            <a:endParaRPr lang="en-US" sz="1400" dirty="0"/>
-          </a:p>
-        </p:txBody>
-      </p:sp>
-      <p:sp>
-        <p:nvSpPr>
-          <p:cNvPr id="11" name="Text 9"/>
-          <p:cNvSpPr/>
-          <p:nvPr/>
-        </p:nvSpPr>
-        <p:spPr>
-          <a:xfrm>
-            <a:off x="502920" y="2706624"/>
-            <a:ext cx="3840480" cy="164592"/>
-          </a:xfrm>
-          <a:prstGeom prst="rect">
-            <a:avLst/>
-          </a:prstGeom>
-          <a:noFill/>
-          <a:ln/>
-        </p:spPr>
-        <p:txBody>
-          <a:bodyPr wrap="square" rtlCol="0" anchor="ctr"/>
-          <a:lstStyle/>
-          <a:p>
-            <a:pPr algn="ctr" indent="0" marL="0">
-              <a:buNone/>
-            </a:pPr>
-            <a:r>
-              <a:rPr lang="en-US" sz="1400" b="1" dirty="0">
-                <a:solidFill>
-                  <a:srgbClr val="1A5276"/>
-                </a:solidFill>
-                <a:latin typeface="Arial" pitchFamily="34" charset="0"/>
-                <a:ea typeface="Arial" pitchFamily="34" charset="-122"/>
-                <a:cs typeface="Arial" pitchFamily="34" charset="-120"/>
-              </a:rPr>
-              <a:t>↓</a:t>
-            </a:r>
-            <a:endParaRPr lang="en-US" sz="1400" dirty="0"/>
-          </a:p>
-        </p:txBody>
-      </p:sp>
-      <p:sp>
-        <p:nvSpPr>
-          <p:cNvPr id="12" name="Shape 10"/>
-          <p:cNvSpPr/>
-          <p:nvPr/>
-        </p:nvSpPr>
-        <p:spPr>
-          <a:xfrm>
-            <a:off x="502920" y="2871216"/>
-            <a:ext cx="3840480" cy="457200"/>
-          </a:xfrm>
-          <a:prstGeom prst="rect">
-            <a:avLst>
-              <a:gd name="adj" fmla="val 10000"/>
-            </a:avLst>
-          </a:prstGeom>
-          <a:solidFill>
-            <a:srgbClr val="F9F6F1"/>
-          </a:solidFill>
-          <a:ln w="12700">
-            <a:solidFill>
-              <a:srgbClr val="1A5276"/>
-            </a:solidFill>
-            <a:prstDash val="solid"/>
-          </a:ln>
-          <a:effectLst>
-            <a:outerShdw sx="100000" sy="100000" kx="0" ky="0" algn="bl" rotWithShape="0" blurRad="76200" dist="25400" dir="8100000">
-              <a:srgbClr val="000000">
-                <a:alpha val="10000"/>
-              </a:srgbClr>
-            </a:outerShdw>
-          </a:effectLst>
-        </p:spPr>
-        <p:txBody>
-          <a:bodyPr/>
-          <a:p/>
-        </p:txBody>
-      </p:sp>
-      <p:sp>
-        <p:nvSpPr>
-          <p:cNvPr id="13" name="Text 11"/>
-          <p:cNvSpPr/>
-          <p:nvPr/>
-        </p:nvSpPr>
-        <p:spPr>
-          <a:xfrm>
-            <a:off x="502920" y="2871216"/>
-            <a:ext cx="3840480" cy="457200"/>
-          </a:xfrm>
-          <a:prstGeom prst="rect">
-            <a:avLst/>
-          </a:prstGeom>
-          <a:noFill/>
-          <a:ln/>
-        </p:spPr>
-        <p:txBody>
-          <a:bodyPr wrap="square" rtlCol="0" anchor="ctr"/>
-          <a:lstStyle/>
-          <a:p>
-            <a:pPr algn="ctr" indent="0" marL="0">
-              <a:buNone/>
-            </a:pPr>
-            <a:r>
-              <a:rPr lang="en-US" sz="1400" b="1" dirty="0">
-                <a:solidFill>
-                  <a:srgbClr val="2D3748"/>
-                </a:solidFill>
-                <a:latin typeface="Arial" pitchFamily="34" charset="0"/>
-                <a:ea typeface="Arial" pitchFamily="34" charset="-122"/>
-                <a:cs typeface="Arial" pitchFamily="34" charset="-120"/>
-              </a:rPr>
-              <a:t>Consumenten kopen minder</a:t>
-            </a:r>
-            <a:endParaRPr lang="en-US" sz="1400" dirty="0"/>
-          </a:p>
-        </p:txBody>
-      </p:sp>
-      <p:sp>
-        <p:nvSpPr>
-          <p:cNvPr id="14" name="Text 12"/>
-          <p:cNvSpPr/>
-          <p:nvPr/>
-        </p:nvSpPr>
-        <p:spPr>
-          <a:xfrm>
-            <a:off x="502920" y="3328416"/>
-            <a:ext cx="3840480" cy="164592"/>
-          </a:xfrm>
-          <a:prstGeom prst="rect">
-            <a:avLst/>
-          </a:prstGeom>
-          <a:noFill/>
-          <a:ln/>
-        </p:spPr>
-        <p:txBody>
-          <a:bodyPr wrap="square" rtlCol="0" anchor="ctr"/>
-          <a:lstStyle/>
-          <a:p>
-            <a:pPr algn="ctr" indent="0" marL="0">
-              <a:buNone/>
-            </a:pPr>
-            <a:r>
-              <a:rPr lang="en-US" sz="1400" b="1" dirty="0">
-                <a:solidFill>
-                  <a:srgbClr val="1A5276"/>
-                </a:solidFill>
-                <a:latin typeface="Arial" pitchFamily="34" charset="0"/>
-                <a:ea typeface="Arial" pitchFamily="34" charset="-122"/>
-                <a:cs typeface="Arial" pitchFamily="34" charset="-120"/>
-              </a:rPr>
-              <a:t>↓</a:t>
-            </a:r>
-            <a:endParaRPr lang="en-US" sz="1400" dirty="0"/>
-          </a:p>
-        </p:txBody>
-      </p:sp>
-      <p:sp>
-        <p:nvSpPr>
-          <p:cNvPr id="15" name="Shape 13"/>
-          <p:cNvSpPr/>
-          <p:nvPr/>
-        </p:nvSpPr>
-        <p:spPr>
-          <a:xfrm>
-            <a:off x="502920" y="3493008"/>
-            <a:ext cx="3840480" cy="457200"/>
-          </a:xfrm>
-          <a:prstGeom prst="rect">
-            <a:avLst>
-              <a:gd name="adj" fmla="val 10000"/>
-            </a:avLst>
+        </p:spPr>
+      </p:sp>
+      <p:sp>
+        <p:nvSpPr>
+          <p:cNvPr id="5" name="Shape 2"/>
+          <p:cNvSpPr/>
+          <p:nvPr/>
+        </p:nvSpPr>
+        <p:spPr>
+          <a:xfrm>
+            <a:off x="566928" y="4636008"/>
+            <a:ext cx="201168" cy="201168"/>
+          </a:xfrm>
+          <a:prstGeom prst="rect">
+            <a:avLst/>
           </a:prstGeom>
           <a:solidFill>
             <a:srgbClr val="1A5276"/>
           </a:solidFill>
-          <a:ln w="12700">
-            <a:solidFill>
-              <a:srgbClr val="1A5276"/>
-            </a:solidFill>
-            <a:prstDash val="solid"/>
-          </a:ln>
-          <a:effectLst>
-            <a:outerShdw sx="100000" sy="100000" kx="0" ky="0" algn="bl" rotWithShape="0" blurRad="76200" dist="25400" dir="8100000">
-              <a:srgbClr val="000000">
-                <a:alpha val="10000"/>
-              </a:srgbClr>
-            </a:outerShdw>
-          </a:effectLst>
-        </p:spPr>
-        <p:txBody>
-          <a:bodyPr/>
-          <a:p/>
-        </p:txBody>
-      </p:sp>
-      <p:sp>
-        <p:nvSpPr>
-          <p:cNvPr id="16" name="Text 14"/>
-          <p:cNvSpPr/>
-          <p:nvPr/>
-        </p:nvSpPr>
-        <p:spPr>
-          <a:xfrm>
-            <a:off x="502920" y="3493008"/>
-            <a:ext cx="3840480" cy="457200"/>
+          <a:ln/>
+        </p:spPr>
+      </p:sp>
+      <p:sp>
+        <p:nvSpPr>
+          <p:cNvPr id="6" name="Text 3"/>
+          <p:cNvSpPr/>
+          <p:nvPr/>
+        </p:nvSpPr>
+        <p:spPr>
+          <a:xfrm>
+            <a:off x="841248" y="4553712"/>
+            <a:ext cx="1600200" cy="420624"/>
           </a:xfrm>
           <a:prstGeom prst="rect">
             <a:avLst/>
@@ -5390,94 +7819,144 @@
           <a:ln/>
         </p:spPr>
         <p:txBody>
-          <a:bodyPr wrap="square" rtlCol="0" anchor="ctr"/>
-          <a:lstStyle/>
-          <a:p>
-            <a:pPr algn="ctr" indent="0" marL="0">
-              <a:buNone/>
-            </a:pPr>
-            <a:r>
-              <a:rPr lang="en-US" sz="1400" b="1" dirty="0">
-                <a:solidFill>
-                  <a:srgbClr val="FFFFFF"/>
-                </a:solidFill>
-                <a:latin typeface="Arial" pitchFamily="34" charset="0"/>
-                <a:ea typeface="Arial" pitchFamily="34" charset="-122"/>
-                <a:cs typeface="Arial" pitchFamily="34" charset="-120"/>
-              </a:rPr>
-              <a:t>Minder consumptie van het product</a:t>
-            </a:r>
-            <a:endParaRPr lang="en-US" sz="1400" dirty="0"/>
-          </a:p>
-        </p:txBody>
-      </p:sp>
-      <p:sp>
-        <p:nvSpPr>
-          <p:cNvPr id="17" name="Shape 15"/>
-          <p:cNvSpPr/>
-          <p:nvPr/>
-        </p:nvSpPr>
-        <p:spPr>
-          <a:xfrm>
-            <a:off x="4754880" y="1005840"/>
-            <a:ext cx="3931920" cy="2286000"/>
-          </a:xfrm>
-          <a:prstGeom prst="rect">
-            <a:avLst>
-              <a:gd name="adj" fmla="val 2000"/>
-            </a:avLst>
+          <a:bodyPr wrap="square" lIns="0" tIns="0" rIns="0" bIns="0" rtlCol="0" anchor="ctr"/>
+          <a:lstStyle/>
+          <a:p>
+            <a:pPr indent="0" marL="0">
+              <a:buNone/>
+            </a:pPr>
+            <a:r>
+              <a:rPr lang="en-US" sz="1100" b="1" dirty="0">
+                <a:solidFill>
+                  <a:srgbClr val="1A5276"/>
+                </a:solidFill>
+                <a:latin typeface="Arial" pitchFamily="34" charset="0"/>
+                <a:ea typeface="Arial" pitchFamily="34" charset="-122"/>
+                <a:cs typeface="Arial" pitchFamily="34" charset="-120"/>
+              </a:rPr>
+              <a:t>V</a:t>
+            </a:r>
+            <a:pPr indent="0" marL="0">
+              <a:buNone/>
+            </a:pPr>
+            <a:r>
+              <a:rPr lang="en-US" sz="1100" dirty="0">
+                <a:solidFill>
+                  <a:srgbClr val="2D3748"/>
+                </a:solidFill>
+                <a:latin typeface="Arial" pitchFamily="34" charset="0"/>
+                <a:ea typeface="Arial" pitchFamily="34" charset="-122"/>
+                <a:cs typeface="Arial" pitchFamily="34" charset="-120"/>
+              </a:rPr>
+              <a:t>  vraag</a:t>
+            </a:r>
+            <a:endParaRPr lang="en-US" sz="1100" dirty="0"/>
+          </a:p>
+        </p:txBody>
+      </p:sp>
+      <p:sp>
+        <p:nvSpPr>
+          <p:cNvPr id="7" name="Shape 4"/>
+          <p:cNvSpPr/>
+          <p:nvPr/>
+        </p:nvSpPr>
+        <p:spPr>
+          <a:xfrm>
+            <a:off x="2624328" y="4636008"/>
+            <a:ext cx="201168" cy="201168"/>
+          </a:xfrm>
+          <a:prstGeom prst="rect">
+            <a:avLst/>
           </a:prstGeom>
           <a:solidFill>
-            <a:srgbClr val="FEF5E7"/>
+            <a:srgbClr val="1E8449"/>
           </a:solidFill>
           <a:ln/>
-          <a:effectLst>
-            <a:outerShdw sx="100000" sy="100000" kx="0" ky="0" algn="bl" rotWithShape="0" blurRad="76200" dist="25400" dir="8100000">
-              <a:srgbClr val="000000">
-                <a:alpha val="10000"/>
-              </a:srgbClr>
-            </a:outerShdw>
-          </a:effectLst>
-        </p:spPr>
-        <p:txBody>
-          <a:bodyPr/>
-          <a:p/>
-        </p:txBody>
-      </p:sp>
-      <p:sp>
-        <p:nvSpPr>
-          <p:cNvPr id="18" name="Shape 16"/>
-          <p:cNvSpPr/>
-          <p:nvPr/>
-        </p:nvSpPr>
-        <p:spPr>
-          <a:xfrm>
-            <a:off x="4754880" y="1005840"/>
-            <a:ext cx="54864" cy="2286000"/>
+        </p:spPr>
+      </p:sp>
+      <p:sp>
+        <p:nvSpPr>
+          <p:cNvPr id="8" name="Text 5"/>
+          <p:cNvSpPr/>
+          <p:nvPr/>
+        </p:nvSpPr>
+        <p:spPr>
+          <a:xfrm>
+            <a:off x="2898648" y="4553712"/>
+            <a:ext cx="1600200" cy="420624"/>
+          </a:xfrm>
+          <a:prstGeom prst="rect">
+            <a:avLst/>
+          </a:prstGeom>
+          <a:noFill/>
+          <a:ln/>
+        </p:spPr>
+        <p:txBody>
+          <a:bodyPr wrap="square" lIns="0" tIns="0" rIns="0" bIns="0" rtlCol="0" anchor="ctr"/>
+          <a:lstStyle/>
+          <a:p>
+            <a:pPr indent="0" marL="0">
+              <a:buNone/>
+            </a:pPr>
+            <a:r>
+              <a:rPr lang="en-US" sz="1100" b="1" dirty="0">
+                <a:solidFill>
+                  <a:srgbClr val="1E8449"/>
+                </a:solidFill>
+                <a:latin typeface="Arial" pitchFamily="34" charset="0"/>
+                <a:ea typeface="Arial" pitchFamily="34" charset="-122"/>
+                <a:cs typeface="Arial" pitchFamily="34" charset="-120"/>
+              </a:rPr>
+              <a:t>A</a:t>
+            </a:r>
+            <a:pPr indent="0" marL="0">
+              <a:buNone/>
+            </a:pPr>
+            <a:r>
+              <a:rPr lang="en-US" sz="1100" dirty="0">
+                <a:solidFill>
+                  <a:srgbClr val="2D3748"/>
+                </a:solidFill>
+                <a:latin typeface="Arial" pitchFamily="34" charset="0"/>
+                <a:ea typeface="Arial" pitchFamily="34" charset="-122"/>
+                <a:cs typeface="Arial" pitchFamily="34" charset="-120"/>
+              </a:rPr>
+              <a:t>  aanbod</a:t>
+            </a:r>
+            <a:endParaRPr lang="en-US" sz="1100" dirty="0"/>
+          </a:p>
+        </p:txBody>
+      </p:sp>
+      <p:sp>
+        <p:nvSpPr>
+          <p:cNvPr id="9" name="Shape 6"/>
+          <p:cNvSpPr/>
+          <p:nvPr/>
+        </p:nvSpPr>
+        <p:spPr>
+          <a:xfrm>
+            <a:off x="4681728" y="4636008"/>
+            <a:ext cx="201168" cy="201168"/>
           </a:xfrm>
           <a:prstGeom prst="rect">
             <a:avLst/>
           </a:prstGeom>
           <a:solidFill>
-            <a:srgbClr val="E67E22"/>
+            <a:srgbClr val="1A5276"/>
           </a:solidFill>
           <a:ln/>
         </p:spPr>
-        <p:txBody>
-          <a:bodyPr/>
-          <a:p/>
-        </p:txBody>
-      </p:sp>
-      <p:sp>
-        <p:nvSpPr>
-          <p:cNvPr id="19" name="Text 17"/>
-          <p:cNvSpPr/>
-          <p:nvPr/>
-        </p:nvSpPr>
-        <p:spPr>
-          <a:xfrm>
-            <a:off x="4937760" y="1143000"/>
-            <a:ext cx="3611880" cy="365760"/>
+      </p:sp>
+      <p:sp>
+        <p:nvSpPr>
+          <p:cNvPr id="10" name="Text 7"/>
+          <p:cNvSpPr/>
+          <p:nvPr/>
+        </p:nvSpPr>
+        <p:spPr>
+          <a:xfrm>
+            <a:off x="4956048" y="4553712"/>
+            <a:ext cx="1600200" cy="420624"/>
           </a:xfrm>
           <a:prstGeom prst="rect">
             <a:avLst/>
@@ -5486,37 +7965,71 @@
           <a:ln/>
         </p:spPr>
         <p:txBody>
-          <a:bodyPr wrap="square" rtlCol="0" anchor="t"/>
+          <a:bodyPr wrap="square" lIns="0" tIns="0" rIns="0" bIns="0" rtlCol="0" anchor="ctr"/>
           <a:lstStyle/>
           <a:p>
             <a:pPr indent="0" marL="0">
               <a:buNone/>
             </a:pPr>
             <a:r>
-              <a:rPr lang="en-US" sz="2000" b="1" dirty="0">
-                <a:solidFill>
-                  <a:srgbClr val="E67E22"/>
-                </a:solidFill>
-                <a:latin typeface="Arial" pitchFamily="34" charset="0"/>
-                <a:ea typeface="Arial" pitchFamily="34" charset="-122"/>
-                <a:cs typeface="Arial" pitchFamily="34" charset="-120"/>
-              </a:rPr>
-              <a:t>Let op!</a:t>
-            </a:r>
-            <a:endParaRPr lang="en-US" sz="2000" dirty="0"/>
-          </a:p>
-        </p:txBody>
-      </p:sp>
-      <p:sp>
-        <p:nvSpPr>
-          <p:cNvPr id="20" name="Text 18"/>
-          <p:cNvSpPr/>
-          <p:nvPr/>
-        </p:nvSpPr>
-        <p:spPr>
-          <a:xfrm>
-            <a:off x="4937760" y="1554480"/>
-            <a:ext cx="3611880" cy="1600200"/>
+              <a:rPr lang="en-US" sz="1100" b="1" dirty="0">
+                <a:solidFill>
+                  <a:srgbClr val="1A5276"/>
+                </a:solidFill>
+                <a:latin typeface="Arial" pitchFamily="34" charset="0"/>
+                <a:ea typeface="Arial" pitchFamily="34" charset="-122"/>
+                <a:cs typeface="Arial" pitchFamily="34" charset="-120"/>
+              </a:rPr>
+              <a:t>Pmax</a:t>
+            </a:r>
+            <a:pPr indent="0" marL="0">
+              <a:buNone/>
+            </a:pPr>
+            <a:r>
+              <a:rPr lang="en-US" sz="1100" dirty="0">
+                <a:solidFill>
+                  <a:srgbClr val="2D3748"/>
+                </a:solidFill>
+                <a:latin typeface="Arial" pitchFamily="34" charset="0"/>
+                <a:ea typeface="Arial" pitchFamily="34" charset="-122"/>
+                <a:cs typeface="Arial" pitchFamily="34" charset="-120"/>
+              </a:rPr>
+              <a:t>  wettelijke bovengrens</a:t>
+            </a:r>
+            <a:endParaRPr lang="en-US" sz="1100" dirty="0"/>
+          </a:p>
+        </p:txBody>
+      </p:sp>
+      <p:sp>
+        <p:nvSpPr>
+          <p:cNvPr id="11" name="Shape 8"/>
+          <p:cNvSpPr/>
+          <p:nvPr/>
+        </p:nvSpPr>
+        <p:spPr>
+          <a:xfrm>
+            <a:off x="6739128" y="4636008"/>
+            <a:ext cx="201168" cy="201168"/>
+          </a:xfrm>
+          <a:prstGeom prst="rect">
+            <a:avLst/>
+          </a:prstGeom>
+          <a:solidFill>
+            <a:srgbClr val="D9534F"/>
+          </a:solidFill>
+          <a:ln/>
+        </p:spPr>
+      </p:sp>
+      <p:sp>
+        <p:nvSpPr>
+          <p:cNvPr id="12" name="Text 9"/>
+          <p:cNvSpPr/>
+          <p:nvPr/>
+        </p:nvSpPr>
+        <p:spPr>
+          <a:xfrm>
+            <a:off x="7013448" y="4553712"/>
+            <a:ext cx="1600200" cy="420624"/>
           </a:xfrm>
           <a:prstGeom prst="rect">
             <a:avLst/>
@@ -5525,17 +8038,28 @@
           <a:ln/>
         </p:spPr>
         <p:txBody>
-          <a:bodyPr wrap="square" rtlCol="0" anchor="t"/>
-          <a:lstStyle/>
-          <a:p>
-            <a:pPr algn="l" indent="0" marL="0">
-              <a:lnSpc>
-                <a:spcPct val="115000"/>
-              </a:lnSpc>
-              <a:buNone/>
-            </a:pPr>
-            <a:r>
-              <a:rPr lang="en-US" sz="1400" dirty="0">
+          <a:bodyPr wrap="square" lIns="0" tIns="0" rIns="0" bIns="0" rtlCol="0" anchor="ctr"/>
+          <a:lstStyle/>
+          <a:p>
+            <a:pPr indent="0" marL="0">
+              <a:buNone/>
+            </a:pPr>
+            <a:r>
+              <a:rPr lang="en-US" sz="1100" b="1" dirty="0">
+                <a:solidFill>
+                  <a:srgbClr val="D9534F"/>
+                </a:solidFill>
+                <a:latin typeface="Arial" pitchFamily="34" charset="0"/>
+                <a:ea typeface="Arial" pitchFamily="34" charset="-122"/>
+                <a:cs typeface="Arial" pitchFamily="34" charset="-120"/>
+              </a:rPr>
+              <a:t>■</a:t>
+            </a:r>
+            <a:pPr indent="0" marL="0">
+              <a:buNone/>
+            </a:pPr>
+            <a:r>
+              <a:rPr lang="en-US" sz="1100" dirty="0">
                 <a:solidFill>
                   <a:srgbClr val="2D3748"/>
                 </a:solidFill>
@@ -5543,27 +8067,9 @@
                 <a:ea typeface="Arial" pitchFamily="34" charset="-122"/>
                 <a:cs typeface="Arial" pitchFamily="34" charset="-120"/>
               </a:rPr>
-              <a:t>Prijs stijgt minder dan de accijns.
-</a:t>
-            </a:r>
-            <a:pPr algn="l" indent="0" marL="0">
-              <a:lnSpc>
-                <a:spcPct val="115000"/>
-              </a:lnSpc>
-              <a:buNone/>
-            </a:pPr>
-            <a:r>
-              <a:rPr lang="en-US" sz="1400" b="1" dirty="0">
-                <a:solidFill>
-                  <a:srgbClr val="2D3748"/>
-                </a:solidFill>
-                <a:latin typeface="Arial" pitchFamily="34" charset="0"/>
-                <a:ea typeface="Arial" pitchFamily="34" charset="-122"/>
-                <a:cs typeface="Arial" pitchFamily="34" charset="-120"/>
-              </a:rPr>
-              <a:t>De last wordt gedeeld tussen koper en verkoper.</a:t>
-            </a:r>
-            <a:endParaRPr lang="en-US" sz="1400" dirty="0"/>
+              <a:t>  vraagoverschot (tekort)</a:t>
+            </a:r>
+            <a:endParaRPr lang="en-US" sz="1100" dirty="0"/>
           </a:p>
         </p:txBody>
       </p:sp>
@@ -5625,7 +8131,7 @@
                 <a:ea typeface="Arial" pitchFamily="34" charset="-122"/>
                 <a:cs typeface="Arial" pitchFamily="34" charset="-120"/>
               </a:rPr>
-              <a:t>Effect van een subsidie</a:t>
+              <a:t>Wanneer is een prijsmaatregel bindend?</a:t>
             </a:r>
             <a:endParaRPr lang="en-US" sz="2400" dirty="0"/>
           </a:p>
@@ -5639,12 +8145,12 @@
         </p:nvSpPr>
         <p:spPr>
           <a:xfrm>
-            <a:off x="457200" y="1005840"/>
-            <a:ext cx="3931920" cy="3291840"/>
+            <a:off x="457200" y="960120"/>
+            <a:ext cx="3931920" cy="3566160"/>
           </a:xfrm>
           <a:prstGeom prst="rect">
             <a:avLst>
-              <a:gd name="adj" fmla="val 1389"/>
+              <a:gd name="adj" fmla="val 1282"/>
             </a:avLst>
           </a:prstGeom>
           <a:solidFill>
@@ -5659,10 +8165,6 @@
             </a:outerShdw>
           </a:effectLst>
         </p:spPr>
-        <p:txBody>
-          <a:bodyPr/>
-          <a:p/>
-        </p:txBody>
       </p:sp>
       <p:sp>
         <p:nvSpPr>
@@ -5672,21 +8174,17 @@
         </p:nvSpPr>
         <p:spPr>
           <a:xfrm>
-            <a:off x="457200" y="1005840"/>
-            <a:ext cx="54864" cy="3291840"/>
+            <a:off x="457200" y="960120"/>
+            <a:ext cx="54864" cy="3566160"/>
           </a:xfrm>
           <a:prstGeom prst="rect">
             <a:avLst/>
           </a:prstGeom>
           <a:solidFill>
-            <a:srgbClr val="1E8449"/>
+            <a:srgbClr val="186A3B"/>
           </a:solidFill>
           <a:ln/>
         </p:spPr>
-        <p:txBody>
-          <a:bodyPr/>
-          <a:p/>
-        </p:txBody>
       </p:sp>
       <p:sp>
         <p:nvSpPr>
@@ -5696,7 +8194,7 @@
         </p:nvSpPr>
         <p:spPr>
           <a:xfrm>
-            <a:off x="640080" y="1143000"/>
+            <a:off x="640080" y="1069848"/>
             <a:ext cx="3611880" cy="365760"/>
           </a:xfrm>
           <a:prstGeom prst="rect">
@@ -5706,24 +8204,24 @@
           <a:ln/>
         </p:spPr>
         <p:txBody>
-          <a:bodyPr wrap="square" rtlCol="0" anchor="t"/>
+          <a:bodyPr wrap="square" lIns="0" tIns="0" rIns="0" bIns="0" rtlCol="0" anchor="t"/>
           <a:lstStyle/>
           <a:p>
             <a:pPr indent="0" marL="0">
               <a:buNone/>
             </a:pPr>
             <a:r>
-              <a:rPr lang="en-US" sz="2000" b="1" dirty="0">
-                <a:solidFill>
-                  <a:srgbClr val="1E8449"/>
-                </a:solidFill>
-                <a:latin typeface="Arial" pitchFamily="34" charset="0"/>
-                <a:ea typeface="Arial" pitchFamily="34" charset="-122"/>
-                <a:cs typeface="Arial" pitchFamily="34" charset="-120"/>
-              </a:rPr>
-              <a:t>Hoe werkt een subsidie?</a:t>
-            </a:r>
-            <a:endParaRPr lang="en-US" sz="2000" dirty="0"/>
+              <a:rPr lang="en-US" sz="1800" b="1" dirty="0">
+                <a:solidFill>
+                  <a:srgbClr val="186A3B"/>
+                </a:solidFill>
+                <a:latin typeface="Arial" pitchFamily="34" charset="0"/>
+                <a:ea typeface="Arial" pitchFamily="34" charset="-122"/>
+                <a:cs typeface="Arial" pitchFamily="34" charset="-120"/>
+              </a:rPr>
+              <a:t>Minimumprijs</a:t>
+            </a:r>
+            <a:endParaRPr lang="en-US" sz="1800" dirty="0"/>
           </a:p>
         </p:txBody>
       </p:sp>
@@ -5735,8 +8233,8 @@
         </p:nvSpPr>
         <p:spPr>
           <a:xfrm>
-            <a:off x="640080" y="1554480"/>
-            <a:ext cx="3611880" cy="2606040"/>
+            <a:off x="640080" y="1463040"/>
+            <a:ext cx="3611880" cy="2926080"/>
           </a:xfrm>
           <a:prstGeom prst="rect">
             <a:avLst/>
@@ -5745,136 +8243,120 @@
           <a:ln/>
         </p:spPr>
         <p:txBody>
-          <a:bodyPr wrap="square" rtlCol="0" anchor="t"/>
-          <a:lstStyle/>
+          <a:bodyPr wrap="square" lIns="0" tIns="0" rIns="0" bIns="0" rtlCol="0" anchor="t"/>
+          <a:lstStyle/>
+          <a:p>
+            <a:pPr algn="l" marL="342900" indent="-342900">
+              <a:lnSpc>
+                <a:spcPct val="120000"/>
+              </a:lnSpc>
+              <a:buSzPct val="100000"/>
+              <a:buChar char="■"/>
+            </a:pPr>
+            <a:r>
+              <a:rPr lang="en-US" sz="1300" b="1" dirty="0">
+                <a:solidFill>
+                  <a:srgbClr val="186A3B"/>
+                </a:solidFill>
+                <a:latin typeface="Arial" pitchFamily="34" charset="0"/>
+                <a:ea typeface="Arial" pitchFamily="34" charset="-122"/>
+                <a:cs typeface="Arial" pitchFamily="34" charset="-120"/>
+              </a:rPr>
+              <a:t>Pmin &gt; P*  → BINDEND</a:t>
+            </a:r>
+            <a:endParaRPr lang="en-US" sz="1300" dirty="0"/>
+          </a:p>
+          <a:p>
+            <a:pPr algn="l" marL="342900" indent="-342900">
+              <a:lnSpc>
+                <a:spcPct val="120000"/>
+              </a:lnSpc>
+              <a:buSzPct val="100000"/>
+              <a:buChar char="■"/>
+            </a:pPr>
+            <a:r>
+              <a:rPr lang="en-US" sz="1300" dirty="0">
+                <a:solidFill>
+                  <a:srgbClr val="2D3748"/>
+                </a:solidFill>
+                <a:latin typeface="Arial" pitchFamily="34" charset="0"/>
+                <a:ea typeface="Arial" pitchFamily="34" charset="-122"/>
+                <a:cs typeface="Arial" pitchFamily="34" charset="-120"/>
+              </a:rPr>
+              <a:t>Prijs kan niet zakken naar P*</a:t>
+            </a:r>
+            <a:endParaRPr lang="en-US" sz="1300" dirty="0"/>
+          </a:p>
+          <a:p>
+            <a:pPr algn="l" marL="342900" indent="-342900">
+              <a:lnSpc>
+                <a:spcPct val="120000"/>
+              </a:lnSpc>
+              <a:buSzPct val="100000"/>
+              <a:buChar char="■"/>
+            </a:pPr>
+            <a:r>
+              <a:rPr lang="en-US" sz="1300" b="1" dirty="0">
+                <a:solidFill>
+                  <a:srgbClr val="922B21"/>
+                </a:solidFill>
+                <a:latin typeface="Arial" pitchFamily="34" charset="0"/>
+                <a:ea typeface="Arial" pitchFamily="34" charset="-122"/>
+                <a:cs typeface="Arial" pitchFamily="34" charset="-120"/>
+              </a:rPr>
+              <a:t>→ aanbodoverschot</a:t>
+            </a:r>
+            <a:endParaRPr lang="en-US" sz="1300" dirty="0"/>
+          </a:p>
           <a:p>
             <a:pPr algn="l" indent="0" marL="0">
               <a:lnSpc>
-                <a:spcPct val="115000"/>
+                <a:spcPct val="120000"/>
               </a:lnSpc>
               <a:buNone/>
             </a:pPr>
-            <a:r>
-              <a:rPr lang="en-US" sz="1400" b="1" dirty="0">
-                <a:solidFill>
-                  <a:srgbClr val="2D3748"/>
-                </a:solidFill>
-                <a:latin typeface="Arial" pitchFamily="34" charset="0"/>
-                <a:ea typeface="Arial" pitchFamily="34" charset="-122"/>
-                <a:cs typeface="Arial" pitchFamily="34" charset="-120"/>
-              </a:rPr>
-              <a:t>Subsidie = het tegenovergestelde van accijns
-</a:t>
-            </a:r>
+            <a:endParaRPr lang="en-US" sz="1300" dirty="0"/>
+          </a:p>
+          <a:p>
             <a:pPr algn="l" marL="342900" indent="-342900">
               <a:lnSpc>
-                <a:spcPct val="115000"/>
+                <a:spcPct val="120000"/>
               </a:lnSpc>
               <a:buSzPct val="100000"/>
-              <a:buChar char="•"/>
-            </a:pPr>
-            <a:r>
-              <a:rPr lang="en-US" sz="1400" dirty="0">
-                <a:solidFill>
-                  <a:srgbClr val="2D3748"/>
-                </a:solidFill>
-                <a:latin typeface="Arial" pitchFamily="34" charset="0"/>
-                <a:ea typeface="Arial" pitchFamily="34" charset="-122"/>
-                <a:cs typeface="Arial" pitchFamily="34" charset="-120"/>
-              </a:rPr>
-              <a:t>De aanbodlijn verschuift naar beneden</a:t>
-            </a:r>
-            <a:pPr algn="l" marL="342900" indent="-342900">
+              <a:buChar char="■"/>
+            </a:pPr>
+            <a:r>
+              <a:rPr lang="en-US" sz="1300" i="1" dirty="0">
+                <a:solidFill>
+                  <a:srgbClr val="718096"/>
+                </a:solidFill>
+                <a:latin typeface="Arial" pitchFamily="34" charset="0"/>
+                <a:ea typeface="Arial" pitchFamily="34" charset="-122"/>
+                <a:cs typeface="Arial" pitchFamily="34" charset="-120"/>
+              </a:rPr>
+              <a:t>Pmin &lt; P*  → niet bindend</a:t>
+            </a:r>
+            <a:endParaRPr lang="en-US" sz="1300" dirty="0"/>
+          </a:p>
+          <a:p>
+            <a:pPr algn="l" indent="0" marL="0">
               <a:lnSpc>
-                <a:spcPct val="115000"/>
+                <a:spcPct val="120000"/>
               </a:lnSpc>
-              <a:buSzPct val="100000"/>
-              <a:buChar char="•"/>
-            </a:pPr>
-            <a:endParaRPr lang="en-US" sz="1400" dirty="0"/>
-          </a:p>
-          <a:p>
-            <a:pPr algn="l" marL="342900" indent="-342900">
-              <a:lnSpc>
-                <a:spcPct val="115000"/>
-              </a:lnSpc>
-              <a:buSzPct val="100000"/>
-              <a:buChar char="•"/>
-            </a:pPr>
-            <a:r>
-              <a:rPr lang="en-US" sz="1400" dirty="0">
-                <a:solidFill>
-                  <a:srgbClr val="2D3748"/>
-                </a:solidFill>
-                <a:latin typeface="Arial" pitchFamily="34" charset="0"/>
-                <a:ea typeface="Arial" pitchFamily="34" charset="-122"/>
-                <a:cs typeface="Arial" pitchFamily="34" charset="-120"/>
-              </a:rPr>
-              <a:t>De prijs daalt</a:t>
-            </a:r>
-            <a:endParaRPr lang="en-US" sz="1400" dirty="0"/>
-          </a:p>
-          <a:p>
-            <a:pPr algn="l" marL="342900" indent="-342900">
-              <a:lnSpc>
-                <a:spcPct val="115000"/>
-              </a:lnSpc>
-              <a:buSzPct val="100000"/>
-              <a:buChar char="•"/>
-            </a:pPr>
-            <a:endParaRPr lang="en-US" sz="1400" dirty="0"/>
-          </a:p>
-          <a:p>
-            <a:pPr algn="l" marL="342900" indent="-342900">
-              <a:lnSpc>
-                <a:spcPct val="115000"/>
-              </a:lnSpc>
-              <a:buSzPct val="100000"/>
-              <a:buChar char="•"/>
-            </a:pPr>
-            <a:r>
-              <a:rPr lang="en-US" sz="1400" dirty="0">
-                <a:solidFill>
-                  <a:srgbClr val="2D3748"/>
-                </a:solidFill>
-                <a:latin typeface="Arial" pitchFamily="34" charset="0"/>
-                <a:ea typeface="Arial" pitchFamily="34" charset="-122"/>
-                <a:cs typeface="Arial" pitchFamily="34" charset="-120"/>
-              </a:rPr>
-              <a:t>De hoeveelheid stijgt</a:t>
-            </a:r>
-            <a:endParaRPr lang="en-US" sz="1400" dirty="0"/>
-          </a:p>
-          <a:p>
-            <a:pPr algn="l" marL="342900" indent="-342900">
-              <a:lnSpc>
-                <a:spcPct val="115000"/>
-              </a:lnSpc>
-              <a:buSzPct val="100000"/>
-              <a:buChar char="•"/>
-            </a:pPr>
-            <a:endParaRPr lang="en-US" sz="1400" dirty="0"/>
-          </a:p>
-          <a:p>
-            <a:pPr algn="l" marL="342900" indent="-342900">
-              <a:lnSpc>
-                <a:spcPct val="115000"/>
-              </a:lnSpc>
-              <a:buSzPct val="100000"/>
-              <a:buChar char="•"/>
-            </a:pPr>
-            <a:r>
-              <a:rPr lang="en-US" sz="1400" dirty="0">
-                <a:solidFill>
-                  <a:srgbClr val="2D3748"/>
-                </a:solidFill>
-                <a:latin typeface="Arial" pitchFamily="34" charset="0"/>
-                <a:ea typeface="Arial" pitchFamily="34" charset="-122"/>
-                <a:cs typeface="Arial" pitchFamily="34" charset="-120"/>
-              </a:rPr>
-              <a:t>De overheid betaalt het verschil</a:t>
-            </a:r>
-            <a:endParaRPr lang="en-US" sz="1400" dirty="0"/>
+              <a:buNone/>
+            </a:pPr>
+            <a:r>
+              <a:rPr lang="en-US" sz="1200" i="1" dirty="0">
+                <a:solidFill>
+                  <a:srgbClr val="718096"/>
+                </a:solidFill>
+                <a:latin typeface="Arial" pitchFamily="34" charset="0"/>
+                <a:ea typeface="Arial" pitchFamily="34" charset="-122"/>
+                <a:cs typeface="Arial" pitchFamily="34" charset="-120"/>
+              </a:rPr>
+              <a:t>Markt komt boven Pmin uit — geen effect</a:t>
+            </a:r>
+            <a:endParaRPr lang="en-US" sz="1300" dirty="0"/>
           </a:p>
         </p:txBody>
       </p:sp>
@@ -5886,12 +8368,12 @@
         </p:nvSpPr>
         <p:spPr>
           <a:xfrm>
-            <a:off x="4754880" y="1005840"/>
-            <a:ext cx="3931920" cy="3291840"/>
+            <a:off x="4754880" y="960120"/>
+            <a:ext cx="3931920" cy="3566160"/>
           </a:xfrm>
           <a:prstGeom prst="rect">
             <a:avLst>
-              <a:gd name="adj" fmla="val 1389"/>
+              <a:gd name="adj" fmla="val 1282"/>
             </a:avLst>
           </a:prstGeom>
           <a:solidFill>
@@ -5906,10 +8388,6 @@
             </a:outerShdw>
           </a:effectLst>
         </p:spPr>
-        <p:txBody>
-          <a:bodyPr/>
-          <a:p/>
-        </p:txBody>
       </p:sp>
       <p:sp>
         <p:nvSpPr>
@@ -5919,8 +8397,8 @@
         </p:nvSpPr>
         <p:spPr>
           <a:xfrm>
-            <a:off x="4754880" y="1005840"/>
-            <a:ext cx="54864" cy="3291840"/>
+            <a:off x="4754880" y="960120"/>
+            <a:ext cx="54864" cy="3566160"/>
           </a:xfrm>
           <a:prstGeom prst="rect">
             <a:avLst/>
@@ -5930,10 +8408,6 @@
           </a:solidFill>
           <a:ln/>
         </p:spPr>
-        <p:txBody>
-          <a:bodyPr/>
-          <a:p/>
-        </p:txBody>
       </p:sp>
       <p:sp>
         <p:nvSpPr>
@@ -5943,7 +8417,7 @@
         </p:nvSpPr>
         <p:spPr>
           <a:xfrm>
-            <a:off x="4937760" y="1143000"/>
+            <a:off x="4937760" y="1069848"/>
             <a:ext cx="3611880" cy="365760"/>
           </a:xfrm>
           <a:prstGeom prst="rect">
@@ -5953,24 +8427,24 @@
           <a:ln/>
         </p:spPr>
         <p:txBody>
-          <a:bodyPr wrap="square" rtlCol="0" anchor="t"/>
+          <a:bodyPr wrap="square" lIns="0" tIns="0" rIns="0" bIns="0" rtlCol="0" anchor="t"/>
           <a:lstStyle/>
           <a:p>
             <a:pPr indent="0" marL="0">
               <a:buNone/>
             </a:pPr>
             <a:r>
-              <a:rPr lang="en-US" sz="2000" b="1" dirty="0">
-                <a:solidFill>
-                  <a:srgbClr val="1A5276"/>
-                </a:solidFill>
-                <a:latin typeface="Arial" pitchFamily="34" charset="0"/>
-                <a:ea typeface="Arial" pitchFamily="34" charset="-122"/>
-                <a:cs typeface="Arial" pitchFamily="34" charset="-120"/>
-              </a:rPr>
-              <a:t>Surpluseffecten</a:t>
-            </a:r>
-            <a:endParaRPr lang="en-US" sz="2000" dirty="0"/>
+              <a:rPr lang="en-US" sz="1800" b="1" dirty="0">
+                <a:solidFill>
+                  <a:srgbClr val="154360"/>
+                </a:solidFill>
+                <a:latin typeface="Arial" pitchFamily="34" charset="0"/>
+                <a:ea typeface="Arial" pitchFamily="34" charset="-122"/>
+                <a:cs typeface="Arial" pitchFamily="34" charset="-120"/>
+              </a:rPr>
+              <a:t>Maximumprijs</a:t>
+            </a:r>
+            <a:endParaRPr lang="en-US" sz="1800" dirty="0"/>
           </a:p>
         </p:txBody>
       </p:sp>
@@ -5982,8 +8456,8 @@
         </p:nvSpPr>
         <p:spPr>
           <a:xfrm>
-            <a:off x="4937760" y="1554480"/>
-            <a:ext cx="3611880" cy="2606040"/>
+            <a:off x="4937760" y="1463040"/>
+            <a:ext cx="3611880" cy="2926080"/>
           </a:xfrm>
           <a:prstGeom prst="rect">
             <a:avLst/>
@@ -5992,125 +8466,120 @@
           <a:ln/>
         </p:spPr>
         <p:txBody>
-          <a:bodyPr wrap="square" rtlCol="0" anchor="t"/>
-          <a:lstStyle/>
+          <a:bodyPr wrap="square" lIns="0" tIns="0" rIns="0" bIns="0" rtlCol="0" anchor="t"/>
+          <a:lstStyle/>
+          <a:p>
+            <a:pPr algn="l" marL="342900" indent="-342900">
+              <a:lnSpc>
+                <a:spcPct val="120000"/>
+              </a:lnSpc>
+              <a:buSzPct val="100000"/>
+              <a:buChar char="■"/>
+            </a:pPr>
+            <a:r>
+              <a:rPr lang="en-US" sz="1300" b="1" dirty="0">
+                <a:solidFill>
+                  <a:srgbClr val="154360"/>
+                </a:solidFill>
+                <a:latin typeface="Arial" pitchFamily="34" charset="0"/>
+                <a:ea typeface="Arial" pitchFamily="34" charset="-122"/>
+                <a:cs typeface="Arial" pitchFamily="34" charset="-120"/>
+              </a:rPr>
+              <a:t>Pmax &lt; P*  → BINDEND</a:t>
+            </a:r>
+            <a:endParaRPr lang="en-US" sz="1300" dirty="0"/>
+          </a:p>
+          <a:p>
+            <a:pPr algn="l" marL="342900" indent="-342900">
+              <a:lnSpc>
+                <a:spcPct val="120000"/>
+              </a:lnSpc>
+              <a:buSzPct val="100000"/>
+              <a:buChar char="■"/>
+            </a:pPr>
+            <a:r>
+              <a:rPr lang="en-US" sz="1300" dirty="0">
+                <a:solidFill>
+                  <a:srgbClr val="2D3748"/>
+                </a:solidFill>
+                <a:latin typeface="Arial" pitchFamily="34" charset="0"/>
+                <a:ea typeface="Arial" pitchFamily="34" charset="-122"/>
+                <a:cs typeface="Arial" pitchFamily="34" charset="-120"/>
+              </a:rPr>
+              <a:t>Prijs kan niet stijgen naar P*</a:t>
+            </a:r>
+            <a:endParaRPr lang="en-US" sz="1300" dirty="0"/>
+          </a:p>
+          <a:p>
+            <a:pPr algn="l" marL="342900" indent="-342900">
+              <a:lnSpc>
+                <a:spcPct val="120000"/>
+              </a:lnSpc>
+              <a:buSzPct val="100000"/>
+              <a:buChar char="■"/>
+            </a:pPr>
+            <a:r>
+              <a:rPr lang="en-US" sz="1300" b="1" dirty="0">
+                <a:solidFill>
+                  <a:srgbClr val="922B21"/>
+                </a:solidFill>
+                <a:latin typeface="Arial" pitchFamily="34" charset="0"/>
+                <a:ea typeface="Arial" pitchFamily="34" charset="-122"/>
+                <a:cs typeface="Arial" pitchFamily="34" charset="-120"/>
+              </a:rPr>
+              <a:t>→ vraagoverschot</a:t>
+            </a:r>
+            <a:endParaRPr lang="en-US" sz="1300" dirty="0"/>
+          </a:p>
           <a:p>
             <a:pPr algn="l" indent="0" marL="0">
               <a:lnSpc>
-                <a:spcPct val="115000"/>
+                <a:spcPct val="120000"/>
               </a:lnSpc>
               <a:buNone/>
             </a:pPr>
-            <a:r>
-              <a:rPr lang="en-US" sz="1400" b="1" dirty="0">
-                <a:solidFill>
-                  <a:srgbClr val="1E8449"/>
-                </a:solidFill>
-                <a:latin typeface="Arial" pitchFamily="34" charset="0"/>
-                <a:ea typeface="Arial" pitchFamily="34" charset="-122"/>
-                <a:cs typeface="Arial" pitchFamily="34" charset="-120"/>
-              </a:rPr>
-              <a:t>CS stijgt</a:t>
-            </a:r>
+            <a:endParaRPr lang="en-US" sz="1300" dirty="0"/>
+          </a:p>
+          <a:p>
+            <a:pPr algn="l" marL="342900" indent="-342900">
+              <a:lnSpc>
+                <a:spcPct val="120000"/>
+              </a:lnSpc>
+              <a:buSzPct val="100000"/>
+              <a:buChar char="■"/>
+            </a:pPr>
+            <a:r>
+              <a:rPr lang="en-US" sz="1300" i="1" dirty="0">
+                <a:solidFill>
+                  <a:srgbClr val="718096"/>
+                </a:solidFill>
+                <a:latin typeface="Arial" pitchFamily="34" charset="0"/>
+                <a:ea typeface="Arial" pitchFamily="34" charset="-122"/>
+                <a:cs typeface="Arial" pitchFamily="34" charset="-120"/>
+              </a:rPr>
+              <a:t>Pmax &gt; P*  → niet bindend</a:t>
+            </a:r>
+            <a:endParaRPr lang="en-US" sz="1300" dirty="0"/>
+          </a:p>
+          <a:p>
             <a:pPr algn="l" indent="0" marL="0">
               <a:lnSpc>
-                <a:spcPct val="115000"/>
+                <a:spcPct val="120000"/>
               </a:lnSpc>
               <a:buNone/>
             </a:pPr>
             <a:r>
-              <a:rPr lang="en-US" sz="1400" dirty="0">
-                <a:solidFill>
-                  <a:srgbClr val="2D3748"/>
-                </a:solidFill>
-                <a:latin typeface="Arial" pitchFamily="34" charset="0"/>
-                <a:ea typeface="Arial" pitchFamily="34" charset="-122"/>
-                <a:cs typeface="Arial" pitchFamily="34" charset="-120"/>
-              </a:rPr>
-              <a:t>
-Consumenten betalen minder
-</a:t>
-            </a:r>
-            <a:pPr algn="l" indent="0" marL="0">
-              <a:lnSpc>
-                <a:spcPct val="115000"/>
-              </a:lnSpc>
-              <a:buNone/>
-            </a:pPr>
-            <a:r>
-              <a:rPr lang="en-US" sz="1400" b="1" dirty="0">
-                <a:solidFill>
-                  <a:srgbClr val="1E8449"/>
-                </a:solidFill>
-                <a:latin typeface="Arial" pitchFamily="34" charset="0"/>
-                <a:ea typeface="Arial" pitchFamily="34" charset="-122"/>
-                <a:cs typeface="Arial" pitchFamily="34" charset="-120"/>
-              </a:rPr>
-              <a:t>PS stijgt</a:t>
-            </a:r>
-            <a:pPr algn="l" indent="0" marL="0">
-              <a:lnSpc>
-                <a:spcPct val="115000"/>
-              </a:lnSpc>
-              <a:buNone/>
-            </a:pPr>
-            <a:r>
-              <a:rPr lang="en-US" sz="1400" dirty="0">
-                <a:solidFill>
-                  <a:srgbClr val="2D3748"/>
-                </a:solidFill>
-                <a:latin typeface="Arial" pitchFamily="34" charset="0"/>
-                <a:ea typeface="Arial" pitchFamily="34" charset="-122"/>
-                <a:cs typeface="Arial" pitchFamily="34" charset="-120"/>
-              </a:rPr>
-              <a:t>
-Producenten ontvangen meer per eenheid
-</a:t>
-            </a:r>
-            <a:pPr algn="l" indent="0" marL="0">
-              <a:lnSpc>
-                <a:spcPct val="115000"/>
-              </a:lnSpc>
-              <a:buNone/>
-            </a:pPr>
-            <a:r>
-              <a:rPr lang="en-US" sz="1400" b="1" dirty="0">
-                <a:solidFill>
-                  <a:srgbClr val="D9534F"/>
-                </a:solidFill>
-                <a:latin typeface="Arial" pitchFamily="34" charset="0"/>
-                <a:ea typeface="Arial" pitchFamily="34" charset="-122"/>
-                <a:cs typeface="Arial" pitchFamily="34" charset="-120"/>
-              </a:rPr>
-              <a:t>Overheidsuitgaven</a:t>
-            </a:r>
-            <a:pPr algn="l" indent="0" marL="0">
-              <a:lnSpc>
-                <a:spcPct val="115000"/>
-              </a:lnSpc>
-              <a:buNone/>
-            </a:pPr>
-            <a:endParaRPr lang="en-US" sz="1400" dirty="0"/>
-          </a:p>
-          <a:p>
-            <a:pPr algn="l" indent="0" marL="0">
-              <a:lnSpc>
-                <a:spcPct val="115000"/>
-              </a:lnSpc>
-              <a:buNone/>
-            </a:pPr>
-            <a:r>
-              <a:rPr lang="en-US" sz="1400" dirty="0">
-                <a:solidFill>
-                  <a:srgbClr val="2D3748"/>
-                </a:solidFill>
-                <a:latin typeface="Arial" pitchFamily="34" charset="0"/>
-                <a:ea typeface="Arial" pitchFamily="34" charset="-122"/>
-                <a:cs typeface="Arial" pitchFamily="34" charset="-120"/>
-              </a:rPr>
-              <a:t>Kosten: subsidie × hoeveelheid</a:t>
-            </a:r>
-            <a:endParaRPr lang="en-US" sz="1400" dirty="0"/>
+              <a:rPr lang="en-US" sz="1200" i="1" dirty="0">
+                <a:solidFill>
+                  <a:srgbClr val="718096"/>
+                </a:solidFill>
+                <a:latin typeface="Arial" pitchFamily="34" charset="0"/>
+                <a:ea typeface="Arial" pitchFamily="34" charset="-122"/>
+                <a:cs typeface="Arial" pitchFamily="34" charset="-120"/>
+              </a:rPr>
+              <a:t>Markt komt onder Pmax uit — geen effect</a:t>
+            </a:r>
+            <a:endParaRPr lang="en-US" sz="1300" dirty="0"/>
           </a:p>
         </p:txBody>
       </p:sp>
